--- a/presentation/output/AETHERIX_Presentation.pptx
+++ b/presentation/output/AETHERIX_Presentation.pptx
@@ -30,6 +30,8 @@
     <p:sldId id="278" r:id="rId29"/>
     <p:sldId id="279" r:id="rId30"/>
     <p:sldId id="280" r:id="rId31"/>
+    <p:sldId id="281" r:id="rId32"/>
+    <p:sldId id="282" r:id="rId33"/>
   </p:sldIdLst>
   <p:sldSz cx="12191695" cy="6858000" type="screen4x3"/>
   <p:notesSz cx="6858000" cy="9144000"/>
@@ -4437,7 +4439,7 @@
               </a:defRPr>
             </a:pPr>
             <a:r>
-              <a:t>10 / 25</a:t>
+              <a:t>10 / 27</a:t>
             </a:r>
           </a:p>
         </p:txBody>
@@ -5486,7 +5488,7 @@
               </a:defRPr>
             </a:pPr>
             <a:r>
-              <a:t>11 / 25</a:t>
+              <a:t>11 / 27</a:t>
             </a:r>
           </a:p>
         </p:txBody>
@@ -5691,7 +5693,7 @@
               </a:defRPr>
             </a:pPr>
             <a:r>
-              <a:t>12 / 25</a:t>
+              <a:t>12 / 27</a:t>
             </a:r>
           </a:p>
         </p:txBody>
@@ -6546,7 +6548,7 @@
               </a:defRPr>
             </a:pPr>
             <a:r>
-              <a:t>13 / 25</a:t>
+              <a:t>13 / 27</a:t>
             </a:r>
           </a:p>
         </p:txBody>
@@ -7632,7 +7634,7 @@
               </a:defRPr>
             </a:pPr>
             <a:r>
-              <a:t>14 / 25</a:t>
+              <a:t>14 / 27</a:t>
             </a:r>
           </a:p>
         </p:txBody>
@@ -8400,7 +8402,7 @@
               </a:defRPr>
             </a:pPr>
             <a:r>
-              <a:t>15 / 25</a:t>
+              <a:t>15 / 27</a:t>
             </a:r>
           </a:p>
         </p:txBody>
@@ -9266,7 +9268,7 @@
               </a:defRPr>
             </a:pPr>
             <a:r>
-              <a:t>16 / 25</a:t>
+              <a:t>16 / 27</a:t>
             </a:r>
           </a:p>
         </p:txBody>
@@ -10351,7 +10353,7 @@
               </a:defRPr>
             </a:pPr>
             <a:r>
-              <a:t>17 / 25</a:t>
+              <a:t>17 / 27</a:t>
             </a:r>
           </a:p>
         </p:txBody>
@@ -10393,8 +10395,8 @@
         </p:nvSpPr>
         <p:spPr>
           <a:xfrm>
-            <a:off x="548640" y="365760"/>
-            <a:ext cx="8229600" cy="548640"/>
+            <a:off x="548640" y="274320"/>
+            <a:ext cx="10058400" cy="548640"/>
           </a:xfrm>
           <a:prstGeom prst="rect">
             <a:avLst/>
@@ -10402,20 +10404,21 @@
           <a:noFill/>
         </p:spPr>
         <p:txBody>
-          <a:bodyPr wrap="none">
+          <a:bodyPr wrap="square">
             <a:spAutoFit/>
           </a:bodyPr>
           <a:lstStyle/>
           <a:p>
             <a:pPr algn="l">
-              <a:defRPr sz="2800" b="1">
+              <a:defRPr sz="3000" b="1">
                 <a:solidFill>
                   <a:srgbClr val="FFFFFF"/>
                 </a:solidFill>
-              </a:defRPr>
-            </a:pPr>
-            <a:r>
-              <a:t>END-TO-END MISSION</a:t>
+                <a:latin typeface="Calibri"/>
+              </a:defRPr>
+            </a:pPr>
+            <a:r>
+              <a:t>RADIATION-HARDENED COMPUTING</a:t>
             </a:r>
           </a:p>
         </p:txBody>
@@ -10428,8 +10431,8 @@
         </p:nvSpPr>
         <p:spPr>
           <a:xfrm>
-            <a:off x="548640" y="868680"/>
-            <a:ext cx="8229600" cy="365760"/>
+            <a:off x="548640" y="822960"/>
+            <a:ext cx="10058400" cy="365760"/>
           </a:xfrm>
           <a:prstGeom prst="rect">
             <a:avLst/>
@@ -10437,40 +10440,482 @@
           <a:noFill/>
         </p:spPr>
         <p:txBody>
-          <a:bodyPr wrap="none">
+          <a:bodyPr wrap="square">
             <a:spAutoFit/>
           </a:bodyPr>
           <a:lstStyle/>
           <a:p>
             <a:pPr algn="l">
-              <a:defRPr sz="1400">
+              <a:defRPr sz="1500" b="0">
                 <a:solidFill>
                   <a:srgbClr val="00D4AA"/>
                 </a:solidFill>
-              </a:defRPr>
-            </a:pPr>
-            <a:r>
-              <a:t>Mars Surface → Earth</a:t>
-            </a:r>
-          </a:p>
-        </p:txBody>
-      </p:sp>
-      <p:sp>
-        <p:nvSpPr>
-          <p:cNvPr id="4" name="Rounded Rectangle 3"/>
+                <a:latin typeface="Calibri"/>
+              </a:defRPr>
+            </a:pPr>
+            <a:r>
+              <a:t>Surviving SEUs, latchup and total dose on the way to Mars</a:t>
+            </a:r>
+          </a:p>
+        </p:txBody>
+      </p:sp>
+      <p:sp>
+        <p:nvSpPr>
+          <p:cNvPr id="4" name="Rectangle 3"/>
           <p:cNvSpPr/>
           <p:nvPr/>
         </p:nvSpPr>
         <p:spPr>
           <a:xfrm>
-            <a:off x="365760" y="365760"/>
-            <a:ext cx="822960" cy="411480"/>
+            <a:off x="548640" y="1234440"/>
+            <a:ext cx="2286000" cy="38100"/>
+          </a:xfrm>
+          <a:prstGeom prst="rect">
+            <a:avLst/>
+          </a:prstGeom>
+          <a:solidFill>
+            <a:srgbClr val="FF4D4D"/>
+          </a:solidFill>
+          <a:ln>
+            <a:noFill/>
+          </a:ln>
+          <a:effectLst/>
+        </p:spPr>
+        <p:style>
+          <a:lnRef idx="1">
+            <a:schemeClr val="accent1"/>
+          </a:lnRef>
+          <a:fillRef idx="3">
+            <a:schemeClr val="accent1"/>
+          </a:fillRef>
+          <a:effectRef idx="2">
+            <a:schemeClr val="accent1"/>
+          </a:effectRef>
+          <a:fontRef idx="minor">
+            <a:schemeClr val="lt1"/>
+          </a:fontRef>
+        </p:style>
+        <p:txBody>
+          <a:bodyPr rtlCol="0" anchor="ctr"/>
+          <a:lstStyle/>
+          <a:p>
+            <a:pPr algn="ctr"/>
+          </a:p>
+        </p:txBody>
+      </p:sp>
+      <p:graphicFrame>
+        <p:nvGraphicFramePr>
+          <p:cNvPr id="5" name="Table 4"/>
+          <p:cNvGraphicFramePr>
+            <a:graphicFrameLocks noGrp="1"/>
+          </p:cNvGraphicFramePr>
+          <p:nvPr/>
+        </p:nvGraphicFramePr>
+        <p:xfrm>
+          <a:off x="274320" y="1463040"/>
+          <a:ext cx="5852160" cy="2194560"/>
+        </p:xfrm>
+        <a:graphic>
+          <a:graphicData uri="http://schemas.openxmlformats.org/drawingml/2006/table">
+            <a:tbl>
+              <a:tblPr firstRow="1" bandRow="1">
+                <a:tableStyleId>{5C22544A-7EE6-4342-B048-85BDC9FD1C3A}</a:tableStyleId>
+              </a:tblPr>
+              <a:tblGrid>
+                <a:gridCol w="1950720"/>
+                <a:gridCol w="1950720"/>
+                <a:gridCol w="1950720"/>
+              </a:tblGrid>
+              <a:tr h="438912">
+                <a:tc>
+                  <a:txBody>
+                    <a:bodyPr/>
+                    <a:lstStyle/>
+                    <a:p>
+                      <a:pPr algn="ctr">
+                        <a:defRPr b="1" sz="1200">
+                          <a:solidFill>
+                            <a:srgbClr val="FFFFFF"/>
+                          </a:solidFill>
+                          <a:latin typeface="Calibri"/>
+                        </a:defRPr>
+                      </a:pPr>
+                      <a:r>
+                        <a:t>Effect</a:t>
+                      </a:r>
+                    </a:p>
+                  </a:txBody>
+                  <a:tcPr anchor="ctr" marL="73152" marR="73152" marT="36576" marB="36576">
+                    <a:solidFill>
+                      <a:srgbClr val="FF4D4D"/>
+                    </a:solidFill>
+                  </a:tcPr>
+                </a:tc>
+                <a:tc>
+                  <a:txBody>
+                    <a:bodyPr/>
+                    <a:lstStyle/>
+                    <a:p>
+                      <a:pPr algn="ctr">
+                        <a:defRPr b="1" sz="1200">
+                          <a:solidFill>
+                            <a:srgbClr val="FFFFFF"/>
+                          </a:solidFill>
+                          <a:latin typeface="Calibri"/>
+                        </a:defRPr>
+                      </a:pPr>
+                      <a:r>
+                        <a:t>What it does</a:t>
+                      </a:r>
+                    </a:p>
+                  </a:txBody>
+                  <a:tcPr anchor="ctr" marL="73152" marR="73152" marT="36576" marB="36576">
+                    <a:solidFill>
+                      <a:srgbClr val="FF4D4D"/>
+                    </a:solidFill>
+                  </a:tcPr>
+                </a:tc>
+                <a:tc>
+                  <a:txBody>
+                    <a:bodyPr/>
+                    <a:lstStyle/>
+                    <a:p>
+                      <a:pPr algn="ctr">
+                        <a:defRPr b="1" sz="1200">
+                          <a:solidFill>
+                            <a:srgbClr val="FFFFFF"/>
+                          </a:solidFill>
+                          <a:latin typeface="Calibri"/>
+                        </a:defRPr>
+                      </a:pPr>
+                      <a:r>
+                        <a:t>Mitigation</a:t>
+                      </a:r>
+                    </a:p>
+                  </a:txBody>
+                  <a:tcPr anchor="ctr" marL="73152" marR="73152" marT="36576" marB="36576">
+                    <a:solidFill>
+                      <a:srgbClr val="FF4D4D"/>
+                    </a:solidFill>
+                  </a:tcPr>
+                </a:tc>
+              </a:tr>
+              <a:tr h="438912">
+                <a:tc>
+                  <a:txBody>
+                    <a:bodyPr/>
+                    <a:lstStyle/>
+                    <a:p>
+                      <a:pPr>
+                        <a:defRPr sz="1100">
+                          <a:solidFill>
+                            <a:srgbClr val="B0B8CC"/>
+                          </a:solidFill>
+                          <a:latin typeface="Calibri"/>
+                        </a:defRPr>
+                      </a:pPr>
+                      <a:r>
+                        <a:t>SEU</a:t>
+                      </a:r>
+                    </a:p>
+                  </a:txBody>
+                  <a:tcPr anchor="ctr" marL="73152" marR="73152" marT="36576" marB="36576">
+                    <a:solidFill>
+                      <a:srgbClr val="141B2D"/>
+                    </a:solidFill>
+                  </a:tcPr>
+                </a:tc>
+                <a:tc>
+                  <a:txBody>
+                    <a:bodyPr/>
+                    <a:lstStyle/>
+                    <a:p>
+                      <a:pPr>
+                        <a:defRPr sz="1100">
+                          <a:solidFill>
+                            <a:srgbClr val="B0B8CC"/>
+                          </a:solidFill>
+                          <a:latin typeface="Calibri"/>
+                        </a:defRPr>
+                      </a:pPr>
+                      <a:r>
+                        <a:t>Single bit flip</a:t>
+                      </a:r>
+                    </a:p>
+                  </a:txBody>
+                  <a:tcPr anchor="ctr" marL="73152" marR="73152" marT="36576" marB="36576">
+                    <a:solidFill>
+                      <a:srgbClr val="141B2D"/>
+                    </a:solidFill>
+                  </a:tcPr>
+                </a:tc>
+                <a:tc>
+                  <a:txBody>
+                    <a:bodyPr/>
+                    <a:lstStyle/>
+                    <a:p>
+                      <a:pPr>
+                        <a:defRPr sz="1100">
+                          <a:solidFill>
+                            <a:srgbClr val="B0B8CC"/>
+                          </a:solidFill>
+                          <a:latin typeface="Calibri"/>
+                        </a:defRPr>
+                      </a:pPr>
+                      <a:r>
+                        <a:t>SECDED ECC</a:t>
+                      </a:r>
+                    </a:p>
+                  </a:txBody>
+                  <a:tcPr anchor="ctr" marL="73152" marR="73152" marT="36576" marB="36576">
+                    <a:solidFill>
+                      <a:srgbClr val="141B2D"/>
+                    </a:solidFill>
+                  </a:tcPr>
+                </a:tc>
+              </a:tr>
+              <a:tr h="438912">
+                <a:tc>
+                  <a:txBody>
+                    <a:bodyPr/>
+                    <a:lstStyle/>
+                    <a:p>
+                      <a:pPr>
+                        <a:defRPr sz="1100">
+                          <a:solidFill>
+                            <a:srgbClr val="B0B8CC"/>
+                          </a:solidFill>
+                          <a:latin typeface="Calibri"/>
+                        </a:defRPr>
+                      </a:pPr>
+                      <a:r>
+                        <a:t>MBU</a:t>
+                      </a:r>
+                    </a:p>
+                  </a:txBody>
+                  <a:tcPr anchor="ctr" marL="73152" marR="73152" marT="36576" marB="36576">
+                    <a:solidFill>
+                      <a:srgbClr val="182236"/>
+                    </a:solidFill>
+                  </a:tcPr>
+                </a:tc>
+                <a:tc>
+                  <a:txBody>
+                    <a:bodyPr/>
+                    <a:lstStyle/>
+                    <a:p>
+                      <a:pPr>
+                        <a:defRPr sz="1100">
+                          <a:solidFill>
+                            <a:srgbClr val="B0B8CC"/>
+                          </a:solidFill>
+                          <a:latin typeface="Calibri"/>
+                        </a:defRPr>
+                      </a:pPr>
+                      <a:r>
+                        <a:t>Multi-bit flip (1 ion)</a:t>
+                      </a:r>
+                    </a:p>
+                  </a:txBody>
+                  <a:tcPr anchor="ctr" marL="73152" marR="73152" marT="36576" marB="36576">
+                    <a:solidFill>
+                      <a:srgbClr val="182236"/>
+                    </a:solidFill>
+                  </a:tcPr>
+                </a:tc>
+                <a:tc>
+                  <a:txBody>
+                    <a:bodyPr/>
+                    <a:lstStyle/>
+                    <a:p>
+                      <a:pPr>
+                        <a:defRPr sz="1100">
+                          <a:solidFill>
+                            <a:srgbClr val="B0B8CC"/>
+                          </a:solidFill>
+                          <a:latin typeface="Calibri"/>
+                        </a:defRPr>
+                      </a:pPr>
+                      <a:r>
+                        <a:t>Bit interleaving</a:t>
+                      </a:r>
+                    </a:p>
+                  </a:txBody>
+                  <a:tcPr anchor="ctr" marL="73152" marR="73152" marT="36576" marB="36576">
+                    <a:solidFill>
+                      <a:srgbClr val="182236"/>
+                    </a:solidFill>
+                  </a:tcPr>
+                </a:tc>
+              </a:tr>
+              <a:tr h="438912">
+                <a:tc>
+                  <a:txBody>
+                    <a:bodyPr/>
+                    <a:lstStyle/>
+                    <a:p>
+                      <a:pPr>
+                        <a:defRPr sz="1100">
+                          <a:solidFill>
+                            <a:srgbClr val="B0B8CC"/>
+                          </a:solidFill>
+                          <a:latin typeface="Calibri"/>
+                        </a:defRPr>
+                      </a:pPr>
+                      <a:r>
+                        <a:t>SEL</a:t>
+                      </a:r>
+                    </a:p>
+                  </a:txBody>
+                  <a:tcPr anchor="ctr" marL="73152" marR="73152" marT="36576" marB="36576">
+                    <a:solidFill>
+                      <a:srgbClr val="141B2D"/>
+                    </a:solidFill>
+                  </a:tcPr>
+                </a:tc>
+                <a:tc>
+                  <a:txBody>
+                    <a:bodyPr/>
+                    <a:lstStyle/>
+                    <a:p>
+                      <a:pPr>
+                        <a:defRPr sz="1100">
+                          <a:solidFill>
+                            <a:srgbClr val="B0B8CC"/>
+                          </a:solidFill>
+                          <a:latin typeface="Calibri"/>
+                        </a:defRPr>
+                      </a:pPr>
+                      <a:r>
+                        <a:t>Latchup (destructive)</a:t>
+                      </a:r>
+                    </a:p>
+                  </a:txBody>
+                  <a:tcPr anchor="ctr" marL="73152" marR="73152" marT="36576" marB="36576">
+                    <a:solidFill>
+                      <a:srgbClr val="141B2D"/>
+                    </a:solidFill>
+                  </a:tcPr>
+                </a:tc>
+                <a:tc>
+                  <a:txBody>
+                    <a:bodyPr/>
+                    <a:lstStyle/>
+                    <a:p>
+                      <a:pPr>
+                        <a:defRPr sz="1100">
+                          <a:solidFill>
+                            <a:srgbClr val="B0B8CC"/>
+                          </a:solidFill>
+                          <a:latin typeface="Calibri"/>
+                        </a:defRPr>
+                      </a:pPr>
+                      <a:r>
+                        <a:t>Current limit + power-cycle</a:t>
+                      </a:r>
+                    </a:p>
+                  </a:txBody>
+                  <a:tcPr anchor="ctr" marL="73152" marR="73152" marT="36576" marB="36576">
+                    <a:solidFill>
+                      <a:srgbClr val="141B2D"/>
+                    </a:solidFill>
+                  </a:tcPr>
+                </a:tc>
+              </a:tr>
+              <a:tr h="438912">
+                <a:tc>
+                  <a:txBody>
+                    <a:bodyPr/>
+                    <a:lstStyle/>
+                    <a:p>
+                      <a:pPr>
+                        <a:defRPr sz="1100">
+                          <a:solidFill>
+                            <a:srgbClr val="B0B8CC"/>
+                          </a:solidFill>
+                          <a:latin typeface="Calibri"/>
+                        </a:defRPr>
+                      </a:pPr>
+                      <a:r>
+                        <a:t>TID</a:t>
+                      </a:r>
+                    </a:p>
+                  </a:txBody>
+                  <a:tcPr anchor="ctr" marL="73152" marR="73152" marT="36576" marB="36576">
+                    <a:solidFill>
+                      <a:srgbClr val="182236"/>
+                    </a:solidFill>
+                  </a:tcPr>
+                </a:tc>
+                <a:tc>
+                  <a:txBody>
+                    <a:bodyPr/>
+                    <a:lstStyle/>
+                    <a:p>
+                      <a:pPr>
+                        <a:defRPr sz="1100">
+                          <a:solidFill>
+                            <a:srgbClr val="B0B8CC"/>
+                          </a:solidFill>
+                          <a:latin typeface="Calibri"/>
+                        </a:defRPr>
+                      </a:pPr>
+                      <a:r>
+                        <a:t>Cumulative dose</a:t>
+                      </a:r>
+                    </a:p>
+                  </a:txBody>
+                  <a:tcPr anchor="ctr" marL="73152" marR="73152" marT="36576" marB="36576">
+                    <a:solidFill>
+                      <a:srgbClr val="182236"/>
+                    </a:solidFill>
+                  </a:tcPr>
+                </a:tc>
+                <a:tc>
+                  <a:txBody>
+                    <a:bodyPr/>
+                    <a:lstStyle/>
+                    <a:p>
+                      <a:pPr>
+                        <a:defRPr sz="1100">
+                          <a:solidFill>
+                            <a:srgbClr val="B0B8CC"/>
+                          </a:solidFill>
+                          <a:latin typeface="Calibri"/>
+                        </a:defRPr>
+                      </a:pPr>
+                      <a:r>
+                        <a:t>Rad-hard parts (RAD750)</a:t>
+                      </a:r>
+                    </a:p>
+                  </a:txBody>
+                  <a:tcPr anchor="ctr" marL="73152" marR="73152" marT="36576" marB="36576">
+                    <a:solidFill>
+                      <a:srgbClr val="182236"/>
+                    </a:solidFill>
+                  </a:tcPr>
+                </a:tc>
+              </a:tr>
+            </a:tbl>
+          </a:graphicData>
+        </a:graphic>
+      </p:graphicFrame>
+      <p:sp>
+        <p:nvSpPr>
+          <p:cNvPr id="6" name="Rounded Rectangle 5"/>
+          <p:cNvSpPr/>
+          <p:nvPr/>
+        </p:nvSpPr>
+        <p:spPr>
+          <a:xfrm>
+            <a:off x="6400800" y="1463040"/>
+            <a:ext cx="5486400" cy="2194560"/>
           </a:xfrm>
           <a:prstGeom prst="roundRect">
             <a:avLst/>
           </a:prstGeom>
           <a:solidFill>
-            <a:srgbClr val="009EFF"/>
+            <a:srgbClr val="141B2D"/>
           </a:solidFill>
           <a:ln w="12700">
             <a:solidFill>
@@ -10494,42 +10939,122 @@
           </a:fontRef>
         </p:style>
         <p:txBody>
-          <a:bodyPr rtlCol="0" anchor="ctr" wrap="square"/>
+          <a:bodyPr rtlCol="0" anchor="ctr" wrap="square" lIns="137160" rIns="137160" tIns="91440" bIns="91440"/>
           <a:lstStyle/>
           <a:p>
             <a:pPr algn="ctr">
-              <a:defRPr sz="900" b="1">
-                <a:solidFill>
-                  <a:srgbClr val="FFFFFF"/>
-                </a:solidFill>
-              </a:defRPr>
-            </a:pPr>
-            <a:r>
-              <a:t>Rover</a:t>
-            </a:r>
-          </a:p>
-        </p:txBody>
-      </p:sp>
-      <p:sp>
-        <p:nvSpPr>
-          <p:cNvPr id="5" name="Right Arrow 4"/>
+              <a:defRPr sz="1600" b="1">
+                <a:solidFill>
+                  <a:srgbClr val="FF4D4D"/>
+                </a:solidFill>
+                <a:latin typeface="Calibri"/>
+              </a:defRPr>
+            </a:pPr>
+            <a:r>
+              <a:t>Defense-in-Depth Stack</a:t>
+            </a:r>
+          </a:p>
+          <a:p>
+            <a:pPr algn="l">
+              <a:spcBef>
+                <a:spcPts val="200"/>
+              </a:spcBef>
+              <a:spcAft>
+                <a:spcPts val="200"/>
+              </a:spcAft>
+              <a:defRPr sz="1300" b="0">
+                <a:solidFill>
+                  <a:srgbClr val="B0B8CC"/>
+                </a:solidFill>
+                <a:latin typeface="Calibri"/>
+              </a:defRPr>
+            </a:pPr>
+            <a:r>
+              <a:t>• TMR — triple replicas, majority vote (masks logic faults)</a:t>
+            </a:r>
+          </a:p>
+          <a:p>
+            <a:pPr algn="l">
+              <a:spcBef>
+                <a:spcPts val="200"/>
+              </a:spcBef>
+              <a:spcAft>
+                <a:spcPts val="200"/>
+              </a:spcAft>
+              <a:defRPr sz="1300" b="0">
+                <a:solidFill>
+                  <a:srgbClr val="B0B8CC"/>
+                </a:solidFill>
+                <a:latin typeface="Calibri"/>
+              </a:defRPr>
+            </a:pPr>
+            <a:r>
+              <a:t>• SECDED (39,32) ECC — correct 1 bit, detect 2</a:t>
+            </a:r>
+          </a:p>
+          <a:p>
+            <a:pPr algn="l">
+              <a:spcBef>
+                <a:spcPts val="200"/>
+              </a:spcBef>
+              <a:spcAft>
+                <a:spcPts val="200"/>
+              </a:spcAft>
+              <a:defRPr sz="1300" b="0">
+                <a:solidFill>
+                  <a:srgbClr val="B0B8CC"/>
+                </a:solidFill>
+                <a:latin typeface="Calibri"/>
+              </a:defRPr>
+            </a:pPr>
+            <a:r>
+              <a:t>• Scrubbing — rewrite memory before a 2nd upset accumulates</a:t>
+            </a:r>
+          </a:p>
+          <a:p>
+            <a:pPr algn="l">
+              <a:spcBef>
+                <a:spcPts val="200"/>
+              </a:spcBef>
+              <a:spcAft>
+                <a:spcPts val="200"/>
+              </a:spcAft>
+              <a:defRPr sz="1300" b="0">
+                <a:solidFill>
+                  <a:srgbClr val="B0B8CC"/>
+                </a:solidFill>
+                <a:latin typeface="Calibri"/>
+              </a:defRPr>
+            </a:pPr>
+            <a:r>
+              <a:t>• FDIR + watchdog — detect → isolate → reset → SAFE-MODE</a:t>
+            </a:r>
+          </a:p>
+        </p:txBody>
+      </p:sp>
+      <p:sp>
+        <p:nvSpPr>
+          <p:cNvPr id="7" name="Rounded Rectangle 6"/>
           <p:cNvSpPr/>
           <p:nvPr/>
         </p:nvSpPr>
         <p:spPr>
           <a:xfrm>
-            <a:off x="1595823" y="1691640"/>
-            <a:ext cx="182880" cy="137160"/>
-          </a:xfrm>
-          <a:prstGeom prst="rightArrow">
+            <a:off x="274320" y="4023360"/>
+            <a:ext cx="2743200" cy="1097280"/>
+          </a:xfrm>
+          <a:prstGeom prst="roundRect">
             <a:avLst/>
           </a:prstGeom>
           <a:solidFill>
-            <a:srgbClr val="00D4AA"/>
+            <a:srgbClr val="141B2D"/>
           </a:solidFill>
-          <a:ln>
-            <a:noFill/>
+          <a:ln w="12700">
+            <a:solidFill>
+              <a:srgbClr val="00D4AA"/>
+            </a:solidFill>
           </a:ln>
+          <a:effectLst/>
         </p:spPr>
         <p:style>
           <a:lnRef idx="1">
@@ -10546,108 +11071,39 @@
           </a:fontRef>
         </p:style>
         <p:txBody>
-          <a:bodyPr rtlCol="0" anchor="ctr"/>
-          <a:lstStyle/>
-          <a:p>
-            <a:pPr algn="ctr"/>
-          </a:p>
-        </p:txBody>
-      </p:sp>
-      <p:sp>
-        <p:nvSpPr>
-          <p:cNvPr id="6" name="Rounded Rectangle 5"/>
-          <p:cNvSpPr/>
-          <p:nvPr/>
-        </p:nvSpPr>
-        <p:spPr>
-          <a:xfrm>
-            <a:off x="365760" y="365760"/>
-            <a:ext cx="822960" cy="411480"/>
-          </a:xfrm>
-          <a:prstGeom prst="roundRect">
-            <a:avLst/>
-          </a:prstGeom>
-          <a:solidFill>
-            <a:srgbClr val="009EFF"/>
-          </a:solidFill>
-          <a:ln w="12700">
-            <a:solidFill>
-              <a:srgbClr val="1E2A42"/>
-            </a:solidFill>
-          </a:ln>
-          <a:effectLst/>
-        </p:spPr>
-        <p:style>
-          <a:lnRef idx="1">
-            <a:schemeClr val="accent1"/>
-          </a:lnRef>
-          <a:fillRef idx="3">
-            <a:schemeClr val="accent1"/>
-          </a:fillRef>
-          <a:effectRef idx="2">
-            <a:schemeClr val="accent1"/>
-          </a:effectRef>
-          <a:fontRef idx="minor">
-            <a:schemeClr val="lt1"/>
-          </a:fontRef>
-        </p:style>
-        <p:txBody>
           <a:bodyPr rtlCol="0" anchor="ctr" wrap="square"/>
           <a:lstStyle/>
           <a:p>
             <a:pPr algn="ctr">
-              <a:defRPr sz="900" b="1">
-                <a:solidFill>
-                  <a:srgbClr val="FFFFFF"/>
-                </a:solidFill>
-              </a:defRPr>
-            </a:pPr>
-            <a:r>
-              <a:t>UHF</a:t>
-            </a:r>
-          </a:p>
-        </p:txBody>
-      </p:sp>
-      <p:sp>
-        <p:nvSpPr>
-          <p:cNvPr id="7" name="Right Arrow 6"/>
-          <p:cNvSpPr/>
-          <p:nvPr/>
-        </p:nvSpPr>
-        <p:spPr>
-          <a:xfrm>
-            <a:off x="3232990" y="1691640"/>
-            <a:ext cx="182880" cy="137160"/>
-          </a:xfrm>
-          <a:prstGeom prst="rightArrow">
-            <a:avLst/>
-          </a:prstGeom>
-          <a:solidFill>
-            <a:srgbClr val="00D4AA"/>
-          </a:solidFill>
-          <a:ln>
-            <a:noFill/>
-          </a:ln>
-        </p:spPr>
-        <p:style>
-          <a:lnRef idx="1">
-            <a:schemeClr val="accent1"/>
-          </a:lnRef>
-          <a:fillRef idx="3">
-            <a:schemeClr val="accent1"/>
-          </a:fillRef>
-          <a:effectRef idx="2">
-            <a:schemeClr val="accent1"/>
-          </a:effectRef>
-          <a:fontRef idx="minor">
-            <a:schemeClr val="lt1"/>
-          </a:fontRef>
-        </p:style>
-        <p:txBody>
-          <a:bodyPr rtlCol="0" anchor="ctr"/>
-          <a:lstStyle/>
-          <a:p>
-            <a:pPr algn="ctr"/>
+              <a:defRPr sz="2400" b="1">
+                <a:solidFill>
+                  <a:srgbClr val="00D4AA"/>
+                </a:solidFill>
+                <a:latin typeface="Calibri"/>
+              </a:defRPr>
+            </a:pPr>
+            <a:r>
+              <a:t>200x</a:t>
+            </a:r>
+          </a:p>
+          <a:p>
+            <a:pPr algn="ctr">
+              <a:spcBef>
+                <a:spcPts val="200"/>
+              </a:spcBef>
+              <a:spcAft>
+                <a:spcPts val="400"/>
+              </a:spcAft>
+              <a:defRPr sz="1000" b="0">
+                <a:solidFill>
+                  <a:srgbClr val="B0B8CC"/>
+                </a:solidFill>
+                <a:latin typeface="Calibri"/>
+              </a:defRPr>
+            </a:pPr>
+            <a:r>
+              <a:t>Fewer errors (ECC + scrub + interleave)</a:t>
+            </a:r>
           </a:p>
         </p:txBody>
       </p:sp>
@@ -10659,455 +11115,8 @@
         </p:nvSpPr>
         <p:spPr>
           <a:xfrm>
-            <a:off x="365760" y="365760"/>
-            <a:ext cx="822960" cy="411480"/>
-          </a:xfrm>
-          <a:prstGeom prst="roundRect">
-            <a:avLst/>
-          </a:prstGeom>
-          <a:solidFill>
-            <a:srgbClr val="009EFF"/>
-          </a:solidFill>
-          <a:ln w="12700">
-            <a:solidFill>
-              <a:srgbClr val="1E2A42"/>
-            </a:solidFill>
-          </a:ln>
-          <a:effectLst/>
-        </p:spPr>
-        <p:style>
-          <a:lnRef idx="1">
-            <a:schemeClr val="accent1"/>
-          </a:lnRef>
-          <a:fillRef idx="3">
-            <a:schemeClr val="accent1"/>
-          </a:fillRef>
-          <a:effectRef idx="2">
-            <a:schemeClr val="accent1"/>
-          </a:effectRef>
-          <a:fontRef idx="minor">
-            <a:schemeClr val="lt1"/>
-          </a:fontRef>
-        </p:style>
-        <p:txBody>
-          <a:bodyPr rtlCol="0" anchor="ctr" wrap="square"/>
-          <a:lstStyle/>
-          <a:p>
-            <a:pPr algn="ctr">
-              <a:defRPr sz="900" b="1">
-                <a:solidFill>
-                  <a:srgbClr val="FFFFFF"/>
-                </a:solidFill>
-              </a:defRPr>
-            </a:pPr>
-            <a:r>
-              <a:t>Areostationary</a:t>
-            </a:r>
-          </a:p>
-        </p:txBody>
-      </p:sp>
-      <p:sp>
-        <p:nvSpPr>
-          <p:cNvPr id="9" name="Right Arrow 8"/>
-          <p:cNvSpPr/>
-          <p:nvPr/>
-        </p:nvSpPr>
-        <p:spPr>
-          <a:xfrm>
-            <a:off x="4870158" y="1691640"/>
-            <a:ext cx="182880" cy="137160"/>
-          </a:xfrm>
-          <a:prstGeom prst="rightArrow">
-            <a:avLst/>
-          </a:prstGeom>
-          <a:solidFill>
-            <a:srgbClr val="00D4AA"/>
-          </a:solidFill>
-          <a:ln>
-            <a:noFill/>
-          </a:ln>
-        </p:spPr>
-        <p:style>
-          <a:lnRef idx="1">
-            <a:schemeClr val="accent1"/>
-          </a:lnRef>
-          <a:fillRef idx="3">
-            <a:schemeClr val="accent1"/>
-          </a:fillRef>
-          <a:effectRef idx="2">
-            <a:schemeClr val="accent1"/>
-          </a:effectRef>
-          <a:fontRef idx="minor">
-            <a:schemeClr val="lt1"/>
-          </a:fontRef>
-        </p:style>
-        <p:txBody>
-          <a:bodyPr rtlCol="0" anchor="ctr"/>
-          <a:lstStyle/>
-          <a:p>
-            <a:pPr algn="ctr"/>
-          </a:p>
-        </p:txBody>
-      </p:sp>
-      <p:sp>
-        <p:nvSpPr>
-          <p:cNvPr id="10" name="Rounded Rectangle 9"/>
-          <p:cNvSpPr/>
-          <p:nvPr/>
-        </p:nvSpPr>
-        <p:spPr>
-          <a:xfrm>
-            <a:off x="365760" y="365760"/>
-            <a:ext cx="822960" cy="411480"/>
-          </a:xfrm>
-          <a:prstGeom prst="roundRect">
-            <a:avLst/>
-          </a:prstGeom>
-          <a:solidFill>
-            <a:srgbClr val="009EFF"/>
-          </a:solidFill>
-          <a:ln w="12700">
-            <a:solidFill>
-              <a:srgbClr val="1E2A42"/>
-            </a:solidFill>
-          </a:ln>
-          <a:effectLst/>
-        </p:spPr>
-        <p:style>
-          <a:lnRef idx="1">
-            <a:schemeClr val="accent1"/>
-          </a:lnRef>
-          <a:fillRef idx="3">
-            <a:schemeClr val="accent1"/>
-          </a:fillRef>
-          <a:effectRef idx="2">
-            <a:schemeClr val="accent1"/>
-          </a:effectRef>
-          <a:fontRef idx="minor">
-            <a:schemeClr val="lt1"/>
-          </a:fontRef>
-        </p:style>
-        <p:txBody>
-          <a:bodyPr rtlCol="0" anchor="ctr" wrap="square"/>
-          <a:lstStyle/>
-          <a:p>
-            <a:pPr algn="ctr">
-              <a:defRPr sz="900" b="1">
-                <a:solidFill>
-                  <a:srgbClr val="FFFFFF"/>
-                </a:solidFill>
-              </a:defRPr>
-            </a:pPr>
-            <a:r>
-              <a:t>Polar</a:t>
-            </a:r>
-          </a:p>
-        </p:txBody>
-      </p:sp>
-      <p:sp>
-        <p:nvSpPr>
-          <p:cNvPr id="11" name="Right Arrow 10"/>
-          <p:cNvSpPr/>
-          <p:nvPr/>
-        </p:nvSpPr>
-        <p:spPr>
-          <a:xfrm>
-            <a:off x="6507326" y="1691640"/>
-            <a:ext cx="182880" cy="137160"/>
-          </a:xfrm>
-          <a:prstGeom prst="rightArrow">
-            <a:avLst/>
-          </a:prstGeom>
-          <a:solidFill>
-            <a:srgbClr val="00D4AA"/>
-          </a:solidFill>
-          <a:ln>
-            <a:noFill/>
-          </a:ln>
-        </p:spPr>
-        <p:style>
-          <a:lnRef idx="1">
-            <a:schemeClr val="accent1"/>
-          </a:lnRef>
-          <a:fillRef idx="3">
-            <a:schemeClr val="accent1"/>
-          </a:fillRef>
-          <a:effectRef idx="2">
-            <a:schemeClr val="accent1"/>
-          </a:effectRef>
-          <a:fontRef idx="minor">
-            <a:schemeClr val="lt1"/>
-          </a:fontRef>
-        </p:style>
-        <p:txBody>
-          <a:bodyPr rtlCol="0" anchor="ctr"/>
-          <a:lstStyle/>
-          <a:p>
-            <a:pPr algn="ctr"/>
-          </a:p>
-        </p:txBody>
-      </p:sp>
-      <p:sp>
-        <p:nvSpPr>
-          <p:cNvPr id="12" name="Rounded Rectangle 11"/>
-          <p:cNvSpPr/>
-          <p:nvPr/>
-        </p:nvSpPr>
-        <p:spPr>
-          <a:xfrm>
-            <a:off x="365760" y="365760"/>
-            <a:ext cx="822960" cy="411480"/>
-          </a:xfrm>
-          <a:prstGeom prst="roundRect">
-            <a:avLst/>
-          </a:prstGeom>
-          <a:solidFill>
-            <a:srgbClr val="009EFF"/>
-          </a:solidFill>
-          <a:ln w="12700">
-            <a:solidFill>
-              <a:srgbClr val="1E2A42"/>
-            </a:solidFill>
-          </a:ln>
-          <a:effectLst/>
-        </p:spPr>
-        <p:style>
-          <a:lnRef idx="1">
-            <a:schemeClr val="accent1"/>
-          </a:lnRef>
-          <a:fillRef idx="3">
-            <a:schemeClr val="accent1"/>
-          </a:fillRef>
-          <a:effectRef idx="2">
-            <a:schemeClr val="accent1"/>
-          </a:effectRef>
-          <a:fontRef idx="minor">
-            <a:schemeClr val="lt1"/>
-          </a:fontRef>
-        </p:style>
-        <p:txBody>
-          <a:bodyPr rtlCol="0" anchor="ctr" wrap="square"/>
-          <a:lstStyle/>
-          <a:p>
-            <a:pPr algn="ctr">
-              <a:defRPr sz="900" b="1">
-                <a:solidFill>
-                  <a:srgbClr val="FFFFFF"/>
-                </a:solidFill>
-              </a:defRPr>
-            </a:pPr>
-            <a:r>
-              <a:t>Deep Space 1550 nm</a:t>
-            </a:r>
-          </a:p>
-        </p:txBody>
-      </p:sp>
-      <p:sp>
-        <p:nvSpPr>
-          <p:cNvPr id="13" name="Right Arrow 12"/>
-          <p:cNvSpPr/>
-          <p:nvPr/>
-        </p:nvSpPr>
-        <p:spPr>
-          <a:xfrm>
-            <a:off x="8144494" y="1691640"/>
-            <a:ext cx="182880" cy="137160"/>
-          </a:xfrm>
-          <a:prstGeom prst="rightArrow">
-            <a:avLst/>
-          </a:prstGeom>
-          <a:solidFill>
-            <a:srgbClr val="00D4AA"/>
-          </a:solidFill>
-          <a:ln>
-            <a:noFill/>
-          </a:ln>
-        </p:spPr>
-        <p:style>
-          <a:lnRef idx="1">
-            <a:schemeClr val="accent1"/>
-          </a:lnRef>
-          <a:fillRef idx="3">
-            <a:schemeClr val="accent1"/>
-          </a:fillRef>
-          <a:effectRef idx="2">
-            <a:schemeClr val="accent1"/>
-          </a:effectRef>
-          <a:fontRef idx="minor">
-            <a:schemeClr val="lt1"/>
-          </a:fontRef>
-        </p:style>
-        <p:txBody>
-          <a:bodyPr rtlCol="0" anchor="ctr"/>
-          <a:lstStyle/>
-          <a:p>
-            <a:pPr algn="ctr"/>
-          </a:p>
-        </p:txBody>
-      </p:sp>
-      <p:sp>
-        <p:nvSpPr>
-          <p:cNvPr id="14" name="Rounded Rectangle 13"/>
-          <p:cNvSpPr/>
-          <p:nvPr/>
-        </p:nvSpPr>
-        <p:spPr>
-          <a:xfrm>
-            <a:off x="365760" y="365760"/>
-            <a:ext cx="822960" cy="411480"/>
-          </a:xfrm>
-          <a:prstGeom prst="roundRect">
-            <a:avLst/>
-          </a:prstGeom>
-          <a:solidFill>
-            <a:srgbClr val="009EFF"/>
-          </a:solidFill>
-          <a:ln w="12700">
-            <a:solidFill>
-              <a:srgbClr val="1E2A42"/>
-            </a:solidFill>
-          </a:ln>
-          <a:effectLst/>
-        </p:spPr>
-        <p:style>
-          <a:lnRef idx="1">
-            <a:schemeClr val="accent1"/>
-          </a:lnRef>
-          <a:fillRef idx="3">
-            <a:schemeClr val="accent1"/>
-          </a:fillRef>
-          <a:effectRef idx="2">
-            <a:schemeClr val="accent1"/>
-          </a:effectRef>
-          <a:fontRef idx="minor">
-            <a:schemeClr val="lt1"/>
-          </a:fontRef>
-        </p:style>
-        <p:txBody>
-          <a:bodyPr rtlCol="0" anchor="ctr" wrap="square"/>
-          <a:lstStyle/>
-          <a:p>
-            <a:pPr algn="ctr">
-              <a:defRPr sz="900" b="1">
-                <a:solidFill>
-                  <a:srgbClr val="FFFFFF"/>
-                </a:solidFill>
-              </a:defRPr>
-            </a:pPr>
-            <a:r>
-              <a:t>LEO</a:t>
-            </a:r>
-          </a:p>
-        </p:txBody>
-      </p:sp>
-      <p:sp>
-        <p:nvSpPr>
-          <p:cNvPr id="15" name="Right Arrow 14"/>
-          <p:cNvSpPr/>
-          <p:nvPr/>
-        </p:nvSpPr>
-        <p:spPr>
-          <a:xfrm>
-            <a:off x="9781662" y="1691640"/>
-            <a:ext cx="182880" cy="137160"/>
-          </a:xfrm>
-          <a:prstGeom prst="rightArrow">
-            <a:avLst/>
-          </a:prstGeom>
-          <a:solidFill>
-            <a:srgbClr val="00D4AA"/>
-          </a:solidFill>
-          <a:ln>
-            <a:noFill/>
-          </a:ln>
-        </p:spPr>
-        <p:style>
-          <a:lnRef idx="1">
-            <a:schemeClr val="accent1"/>
-          </a:lnRef>
-          <a:fillRef idx="3">
-            <a:schemeClr val="accent1"/>
-          </a:fillRef>
-          <a:effectRef idx="2">
-            <a:schemeClr val="accent1"/>
-          </a:effectRef>
-          <a:fontRef idx="minor">
-            <a:schemeClr val="lt1"/>
-          </a:fontRef>
-        </p:style>
-        <p:txBody>
-          <a:bodyPr rtlCol="0" anchor="ctr"/>
-          <a:lstStyle/>
-          <a:p>
-            <a:pPr algn="ctr"/>
-          </a:p>
-        </p:txBody>
-      </p:sp>
-      <p:sp>
-        <p:nvSpPr>
-          <p:cNvPr id="16" name="Rounded Rectangle 15"/>
-          <p:cNvSpPr/>
-          <p:nvPr/>
-        </p:nvSpPr>
-        <p:spPr>
-          <a:xfrm>
-            <a:off x="365760" y="365760"/>
-            <a:ext cx="822960" cy="411480"/>
-          </a:xfrm>
-          <a:prstGeom prst="roundRect">
-            <a:avLst/>
-          </a:prstGeom>
-          <a:solidFill>
-            <a:srgbClr val="009EFF"/>
-          </a:solidFill>
-          <a:ln w="12700">
-            <a:solidFill>
-              <a:srgbClr val="1E2A42"/>
-            </a:solidFill>
-          </a:ln>
-          <a:effectLst/>
-        </p:spPr>
-        <p:style>
-          <a:lnRef idx="1">
-            <a:schemeClr val="accent1"/>
-          </a:lnRef>
-          <a:fillRef idx="3">
-            <a:schemeClr val="accent1"/>
-          </a:fillRef>
-          <a:effectRef idx="2">
-            <a:schemeClr val="accent1"/>
-          </a:effectRef>
-          <a:fontRef idx="minor">
-            <a:schemeClr val="lt1"/>
-          </a:fontRef>
-        </p:style>
-        <p:txBody>
-          <a:bodyPr rtlCol="0" anchor="ctr" wrap="square"/>
-          <a:lstStyle/>
-          <a:p>
-            <a:pPr algn="ctr">
-              <a:defRPr sz="900" b="1">
-                <a:solidFill>
-                  <a:srgbClr val="FFFFFF"/>
-                </a:solidFill>
-              </a:defRPr>
-            </a:pPr>
-            <a:r>
-              <a:t>DSN / MOC</a:t>
-            </a:r>
-          </a:p>
-        </p:txBody>
-      </p:sp>
-      <p:sp>
-        <p:nvSpPr>
-          <p:cNvPr id="17" name="Rounded Rectangle 16"/>
-          <p:cNvSpPr/>
-          <p:nvPr/>
-        </p:nvSpPr>
-        <p:spPr>
-          <a:xfrm>
-            <a:off x="1912467" y="2331720"/>
-            <a:ext cx="1920240" cy="1005840"/>
+            <a:off x="3200400" y="4023360"/>
+            <a:ext cx="2743200" cy="1097280"/>
           </a:xfrm>
           <a:prstGeom prst="roundRect">
             <a:avLst/>
@@ -11149,7 +11158,7 @@
               </a:defRPr>
             </a:pPr>
             <a:r>
-              <a:t>~13 min</a:t>
+              <a:t>3,334x</a:t>
             </a:r>
           </a:p>
           <a:p>
@@ -11168,21 +11177,21 @@
               </a:defRPr>
             </a:pPr>
             <a:r>
-              <a:t>End-to-End Latency</a:t>
-            </a:r>
-          </a:p>
-        </p:txBody>
-      </p:sp>
-      <p:sp>
-        <p:nvSpPr>
-          <p:cNvPr id="18" name="Rounded Rectangle 17"/>
+              <a:t>TMR reliability gain (p=1e-4/op)</a:t>
+            </a:r>
+          </a:p>
+        </p:txBody>
+      </p:sp>
+      <p:sp>
+        <p:nvSpPr>
+          <p:cNvPr id="9" name="Rounded Rectangle 8"/>
           <p:cNvSpPr/>
           <p:nvPr/>
         </p:nvSpPr>
         <p:spPr>
           <a:xfrm>
-            <a:off x="4061307" y="2331720"/>
-            <a:ext cx="1920240" cy="1005840"/>
+            <a:off x="6126480" y="4023360"/>
+            <a:ext cx="2743200" cy="1097280"/>
           </a:xfrm>
           <a:prstGeom prst="roundRect">
             <a:avLst/>
@@ -11192,7 +11201,7 @@
           </a:solidFill>
           <a:ln w="12700">
             <a:solidFill>
-              <a:srgbClr val="2ECC71"/>
+              <a:srgbClr val="FF8C00"/>
             </a:solidFill>
           </a:ln>
           <a:effectLst/>
@@ -11218,13 +11227,13 @@
             <a:pPr algn="ctr">
               <a:defRPr sz="2400" b="1">
                 <a:solidFill>
-                  <a:srgbClr val="2ECC71"/>
-                </a:solidFill>
-                <a:latin typeface="Calibri"/>
-              </a:defRPr>
-            </a:pPr>
-            <a:r>
-              <a:t>&lt;5%</a:t>
+                  <a:srgbClr val="FF8C00"/>
+                </a:solidFill>
+                <a:latin typeface="Calibri"/>
+              </a:defRPr>
+            </a:pPr>
+            <a:r>
+              <a:t>200 krad</a:t>
             </a:r>
           </a:p>
           <a:p>
@@ -11243,21 +11252,21 @@
               </a:defRPr>
             </a:pPr>
             <a:r>
-              <a:t>Packet Loss</a:t>
-            </a:r>
-          </a:p>
-        </p:txBody>
-      </p:sp>
-      <p:sp>
-        <p:nvSpPr>
-          <p:cNvPr id="19" name="Rounded Rectangle 18"/>
+              <a:t>RAD750 TID tolerance (&gt;2000x margin)</a:t>
+            </a:r>
+          </a:p>
+        </p:txBody>
+      </p:sp>
+      <p:sp>
+        <p:nvSpPr>
+          <p:cNvPr id="10" name="Rounded Rectangle 9"/>
           <p:cNvSpPr/>
           <p:nvPr/>
         </p:nvSpPr>
         <p:spPr>
           <a:xfrm>
-            <a:off x="6210147" y="2331720"/>
-            <a:ext cx="1920240" cy="1005840"/>
+            <a:off x="9052560" y="4023360"/>
+            <a:ext cx="2834640" cy="1097280"/>
           </a:xfrm>
           <a:prstGeom prst="roundRect">
             <a:avLst/>
@@ -11299,7 +11308,7 @@
               </a:defRPr>
             </a:pPr>
             <a:r>
-              <a:t>98.7%</a:t>
+              <a:t>~0.9 / day</a:t>
             </a:r>
           </a:p>
           <a:p>
@@ -11318,164 +11327,21 @@
               </a:defRPr>
             </a:pPr>
             <a:r>
-              <a:t>Delivery Rate</a:t>
-            </a:r>
-          </a:p>
-        </p:txBody>
-      </p:sp>
-      <p:sp>
-        <p:nvSpPr>
-          <p:cNvPr id="20" name="Rounded Rectangle 19"/>
-          <p:cNvSpPr/>
-          <p:nvPr/>
-        </p:nvSpPr>
-        <p:spPr>
-          <a:xfrm>
-            <a:off x="8358987" y="2331720"/>
-            <a:ext cx="1920240" cy="1005840"/>
-          </a:xfrm>
-          <a:prstGeom prst="roundRect">
-            <a:avLst/>
-          </a:prstGeom>
-          <a:solidFill>
-            <a:srgbClr val="141B2D"/>
-          </a:solidFill>
-          <a:ln w="12700">
-            <a:solidFill>
-              <a:srgbClr val="FF8C00"/>
-            </a:solidFill>
-          </a:ln>
-          <a:effectLst/>
-        </p:spPr>
-        <p:style>
-          <a:lnRef idx="1">
-            <a:schemeClr val="accent1"/>
-          </a:lnRef>
-          <a:fillRef idx="3">
-            <a:schemeClr val="accent1"/>
-          </a:fillRef>
-          <a:effectRef idx="2">
-            <a:schemeClr val="accent1"/>
-          </a:effectRef>
-          <a:fontRef idx="minor">
-            <a:schemeClr val="lt1"/>
-          </a:fontRef>
-        </p:style>
-        <p:txBody>
-          <a:bodyPr rtlCol="0" anchor="ctr" wrap="square"/>
-          <a:lstStyle/>
-          <a:p>
-            <a:pPr algn="ctr">
-              <a:defRPr sz="2400" b="1">
-                <a:solidFill>
-                  <a:srgbClr val="FF8C00"/>
-                </a:solidFill>
-                <a:latin typeface="Calibri"/>
-              </a:defRPr>
-            </a:pPr>
-            <a:r>
-              <a:t>7 hops</a:t>
-            </a:r>
-          </a:p>
-          <a:p>
-            <a:pPr algn="ctr">
-              <a:spcBef>
-                <a:spcPts val="200"/>
-              </a:spcBef>
-              <a:spcAft>
-                <a:spcPts val="400"/>
-              </a:spcAft>
-              <a:defRPr sz="1000" b="0">
-                <a:solidFill>
-                  <a:srgbClr val="B0B8CC"/>
-                </a:solidFill>
-                <a:latin typeface="Calibri"/>
-              </a:defRPr>
-            </a:pPr>
-            <a:r>
-              <a:t>Network Path</a:t>
-            </a:r>
-          </a:p>
-        </p:txBody>
-      </p:sp>
-      <p:sp>
-        <p:nvSpPr>
-          <p:cNvPr id="21" name="Rounded Rectangle 20"/>
-          <p:cNvSpPr/>
-          <p:nvPr/>
-        </p:nvSpPr>
-        <p:spPr>
-          <a:xfrm>
-            <a:off x="548640" y="3657600"/>
-            <a:ext cx="11094415" cy="1097280"/>
-          </a:xfrm>
-          <a:prstGeom prst="roundRect">
-            <a:avLst/>
-          </a:prstGeom>
-          <a:solidFill>
-            <a:srgbClr val="141B2D"/>
-          </a:solidFill>
-          <a:ln w="31750">
-            <a:solidFill>
-              <a:srgbClr val="FF4D4D"/>
-            </a:solidFill>
-          </a:ln>
-          <a:effectLst/>
-        </p:spPr>
-        <p:style>
-          <a:lnRef idx="1">
-            <a:schemeClr val="accent1"/>
-          </a:lnRef>
-          <a:fillRef idx="3">
-            <a:schemeClr val="accent1"/>
-          </a:fillRef>
-          <a:effectRef idx="2">
-            <a:schemeClr val="accent1"/>
-          </a:effectRef>
-          <a:fontRef idx="minor">
-            <a:schemeClr val="lt1"/>
-          </a:fontRef>
-        </p:style>
-        <p:txBody>
-          <a:bodyPr rtlCol="0" anchor="ctr" wrap="square" lIns="137160" rIns="137160" tIns="91440" bIns="91440"/>
-          <a:lstStyle/>
-          <a:p>
-            <a:pPr algn="ctr">
-              <a:defRPr sz="1200" b="1">
-                <a:solidFill>
-                  <a:srgbClr val="FF4D4D"/>
-                </a:solidFill>
-                <a:latin typeface="Calibri"/>
-              </a:defRPr>
-            </a:pPr>
-            <a:r>
-              <a:t>⚠ FAILURE SCENARIO</a:t>
-            </a:r>
-          </a:p>
-          <a:p>
-            <a:pPr>
-              <a:defRPr sz="1100">
-                <a:solidFill>
-                  <a:srgbClr val="FFFFFF"/>
-                </a:solidFill>
-              </a:defRPr>
-            </a:pPr>
-            <a:r>
-              <a:t>Solar flare at T+400s → stored at MRS-Polar → rerouted via ES-L4 → delayed ~30 min NOT LOST</a:t>
-            </a:r>
-          </a:p>
-        </p:txBody>
-      </p:sp>
-      <p:sp>
-        <p:nvSpPr>
-          <p:cNvPr id="22" name="TextBox 21"/>
+              <a:t>Residual uncorrectable, Earth-Mars transit</a:t>
+            </a:r>
+          </a:p>
+        </p:txBody>
+      </p:sp>
+      <p:sp>
+        <p:nvSpPr>
+          <p:cNvPr id="11" name="TextBox 10"/>
           <p:cNvSpPr txBox="1"/>
           <p:nvPr/>
         </p:nvSpPr>
         <p:spPr>
           <a:xfrm>
-            <a:off x="457200" y="6400800"/>
-            <a:ext cx="4572000" cy="365760"/>
+            <a:off x="548640" y="5349240"/>
+            <a:ext cx="11155680" cy="822960"/>
           </a:xfrm>
           <a:prstGeom prst="rect">
             <a:avLst/>
@@ -11489,7 +11355,7 @@
           <a:lstStyle/>
           <a:p>
             <a:pPr algn="l">
-              <a:defRPr sz="1000" b="0">
+              <a:defRPr sz="1100" b="0">
                 <a:solidFill>
                   <a:srgbClr val="6B7B96"/>
                 </a:solidFill>
@@ -11497,21 +11363,21 @@
               </a:defRPr>
             </a:pPr>
             <a:r>
-              <a:t>AETHERIX — Interplanetary Communication Network</a:t>
-            </a:r>
-          </a:p>
-        </p:txBody>
-      </p:sp>
-      <p:sp>
-        <p:nvSpPr>
-          <p:cNvPr id="23" name="TextBox 22"/>
+              <a:t>Model: 512 Mbit, ~210-day GCR cruise. ~37,000 raw bit upsets reduced to ~186 uncorrectable over the mission. Heritage: NASA RAD750 (Curiosity/Perseverance), ESA LEON3FT.  →  src/computing/radiation.py</a:t>
+            </a:r>
+          </a:p>
+        </p:txBody>
+      </p:sp>
+      <p:sp>
+        <p:nvSpPr>
+          <p:cNvPr id="12" name="TextBox 11"/>
           <p:cNvSpPr txBox="1"/>
           <p:nvPr/>
         </p:nvSpPr>
         <p:spPr>
           <a:xfrm>
-            <a:off x="10058400" y="6400800"/>
-            <a:ext cx="1828800" cy="365760"/>
+            <a:off x="457200" y="6400800"/>
+            <a:ext cx="4572000" cy="365760"/>
           </a:xfrm>
           <a:prstGeom prst="rect">
             <a:avLst/>
@@ -11524,6 +11390,42 @@
           </a:bodyPr>
           <a:lstStyle/>
           <a:p>
+            <a:pPr algn="l">
+              <a:defRPr sz="1000" b="0">
+                <a:solidFill>
+                  <a:srgbClr val="6B7B96"/>
+                </a:solidFill>
+                <a:latin typeface="Calibri"/>
+              </a:defRPr>
+            </a:pPr>
+            <a:r>
+              <a:t>AETHERIX — Interplanetary Communication Network</a:t>
+            </a:r>
+          </a:p>
+        </p:txBody>
+      </p:sp>
+      <p:sp>
+        <p:nvSpPr>
+          <p:cNvPr id="13" name="TextBox 12"/>
+          <p:cNvSpPr txBox="1"/>
+          <p:nvPr/>
+        </p:nvSpPr>
+        <p:spPr>
+          <a:xfrm>
+            <a:off x="10058400" y="6400800"/>
+            <a:ext cx="1828800" cy="365760"/>
+          </a:xfrm>
+          <a:prstGeom prst="rect">
+            <a:avLst/>
+          </a:prstGeom>
+          <a:noFill/>
+        </p:spPr>
+        <p:txBody>
+          <a:bodyPr wrap="square">
+            <a:spAutoFit/>
+          </a:bodyPr>
+          <a:lstStyle/>
+          <a:p>
             <a:pPr algn="r">
               <a:defRPr sz="1000" b="0">
                 <a:solidFill>
@@ -11533,7 +11435,7 @@
               </a:defRPr>
             </a:pPr>
             <a:r>
-              <a:t>18 / 25</a:t>
+              <a:t>18 / 27</a:t>
             </a:r>
           </a:p>
         </p:txBody>
@@ -11541,7 +11443,7 @@
     </p:spTree>
   </p:cSld>
   <p:transition spd="med" advClick="1">
-    <p:push dir="l"/>
+    <p:fade/>
   </p:transition>
   <p:clrMapOvr>
     <a:masterClrMapping/>
@@ -11575,8 +11477,8 @@
         </p:nvSpPr>
         <p:spPr>
           <a:xfrm>
-            <a:off x="548640" y="365760"/>
-            <a:ext cx="8229600" cy="548640"/>
+            <a:off x="548640" y="274320"/>
+            <a:ext cx="10058400" cy="548640"/>
           </a:xfrm>
           <a:prstGeom prst="rect">
             <a:avLst/>
@@ -11584,7 +11486,7 @@
           <a:noFill/>
         </p:spPr>
         <p:txBody>
-          <a:bodyPr wrap="none">
+          <a:bodyPr wrap="square">
             <a:spAutoFit/>
           </a:bodyPr>
           <a:lstStyle/>
@@ -11594,24 +11496,825 @@
                 <a:solidFill>
                   <a:srgbClr val="FFFFFF"/>
                 </a:solidFill>
-              </a:defRPr>
-            </a:pPr>
-            <a:r>
-              <a:t>DATA FLOW DIAGRAM</a:t>
-            </a:r>
-          </a:p>
-        </p:txBody>
-      </p:sp>
-      <p:sp>
-        <p:nvSpPr>
-          <p:cNvPr id="3" name="Rounded Rectangle 2"/>
+                <a:latin typeface="Calibri"/>
+              </a:defRPr>
+            </a:pPr>
+            <a:r>
+              <a:t>MISSION-CRITICAL DATA PRIORITIZATION</a:t>
+            </a:r>
+          </a:p>
+        </p:txBody>
+      </p:sp>
+      <p:sp>
+        <p:nvSpPr>
+          <p:cNvPr id="3" name="TextBox 2"/>
+          <p:cNvSpPr txBox="1"/>
+          <p:nvPr/>
+        </p:nvSpPr>
+        <p:spPr>
+          <a:xfrm>
+            <a:off x="548640" y="822960"/>
+            <a:ext cx="10058400" cy="365760"/>
+          </a:xfrm>
+          <a:prstGeom prst="rect">
+            <a:avLst/>
+          </a:prstGeom>
+          <a:noFill/>
+        </p:spPr>
+        <p:txBody>
+          <a:bodyPr wrap="square">
+            <a:spAutoFit/>
+          </a:bodyPr>
+          <a:lstStyle/>
+          <a:p>
+            <a:pPr algn="l">
+              <a:defRPr sz="1500" b="0">
+                <a:solidFill>
+                  <a:srgbClr val="00D4AA"/>
+                </a:solidFill>
+                <a:latin typeface="Calibri"/>
+              </a:defRPr>
+            </a:pPr>
+            <a:r>
+              <a:t>Bandwidth triage: get the right bits home first</a:t>
+            </a:r>
+          </a:p>
+        </p:txBody>
+      </p:sp>
+      <p:sp>
+        <p:nvSpPr>
+          <p:cNvPr id="4" name="Rectangle 3"/>
           <p:cNvSpPr/>
           <p:nvPr/>
         </p:nvSpPr>
         <p:spPr>
           <a:xfrm>
-            <a:off x="457200" y="1188720"/>
-            <a:ext cx="3931920" cy="3474720"/>
+            <a:off x="548640" y="1234440"/>
+            <a:ext cx="2286000" cy="38100"/>
+          </a:xfrm>
+          <a:prstGeom prst="rect">
+            <a:avLst/>
+          </a:prstGeom>
+          <a:solidFill>
+            <a:srgbClr val="FF8C00"/>
+          </a:solidFill>
+          <a:ln>
+            <a:noFill/>
+          </a:ln>
+          <a:effectLst/>
+        </p:spPr>
+        <p:style>
+          <a:lnRef idx="1">
+            <a:schemeClr val="accent1"/>
+          </a:lnRef>
+          <a:fillRef idx="3">
+            <a:schemeClr val="accent1"/>
+          </a:fillRef>
+          <a:effectRef idx="2">
+            <a:schemeClr val="accent1"/>
+          </a:effectRef>
+          <a:fontRef idx="minor">
+            <a:schemeClr val="lt1"/>
+          </a:fontRef>
+        </p:style>
+        <p:txBody>
+          <a:bodyPr rtlCol="0" anchor="ctr"/>
+          <a:lstStyle/>
+          <a:p>
+            <a:pPr algn="ctr"/>
+          </a:p>
+        </p:txBody>
+      </p:sp>
+      <p:graphicFrame>
+        <p:nvGraphicFramePr>
+          <p:cNvPr id="5" name="Table 4"/>
+          <p:cNvGraphicFramePr>
+            <a:graphicFrameLocks noGrp="1"/>
+          </p:cNvGraphicFramePr>
+          <p:nvPr/>
+        </p:nvGraphicFramePr>
+        <p:xfrm>
+          <a:off x="274320" y="1463040"/>
+          <a:ext cx="6400800" cy="2194560"/>
+        </p:xfrm>
+        <a:graphic>
+          <a:graphicData uri="http://schemas.openxmlformats.org/drawingml/2006/table">
+            <a:tbl>
+              <a:tblPr firstRow="1" bandRow="1">
+                <a:tableStyleId>{5C22544A-7EE6-4342-B048-85BDC9FD1C3A}</a:tableStyleId>
+              </a:tblPr>
+              <a:tblGrid>
+                <a:gridCol w="2133600"/>
+                <a:gridCol w="2133600"/>
+                <a:gridCol w="2133600"/>
+              </a:tblGrid>
+              <a:tr h="438912">
+                <a:tc>
+                  <a:txBody>
+                    <a:bodyPr/>
+                    <a:lstStyle/>
+                    <a:p>
+                      <a:pPr algn="ctr">
+                        <a:defRPr b="1" sz="1200">
+                          <a:solidFill>
+                            <a:srgbClr val="FFFFFF"/>
+                          </a:solidFill>
+                          <a:latin typeface="Calibri"/>
+                        </a:defRPr>
+                      </a:pPr>
+                      <a:r>
+                        <a:t>Tier</a:t>
+                      </a:r>
+                    </a:p>
+                  </a:txBody>
+                  <a:tcPr anchor="ctr" marL="73152" marR="73152" marT="36576" marB="36576">
+                    <a:solidFill>
+                      <a:srgbClr val="FF8C00"/>
+                    </a:solidFill>
+                  </a:tcPr>
+                </a:tc>
+                <a:tc>
+                  <a:txBody>
+                    <a:bodyPr/>
+                    <a:lstStyle/>
+                    <a:p>
+                      <a:pPr algn="ctr">
+                        <a:defRPr b="1" sz="1200">
+                          <a:solidFill>
+                            <a:srgbClr val="FFFFFF"/>
+                          </a:solidFill>
+                          <a:latin typeface="Calibri"/>
+                        </a:defRPr>
+                      </a:pPr>
+                      <a:r>
+                        <a:t>Class</a:t>
+                      </a:r>
+                    </a:p>
+                  </a:txBody>
+                  <a:tcPr anchor="ctr" marL="73152" marR="73152" marT="36576" marB="36576">
+                    <a:solidFill>
+                      <a:srgbClr val="FF8C00"/>
+                    </a:solidFill>
+                  </a:tcPr>
+                </a:tc>
+                <a:tc>
+                  <a:txBody>
+                    <a:bodyPr/>
+                    <a:lstStyle/>
+                    <a:p>
+                      <a:pPr algn="ctr">
+                        <a:defRPr b="1" sz="1200">
+                          <a:solidFill>
+                            <a:srgbClr val="FFFFFF"/>
+                          </a:solidFill>
+                          <a:latin typeface="Calibri"/>
+                        </a:defRPr>
+                      </a:pPr>
+                      <a:r>
+                        <a:t>Examples</a:t>
+                      </a:r>
+                    </a:p>
+                  </a:txBody>
+                  <a:tcPr anchor="ctr" marL="73152" marR="73152" marT="36576" marB="36576">
+                    <a:solidFill>
+                      <a:srgbClr val="FF8C00"/>
+                    </a:solidFill>
+                  </a:tcPr>
+                </a:tc>
+              </a:tr>
+              <a:tr h="438912">
+                <a:tc>
+                  <a:txBody>
+                    <a:bodyPr/>
+                    <a:lstStyle/>
+                    <a:p>
+                      <a:pPr>
+                        <a:defRPr sz="1100">
+                          <a:solidFill>
+                            <a:srgbClr val="B0B8CC"/>
+                          </a:solidFill>
+                          <a:latin typeface="Calibri"/>
+                        </a:defRPr>
+                      </a:pPr>
+                      <a:r>
+                        <a:t>P0</a:t>
+                      </a:r>
+                    </a:p>
+                  </a:txBody>
+                  <a:tcPr anchor="ctr" marL="73152" marR="73152" marT="36576" marB="36576">
+                    <a:solidFill>
+                      <a:srgbClr val="141B2D"/>
+                    </a:solidFill>
+                  </a:tcPr>
+                </a:tc>
+                <a:tc>
+                  <a:txBody>
+                    <a:bodyPr/>
+                    <a:lstStyle/>
+                    <a:p>
+                      <a:pPr>
+                        <a:defRPr sz="1100">
+                          <a:solidFill>
+                            <a:srgbClr val="B0B8CC"/>
+                          </a:solidFill>
+                          <a:latin typeface="Calibri"/>
+                        </a:defRPr>
+                      </a:pPr>
+                      <a:r>
+                        <a:t>Emergency / Safety</a:t>
+                      </a:r>
+                    </a:p>
+                  </a:txBody>
+                  <a:tcPr anchor="ctr" marL="73152" marR="73152" marT="36576" marB="36576">
+                    <a:solidFill>
+                      <a:srgbClr val="141B2D"/>
+                    </a:solidFill>
+                  </a:tcPr>
+                </a:tc>
+                <a:tc>
+                  <a:txBody>
+                    <a:bodyPr/>
+                    <a:lstStyle/>
+                    <a:p>
+                      <a:pPr>
+                        <a:defRPr sz="1100">
+                          <a:solidFill>
+                            <a:srgbClr val="B0B8CC"/>
+                          </a:solidFill>
+                          <a:latin typeface="Calibri"/>
+                        </a:defRPr>
+                      </a:pPr>
+                      <a:r>
+                        <a:t>Health telemetry, collision avoidance</a:t>
+                      </a:r>
+                    </a:p>
+                  </a:txBody>
+                  <a:tcPr anchor="ctr" marL="73152" marR="73152" marT="36576" marB="36576">
+                    <a:solidFill>
+                      <a:srgbClr val="141B2D"/>
+                    </a:solidFill>
+                  </a:tcPr>
+                </a:tc>
+              </a:tr>
+              <a:tr h="438912">
+                <a:tc>
+                  <a:txBody>
+                    <a:bodyPr/>
+                    <a:lstStyle/>
+                    <a:p>
+                      <a:pPr>
+                        <a:defRPr sz="1100">
+                          <a:solidFill>
+                            <a:srgbClr val="B0B8CC"/>
+                          </a:solidFill>
+                          <a:latin typeface="Calibri"/>
+                        </a:defRPr>
+                      </a:pPr>
+                      <a:r>
+                        <a:t>P1</a:t>
+                      </a:r>
+                    </a:p>
+                  </a:txBody>
+                  <a:tcPr anchor="ctr" marL="73152" marR="73152" marT="36576" marB="36576">
+                    <a:solidFill>
+                      <a:srgbClr val="182236"/>
+                    </a:solidFill>
+                  </a:tcPr>
+                </a:tc>
+                <a:tc>
+                  <a:txBody>
+                    <a:bodyPr/>
+                    <a:lstStyle/>
+                    <a:p>
+                      <a:pPr>
+                        <a:defRPr sz="1100">
+                          <a:solidFill>
+                            <a:srgbClr val="B0B8CC"/>
+                          </a:solidFill>
+                          <a:latin typeface="Calibri"/>
+                        </a:defRPr>
+                      </a:pPr>
+                      <a:r>
+                        <a:t>Mission-critical</a:t>
+                      </a:r>
+                    </a:p>
+                  </a:txBody>
+                  <a:tcPr anchor="ctr" marL="73152" marR="73152" marT="36576" marB="36576">
+                    <a:solidFill>
+                      <a:srgbClr val="182236"/>
+                    </a:solidFill>
+                  </a:tcPr>
+                </a:tc>
+                <a:tc>
+                  <a:txBody>
+                    <a:bodyPr/>
+                    <a:lstStyle/>
+                    <a:p>
+                      <a:pPr>
+                        <a:defRPr sz="1100">
+                          <a:solidFill>
+                            <a:srgbClr val="B0B8CC"/>
+                          </a:solidFill>
+                          <a:latin typeface="Calibri"/>
+                        </a:defRPr>
+                      </a:pPr>
+                      <a:r>
+                        <a:t>Command ACKs, time-sensitive science</a:t>
+                      </a:r>
+                    </a:p>
+                  </a:txBody>
+                  <a:tcPr anchor="ctr" marL="73152" marR="73152" marT="36576" marB="36576">
+                    <a:solidFill>
+                      <a:srgbClr val="182236"/>
+                    </a:solidFill>
+                  </a:tcPr>
+                </a:tc>
+              </a:tr>
+              <a:tr h="438912">
+                <a:tc>
+                  <a:txBody>
+                    <a:bodyPr/>
+                    <a:lstStyle/>
+                    <a:p>
+                      <a:pPr>
+                        <a:defRPr sz="1100">
+                          <a:solidFill>
+                            <a:srgbClr val="B0B8CC"/>
+                          </a:solidFill>
+                          <a:latin typeface="Calibri"/>
+                        </a:defRPr>
+                      </a:pPr>
+                      <a:r>
+                        <a:t>P2</a:t>
+                      </a:r>
+                    </a:p>
+                  </a:txBody>
+                  <a:tcPr anchor="ctr" marL="73152" marR="73152" marT="36576" marB="36576">
+                    <a:solidFill>
+                      <a:srgbClr val="141B2D"/>
+                    </a:solidFill>
+                  </a:tcPr>
+                </a:tc>
+                <a:tc>
+                  <a:txBody>
+                    <a:bodyPr/>
+                    <a:lstStyle/>
+                    <a:p>
+                      <a:pPr>
+                        <a:defRPr sz="1100">
+                          <a:solidFill>
+                            <a:srgbClr val="B0B8CC"/>
+                          </a:solidFill>
+                          <a:latin typeface="Calibri"/>
+                        </a:defRPr>
+                      </a:pPr>
+                      <a:r>
+                        <a:t>High-priority</a:t>
+                      </a:r>
+                    </a:p>
+                  </a:txBody>
+                  <a:tcPr anchor="ctr" marL="73152" marR="73152" marT="36576" marB="36576">
+                    <a:solidFill>
+                      <a:srgbClr val="141B2D"/>
+                    </a:solidFill>
+                  </a:tcPr>
+                </a:tc>
+                <a:tc>
+                  <a:txBody>
+                    <a:bodyPr/>
+                    <a:lstStyle/>
+                    <a:p>
+                      <a:pPr>
+                        <a:defRPr sz="1100">
+                          <a:solidFill>
+                            <a:srgbClr val="B0B8CC"/>
+                          </a:solidFill>
+                          <a:latin typeface="Calibri"/>
+                        </a:defRPr>
+                      </a:pPr>
+                      <a:r>
+                        <a:t>Routine telemetry, scheduled science</a:t>
+                      </a:r>
+                    </a:p>
+                  </a:txBody>
+                  <a:tcPr anchor="ctr" marL="73152" marR="73152" marT="36576" marB="36576">
+                    <a:solidFill>
+                      <a:srgbClr val="141B2D"/>
+                    </a:solidFill>
+                  </a:tcPr>
+                </a:tc>
+              </a:tr>
+              <a:tr h="438912">
+                <a:tc>
+                  <a:txBody>
+                    <a:bodyPr/>
+                    <a:lstStyle/>
+                    <a:p>
+                      <a:pPr>
+                        <a:defRPr sz="1100">
+                          <a:solidFill>
+                            <a:srgbClr val="B0B8CC"/>
+                          </a:solidFill>
+                          <a:latin typeface="Calibri"/>
+                        </a:defRPr>
+                      </a:pPr>
+                      <a:r>
+                        <a:t>P4</a:t>
+                      </a:r>
+                    </a:p>
+                  </a:txBody>
+                  <a:tcPr anchor="ctr" marL="73152" marR="73152" marT="36576" marB="36576">
+                    <a:solidFill>
+                      <a:srgbClr val="182236"/>
+                    </a:solidFill>
+                  </a:tcPr>
+                </a:tc>
+                <a:tc>
+                  <a:txBody>
+                    <a:bodyPr/>
+                    <a:lstStyle/>
+                    <a:p>
+                      <a:pPr>
+                        <a:defRPr sz="1100">
+                          <a:solidFill>
+                            <a:srgbClr val="B0B8CC"/>
+                          </a:solidFill>
+                          <a:latin typeface="Calibri"/>
+                        </a:defRPr>
+                      </a:pPr>
+                      <a:r>
+                        <a:t>Low / Bulk</a:t>
+                      </a:r>
+                    </a:p>
+                  </a:txBody>
+                  <a:tcPr anchor="ctr" marL="73152" marR="73152" marT="36576" marB="36576">
+                    <a:solidFill>
+                      <a:srgbClr val="182236"/>
+                    </a:solidFill>
+                  </a:tcPr>
+                </a:tc>
+                <a:tc>
+                  <a:txBody>
+                    <a:bodyPr/>
+                    <a:lstStyle/>
+                    <a:p>
+                      <a:pPr>
+                        <a:defRPr sz="1100">
+                          <a:solidFill>
+                            <a:srgbClr val="B0B8CC"/>
+                          </a:solidFill>
+                          <a:latin typeface="Calibri"/>
+                        </a:defRPr>
+                      </a:pPr>
+                      <a:r>
+                        <a:t>Housekeeping logs, file transfers</a:t>
+                      </a:r>
+                    </a:p>
+                  </a:txBody>
+                  <a:tcPr anchor="ctr" marL="73152" marR="73152" marT="36576" marB="36576">
+                    <a:solidFill>
+                      <a:srgbClr val="182236"/>
+                    </a:solidFill>
+                  </a:tcPr>
+                </a:tc>
+              </a:tr>
+            </a:tbl>
+          </a:graphicData>
+        </a:graphic>
+      </p:graphicFrame>
+      <p:graphicFrame>
+        <p:nvGraphicFramePr>
+          <p:cNvPr id="6" name="Table 5"/>
+          <p:cNvGraphicFramePr>
+            <a:graphicFrameLocks noGrp="1"/>
+          </p:cNvGraphicFramePr>
+          <p:nvPr/>
+        </p:nvGraphicFramePr>
+        <p:xfrm>
+          <a:off x="6949440" y="1463040"/>
+          <a:ext cx="4937760" cy="1828800"/>
+        </p:xfrm>
+        <a:graphic>
+          <a:graphicData uri="http://schemas.openxmlformats.org/drawingml/2006/table">
+            <a:tbl>
+              <a:tblPr firstRow="1" bandRow="1">
+                <a:tableStyleId>{5C22544A-7EE6-4342-B048-85BDC9FD1C3A}</a:tableStyleId>
+              </a:tblPr>
+              <a:tblGrid>
+                <a:gridCol w="1645920"/>
+                <a:gridCol w="1645920"/>
+                <a:gridCol w="1645920"/>
+              </a:tblGrid>
+              <a:tr h="457200">
+                <a:tc>
+                  <a:txBody>
+                    <a:bodyPr/>
+                    <a:lstStyle/>
+                    <a:p>
+                      <a:pPr algn="ctr">
+                        <a:defRPr b="1" sz="1200">
+                          <a:solidFill>
+                            <a:srgbClr val="FFFFFF"/>
+                          </a:solidFill>
+                          <a:latin typeface="Calibri"/>
+                        </a:defRPr>
+                      </a:pPr>
+                      <a:r>
+                        <a:t>Data type</a:t>
+                      </a:r>
+                    </a:p>
+                  </a:txBody>
+                  <a:tcPr anchor="ctr" marL="73152" marR="73152" marT="36576" marB="36576">
+                    <a:solidFill>
+                      <a:srgbClr val="8B5CF6"/>
+                    </a:solidFill>
+                  </a:tcPr>
+                </a:tc>
+                <a:tc>
+                  <a:txBody>
+                    <a:bodyPr/>
+                    <a:lstStyle/>
+                    <a:p>
+                      <a:pPr algn="ctr">
+                        <a:defRPr b="1" sz="1200">
+                          <a:solidFill>
+                            <a:srgbClr val="FFFFFF"/>
+                          </a:solidFill>
+                          <a:latin typeface="Calibri"/>
+                        </a:defRPr>
+                      </a:pPr>
+                      <a:r>
+                        <a:t>Standard</a:t>
+                      </a:r>
+                    </a:p>
+                  </a:txBody>
+                  <a:tcPr anchor="ctr" marL="73152" marR="73152" marT="36576" marB="36576">
+                    <a:solidFill>
+                      <a:srgbClr val="8B5CF6"/>
+                    </a:solidFill>
+                  </a:tcPr>
+                </a:tc>
+                <a:tc>
+                  <a:txBody>
+                    <a:bodyPr/>
+                    <a:lstStyle/>
+                    <a:p>
+                      <a:pPr algn="ctr">
+                        <a:defRPr b="1" sz="1200">
+                          <a:solidFill>
+                            <a:srgbClr val="FFFFFF"/>
+                          </a:solidFill>
+                          <a:latin typeface="Calibri"/>
+                        </a:defRPr>
+                      </a:pPr>
+                      <a:r>
+                        <a:t>Ratio</a:t>
+                      </a:r>
+                    </a:p>
+                  </a:txBody>
+                  <a:tcPr anchor="ctr" marL="73152" marR="73152" marT="36576" marB="36576">
+                    <a:solidFill>
+                      <a:srgbClr val="8B5CF6"/>
+                    </a:solidFill>
+                  </a:tcPr>
+                </a:tc>
+              </a:tr>
+              <a:tr h="457200">
+                <a:tc>
+                  <a:txBody>
+                    <a:bodyPr/>
+                    <a:lstStyle/>
+                    <a:p>
+                      <a:pPr>
+                        <a:defRPr sz="1100">
+                          <a:solidFill>
+                            <a:srgbClr val="B0B8CC"/>
+                          </a:solidFill>
+                          <a:latin typeface="Calibri"/>
+                        </a:defRPr>
+                      </a:pPr>
+                      <a:r>
+                        <a:t>Telemetry</a:t>
+                      </a:r>
+                    </a:p>
+                  </a:txBody>
+                  <a:tcPr anchor="ctr" marL="73152" marR="73152" marT="36576" marB="36576">
+                    <a:solidFill>
+                      <a:srgbClr val="141B2D"/>
+                    </a:solidFill>
+                  </a:tcPr>
+                </a:tc>
+                <a:tc>
+                  <a:txBody>
+                    <a:bodyPr/>
+                    <a:lstStyle/>
+                    <a:p>
+                      <a:pPr>
+                        <a:defRPr sz="1100">
+                          <a:solidFill>
+                            <a:srgbClr val="B0B8CC"/>
+                          </a:solidFill>
+                          <a:latin typeface="Calibri"/>
+                        </a:defRPr>
+                      </a:pPr>
+                      <a:r>
+                        <a:t>CCSDS 121</a:t>
+                      </a:r>
+                    </a:p>
+                  </a:txBody>
+                  <a:tcPr anchor="ctr" marL="73152" marR="73152" marT="36576" marB="36576">
+                    <a:solidFill>
+                      <a:srgbClr val="141B2D"/>
+                    </a:solidFill>
+                  </a:tcPr>
+                </a:tc>
+                <a:tc>
+                  <a:txBody>
+                    <a:bodyPr/>
+                    <a:lstStyle/>
+                    <a:p>
+                      <a:pPr>
+                        <a:defRPr sz="1100">
+                          <a:solidFill>
+                            <a:srgbClr val="B0B8CC"/>
+                          </a:solidFill>
+                          <a:latin typeface="Calibri"/>
+                        </a:defRPr>
+                      </a:pPr>
+                      <a:r>
+                        <a:t>3x</a:t>
+                      </a:r>
+                    </a:p>
+                  </a:txBody>
+                  <a:tcPr anchor="ctr" marL="73152" marR="73152" marT="36576" marB="36576">
+                    <a:solidFill>
+                      <a:srgbClr val="141B2D"/>
+                    </a:solidFill>
+                  </a:tcPr>
+                </a:tc>
+              </a:tr>
+              <a:tr h="457200">
+                <a:tc>
+                  <a:txBody>
+                    <a:bodyPr/>
+                    <a:lstStyle/>
+                    <a:p>
+                      <a:pPr>
+                        <a:defRPr sz="1100">
+                          <a:solidFill>
+                            <a:srgbClr val="B0B8CC"/>
+                          </a:solidFill>
+                          <a:latin typeface="Calibri"/>
+                        </a:defRPr>
+                      </a:pPr>
+                      <a:r>
+                        <a:t>Imagery (lossy)</a:t>
+                      </a:r>
+                    </a:p>
+                  </a:txBody>
+                  <a:tcPr anchor="ctr" marL="73152" marR="73152" marT="36576" marB="36576">
+                    <a:solidFill>
+                      <a:srgbClr val="182236"/>
+                    </a:solidFill>
+                  </a:tcPr>
+                </a:tc>
+                <a:tc>
+                  <a:txBody>
+                    <a:bodyPr/>
+                    <a:lstStyle/>
+                    <a:p>
+                      <a:pPr>
+                        <a:defRPr sz="1100">
+                          <a:solidFill>
+                            <a:srgbClr val="B0B8CC"/>
+                          </a:solidFill>
+                          <a:latin typeface="Calibri"/>
+                        </a:defRPr>
+                      </a:pPr>
+                      <a:r>
+                        <a:t>CCSDS 122</a:t>
+                      </a:r>
+                    </a:p>
+                  </a:txBody>
+                  <a:tcPr anchor="ctr" marL="73152" marR="73152" marT="36576" marB="36576">
+                    <a:solidFill>
+                      <a:srgbClr val="182236"/>
+                    </a:solidFill>
+                  </a:tcPr>
+                </a:tc>
+                <a:tc>
+                  <a:txBody>
+                    <a:bodyPr/>
+                    <a:lstStyle/>
+                    <a:p>
+                      <a:pPr>
+                        <a:defRPr sz="1100">
+                          <a:solidFill>
+                            <a:srgbClr val="B0B8CC"/>
+                          </a:solidFill>
+                          <a:latin typeface="Calibri"/>
+                        </a:defRPr>
+                      </a:pPr>
+                      <a:r>
+                        <a:t>10x</a:t>
+                      </a:r>
+                    </a:p>
+                  </a:txBody>
+                  <a:tcPr anchor="ctr" marL="73152" marR="73152" marT="36576" marB="36576">
+                    <a:solidFill>
+                      <a:srgbClr val="182236"/>
+                    </a:solidFill>
+                  </a:tcPr>
+                </a:tc>
+              </a:tr>
+              <a:tr h="457200">
+                <a:tc>
+                  <a:txBody>
+                    <a:bodyPr/>
+                    <a:lstStyle/>
+                    <a:p>
+                      <a:pPr>
+                        <a:defRPr sz="1100">
+                          <a:solidFill>
+                            <a:srgbClr val="B0B8CC"/>
+                          </a:solidFill>
+                          <a:latin typeface="Calibri"/>
+                        </a:defRPr>
+                      </a:pPr>
+                      <a:r>
+                        <a:t>Video</a:t>
+                      </a:r>
+                    </a:p>
+                  </a:txBody>
+                  <a:tcPr anchor="ctr" marL="73152" marR="73152" marT="36576" marB="36576">
+                    <a:solidFill>
+                      <a:srgbClr val="141B2D"/>
+                    </a:solidFill>
+                  </a:tcPr>
+                </a:tc>
+                <a:tc>
+                  <a:txBody>
+                    <a:bodyPr/>
+                    <a:lstStyle/>
+                    <a:p>
+                      <a:pPr>
+                        <a:defRPr sz="1100">
+                          <a:solidFill>
+                            <a:srgbClr val="B0B8CC"/>
+                          </a:solidFill>
+                          <a:latin typeface="Calibri"/>
+                        </a:defRPr>
+                      </a:pPr>
+                      <a:r>
+                        <a:t>H.265</a:t>
+                      </a:r>
+                    </a:p>
+                  </a:txBody>
+                  <a:tcPr anchor="ctr" marL="73152" marR="73152" marT="36576" marB="36576">
+                    <a:solidFill>
+                      <a:srgbClr val="141B2D"/>
+                    </a:solidFill>
+                  </a:tcPr>
+                </a:tc>
+                <a:tc>
+                  <a:txBody>
+                    <a:bodyPr/>
+                    <a:lstStyle/>
+                    <a:p>
+                      <a:pPr>
+                        <a:defRPr sz="1100">
+                          <a:solidFill>
+                            <a:srgbClr val="B0B8CC"/>
+                          </a:solidFill>
+                          <a:latin typeface="Calibri"/>
+                        </a:defRPr>
+                      </a:pPr>
+                      <a:r>
+                        <a:t>50x</a:t>
+                      </a:r>
+                    </a:p>
+                  </a:txBody>
+                  <a:tcPr anchor="ctr" marL="73152" marR="73152" marT="36576" marB="36576">
+                    <a:solidFill>
+                      <a:srgbClr val="141B2D"/>
+                    </a:solidFill>
+                  </a:tcPr>
+                </a:tc>
+              </a:tr>
+            </a:tbl>
+          </a:graphicData>
+        </a:graphic>
+      </p:graphicFrame>
+      <p:sp>
+        <p:nvSpPr>
+          <p:cNvPr id="7" name="Rounded Rectangle 6"/>
+          <p:cNvSpPr/>
+          <p:nvPr/>
+        </p:nvSpPr>
+        <p:spPr>
+          <a:xfrm>
+            <a:off x="274320" y="4023360"/>
+            <a:ext cx="2743200" cy="1097280"/>
           </a:xfrm>
           <a:prstGeom prst="roundRect">
             <a:avLst/>
@@ -11621,7 +12324,7 @@
           </a:solidFill>
           <a:ln w="12700">
             <a:solidFill>
-              <a:srgbClr val="1E2A42"/>
+              <a:srgbClr val="00D4AA"/>
             </a:solidFill>
           </a:ln>
           <a:effectLst/>
@@ -11641,144 +12344,52 @@
           </a:fontRef>
         </p:style>
         <p:txBody>
-          <a:bodyPr rtlCol="0" anchor="ctr" wrap="square" lIns="137160" rIns="137160" tIns="91440" bIns="91440"/>
+          <a:bodyPr rtlCol="0" anchor="ctr" wrap="square"/>
           <a:lstStyle/>
           <a:p>
             <a:pPr algn="ctr">
+              <a:defRPr sz="2400" b="1">
+                <a:solidFill>
+                  <a:srgbClr val="00D4AA"/>
+                </a:solidFill>
+                <a:latin typeface="Calibri"/>
+              </a:defRPr>
+            </a:pPr>
+            <a:r>
+              <a:t>100%</a:t>
+            </a:r>
+          </a:p>
+          <a:p>
+            <a:pPr algn="ctr">
+              <a:spcBef>
+                <a:spcPts val="200"/>
+              </a:spcBef>
               <a:spcAft>
-                <a:spcPts val="1000"/>
+                <a:spcPts val="400"/>
               </a:spcAft>
-              <a:defRPr sz="1400" b="1">
-                <a:solidFill>
-                  <a:srgbClr val="00D4AA"/>
-                </a:solidFill>
-                <a:latin typeface="Calibri"/>
-              </a:defRPr>
-            </a:pPr>
-            <a:r>
-              <a:t>Application → Transport</a:t>
-            </a:r>
-          </a:p>
-          <a:p>
-            <a:pPr>
-              <a:spcBef>
-                <a:spcPts val="600"/>
-              </a:spcBef>
-              <a:defRPr sz="1100" b="1">
-                <a:solidFill>
-                  <a:srgbClr val="FFFFFF"/>
-                </a:solidFill>
-              </a:defRPr>
-            </a:pPr>
-            <a:r>
-              <a:t>1. Source Node</a:t>
-            </a:r>
-          </a:p>
-          <a:p>
-            <a:pPr>
-              <a:defRPr sz="900">
+              <a:defRPr sz="1000" b="0">
                 <a:solidFill>
                   <a:srgbClr val="B0B8CC"/>
                 </a:solidFill>
-              </a:defRPr>
-            </a:pPr>
-            <a:r>
-              <a:t>Science data generated</a:t>
-            </a:r>
-          </a:p>
-          <a:p>
-            <a:pPr>
-              <a:spcBef>
-                <a:spcPts val="600"/>
-              </a:spcBef>
-              <a:defRPr sz="1100" b="1">
-                <a:solidFill>
-                  <a:srgbClr val="FFFFFF"/>
-                </a:solidFill>
-              </a:defRPr>
-            </a:pPr>
-            <a:r>
-              <a:t>2. Bundle Protocol</a:t>
-            </a:r>
-          </a:p>
-          <a:p>
-            <a:pPr>
-              <a:defRPr sz="900">
-                <a:solidFill>
-                  <a:srgbClr val="B0B8CC"/>
-                </a:solidFill>
-              </a:defRPr>
-            </a:pPr>
-            <a:r>
-              <a:t>BPv7 wraps data + metadata</a:t>
-            </a:r>
-          </a:p>
-          <a:p>
-            <a:pPr>
-              <a:spcBef>
-                <a:spcPts val="600"/>
-              </a:spcBef>
-              <a:defRPr sz="1100" b="1">
-                <a:solidFill>
-                  <a:srgbClr val="FFFFFF"/>
-                </a:solidFill>
-              </a:defRPr>
-            </a:pPr>
-            <a:r>
-              <a:t>3. RL Routing</a:t>
-            </a:r>
-          </a:p>
-          <a:p>
-            <a:pPr>
-              <a:defRPr sz="900">
-                <a:solidFill>
-                  <a:srgbClr val="B0B8CC"/>
-                </a:solidFill>
-              </a:defRPr>
-            </a:pPr>
-            <a:r>
-              <a:t>Agent evaluates state, selects hop</a:t>
-            </a:r>
-          </a:p>
-          <a:p>
-            <a:pPr>
-              <a:spcBef>
-                <a:spcPts val="600"/>
-              </a:spcBef>
-              <a:defRPr sz="1100" b="1">
-                <a:solidFill>
-                  <a:srgbClr val="FFFFFF"/>
-                </a:solidFill>
-              </a:defRPr>
-            </a:pPr>
-            <a:r>
-              <a:t>4. QKD Encrypt</a:t>
-            </a:r>
-          </a:p>
-          <a:p>
-            <a:pPr>
-              <a:defRPr sz="900">
-                <a:solidFill>
-                  <a:srgbClr val="B0B8CC"/>
-                </a:solidFill>
-              </a:defRPr>
-            </a:pPr>
-            <a:r>
-              <a:t>BB84 shared key applied</a:t>
-            </a:r>
-          </a:p>
-        </p:txBody>
-      </p:sp>
-      <p:sp>
-        <p:nvSpPr>
-          <p:cNvPr id="4" name="Rounded Rectangle 3"/>
+                <a:latin typeface="Calibri"/>
+              </a:defRPr>
+            </a:pPr>
+            <a:r>
+              <a:t>Link utilization (no wasted bandwidth)</a:t>
+            </a:r>
+          </a:p>
+        </p:txBody>
+      </p:sp>
+      <p:sp>
+        <p:nvSpPr>
+          <p:cNvPr id="8" name="Rounded Rectangle 7"/>
           <p:cNvSpPr/>
           <p:nvPr/>
         </p:nvSpPr>
         <p:spPr>
           <a:xfrm>
-            <a:off x="4754880" y="1188720"/>
-            <a:ext cx="3931920" cy="3474720"/>
+            <a:off x="3200400" y="4023360"/>
+            <a:ext cx="2743200" cy="1097280"/>
           </a:xfrm>
           <a:prstGeom prst="roundRect">
             <a:avLst/>
@@ -11788,7 +12399,7 @@
           </a:solidFill>
           <a:ln w="12700">
             <a:solidFill>
-              <a:srgbClr val="1E2A42"/>
+              <a:srgbClr val="2ECC71"/>
             </a:solidFill>
           </a:ln>
           <a:effectLst/>
@@ -11808,144 +12419,202 @@
           </a:fontRef>
         </p:style>
         <p:txBody>
-          <a:bodyPr rtlCol="0" anchor="ctr" wrap="square" lIns="137160" rIns="137160" tIns="91440" bIns="91440"/>
+          <a:bodyPr rtlCol="0" anchor="ctr" wrap="square"/>
           <a:lstStyle/>
           <a:p>
             <a:pPr algn="ctr">
+              <a:defRPr sz="2400" b="1">
+                <a:solidFill>
+                  <a:srgbClr val="2ECC71"/>
+                </a:solidFill>
+                <a:latin typeface="Calibri"/>
+              </a:defRPr>
+            </a:pPr>
+            <a:r>
+              <a:t>5 / 6</a:t>
+            </a:r>
+          </a:p>
+          <a:p>
+            <a:pPr algn="ctr">
+              <a:spcBef>
+                <a:spcPts val="200"/>
+              </a:spcBef>
               <a:spcAft>
-                <a:spcPts val="1000"/>
+                <a:spcPts val="400"/>
               </a:spcAft>
-              <a:defRPr sz="1400" b="1">
-                <a:solidFill>
-                  <a:srgbClr val="00D4AA"/>
-                </a:solidFill>
-                <a:latin typeface="Calibri"/>
-              </a:defRPr>
-            </a:pPr>
-            <a:r>
-              <a:t>Convergence → Physical → Delivery</a:t>
-            </a:r>
-          </a:p>
-          <a:p>
-            <a:pPr>
+              <a:defRPr sz="1000" b="0">
+                <a:solidFill>
+                  <a:srgbClr val="B0B8CC"/>
+                </a:solidFill>
+                <a:latin typeface="Calibri"/>
+              </a:defRPr>
+            </a:pPr>
+            <a:r>
+              <a:t>Items fully delivered by priority</a:t>
+            </a:r>
+          </a:p>
+        </p:txBody>
+      </p:sp>
+      <p:sp>
+        <p:nvSpPr>
+          <p:cNvPr id="9" name="Rounded Rectangle 8"/>
+          <p:cNvSpPr/>
+          <p:nvPr/>
+        </p:nvSpPr>
+        <p:spPr>
+          <a:xfrm>
+            <a:off x="6126480" y="4023360"/>
+            <a:ext cx="2743200" cy="1097280"/>
+          </a:xfrm>
+          <a:prstGeom prst="roundRect">
+            <a:avLst/>
+          </a:prstGeom>
+          <a:solidFill>
+            <a:srgbClr val="141B2D"/>
+          </a:solidFill>
+          <a:ln w="12700">
+            <a:solidFill>
+              <a:srgbClr val="009EFF"/>
+            </a:solidFill>
+          </a:ln>
+          <a:effectLst/>
+        </p:spPr>
+        <p:style>
+          <a:lnRef idx="1">
+            <a:schemeClr val="accent1"/>
+          </a:lnRef>
+          <a:fillRef idx="3">
+            <a:schemeClr val="accent1"/>
+          </a:fillRef>
+          <a:effectRef idx="2">
+            <a:schemeClr val="accent1"/>
+          </a:effectRef>
+          <a:fontRef idx="minor">
+            <a:schemeClr val="lt1"/>
+          </a:fontRef>
+        </p:style>
+        <p:txBody>
+          <a:bodyPr rtlCol="0" anchor="ctr" wrap="square"/>
+          <a:lstStyle/>
+          <a:p>
+            <a:pPr algn="ctr">
+              <a:defRPr sz="2400" b="1">
+                <a:solidFill>
+                  <a:srgbClr val="009EFF"/>
+                </a:solidFill>
+                <a:latin typeface="Calibri"/>
+              </a:defRPr>
+            </a:pPr>
+            <a:r>
+              <a:t>BPv7</a:t>
+            </a:r>
+          </a:p>
+          <a:p>
+            <a:pPr algn="ctr">
               <a:spcBef>
-                <a:spcPts val="600"/>
+                <a:spcPts val="200"/>
               </a:spcBef>
-              <a:defRPr sz="1100" b="1">
-                <a:solidFill>
-                  <a:srgbClr val="FFFFFF"/>
-                </a:solidFill>
-              </a:defRPr>
-            </a:pPr>
-            <a:r>
-              <a:t>1. LTP Segmentation</a:t>
-            </a:r>
-          </a:p>
-          <a:p>
-            <a:pPr>
-              <a:defRPr sz="900">
+              <a:spcAft>
+                <a:spcPts val="400"/>
+              </a:spcAft>
+              <a:defRPr sz="1000" b="0">
                 <a:solidFill>
                   <a:srgbClr val="B0B8CC"/>
                 </a:solidFill>
-              </a:defRPr>
-            </a:pPr>
-            <a:r>
-              <a:t>Bundle split into blocks</a:t>
-            </a:r>
-          </a:p>
-          <a:p>
-            <a:pPr>
+                <a:latin typeface="Calibri"/>
+              </a:defRPr>
+            </a:pPr>
+            <a:r>
+              <a:t>Fragmentation defers bulk remainder</a:t>
+            </a:r>
+          </a:p>
+        </p:txBody>
+      </p:sp>
+      <p:sp>
+        <p:nvSpPr>
+          <p:cNvPr id="10" name="Rounded Rectangle 9"/>
+          <p:cNvSpPr/>
+          <p:nvPr/>
+        </p:nvSpPr>
+        <p:spPr>
+          <a:xfrm>
+            <a:off x="9052560" y="4023360"/>
+            <a:ext cx="2834640" cy="1097280"/>
+          </a:xfrm>
+          <a:prstGeom prst="roundRect">
+            <a:avLst/>
+          </a:prstGeom>
+          <a:solidFill>
+            <a:srgbClr val="141B2D"/>
+          </a:solidFill>
+          <a:ln w="12700">
+            <a:solidFill>
+              <a:srgbClr val="FF4D4D"/>
+            </a:solidFill>
+          </a:ln>
+          <a:effectLst/>
+        </p:spPr>
+        <p:style>
+          <a:lnRef idx="1">
+            <a:schemeClr val="accent1"/>
+          </a:lnRef>
+          <a:fillRef idx="3">
+            <a:schemeClr val="accent1"/>
+          </a:fillRef>
+          <a:effectRef idx="2">
+            <a:schemeClr val="accent1"/>
+          </a:effectRef>
+          <a:fontRef idx="minor">
+            <a:schemeClr val="lt1"/>
+          </a:fontRef>
+        </p:style>
+        <p:txBody>
+          <a:bodyPr rtlCol="0" anchor="ctr" wrap="square"/>
+          <a:lstStyle/>
+          <a:p>
+            <a:pPr algn="ctr">
+              <a:defRPr sz="2400" b="1">
+                <a:solidFill>
+                  <a:srgbClr val="FF4D4D"/>
+                </a:solidFill>
+                <a:latin typeface="Calibri"/>
+              </a:defRPr>
+            </a:pPr>
+            <a:r>
+              <a:t>Preempt</a:t>
+            </a:r>
+          </a:p>
+          <a:p>
+            <a:pPr algn="ctr">
               <a:spcBef>
-                <a:spcPts val="600"/>
+                <a:spcPts val="200"/>
               </a:spcBef>
-              <a:defRPr sz="1100" b="1">
-                <a:solidFill>
-                  <a:srgbClr val="FFFFFF"/>
-                </a:solidFill>
-              </a:defRPr>
-            </a:pPr>
-            <a:r>
-              <a:t>2. Store &amp; Wait</a:t>
-            </a:r>
-          </a:p>
-          <a:p>
-            <a:pPr>
-              <a:defRPr sz="900">
+              <a:spcAft>
+                <a:spcPts val="400"/>
+              </a:spcAft>
+              <a:defRPr sz="1000" b="0">
                 <a:solidFill>
                   <a:srgbClr val="B0B8CC"/>
                 </a:solidFill>
-              </a:defRPr>
-            </a:pPr>
-            <a:r>
-              <a:t>Buffer until link available</a:t>
-            </a:r>
-          </a:p>
-          <a:p>
-            <a:pPr>
-              <a:spcBef>
-                <a:spcPts val="600"/>
-              </a:spcBef>
-              <a:defRPr sz="1100" b="1">
-                <a:solidFill>
-                  <a:srgbClr val="FFFFFF"/>
-                </a:solidFill>
-              </a:defRPr>
-            </a:pPr>
-            <a:r>
-              <a:t>3. Physical TX</a:t>
-            </a:r>
-          </a:p>
-          <a:p>
-            <a:pPr>
-              <a:defRPr sz="900">
-                <a:solidFill>
-                  <a:srgbClr val="B0B8CC"/>
-                </a:solidFill>
-              </a:defRPr>
-            </a:pPr>
-            <a:r>
-              <a:t>UHF → Optical ISL → 1550 nm → Ka-band</a:t>
-            </a:r>
-          </a:p>
-          <a:p>
-            <a:pPr>
-              <a:spcBef>
-                <a:spcPts val="600"/>
-              </a:spcBef>
-              <a:defRPr sz="1100" b="1">
-                <a:solidFill>
-                  <a:srgbClr val="FFFFFF"/>
-                </a:solidFill>
-              </a:defRPr>
-            </a:pPr>
-            <a:r>
-              <a:t>4. LTP Reassemble</a:t>
-            </a:r>
-          </a:p>
-          <a:p>
-            <a:pPr>
-              <a:defRPr sz="900">
-                <a:solidFill>
-                  <a:srgbClr val="B0B8CC"/>
-                </a:solidFill>
-              </a:defRPr>
-            </a:pPr>
-            <a:r>
-              <a:t>Reassemble → Decrypt → Deliver</a:t>
-            </a:r>
-          </a:p>
-        </p:txBody>
-      </p:sp>
-      <p:sp>
-        <p:nvSpPr>
-          <p:cNvPr id="5" name="TextBox 4"/>
+                <a:latin typeface="Calibri"/>
+              </a:defRPr>
+            </a:pPr>
+            <a:r>
+              <a:t>Emergency uses direct-to-Earth backup</a:t>
+            </a:r>
+          </a:p>
+        </p:txBody>
+      </p:sp>
+      <p:sp>
+        <p:nvSpPr>
+          <p:cNvPr id="11" name="TextBox 10"/>
           <p:cNvSpPr txBox="1"/>
           <p:nvPr/>
         </p:nvSpPr>
         <p:spPr>
           <a:xfrm>
-            <a:off x="457200" y="6400800"/>
-            <a:ext cx="4572000" cy="365760"/>
+            <a:off x="548640" y="5349240"/>
+            <a:ext cx="11155680" cy="822960"/>
           </a:xfrm>
           <a:prstGeom prst="rect">
             <a:avLst/>
@@ -11959,7 +12628,7 @@
           <a:lstStyle/>
           <a:p>
             <a:pPr algn="l">
-              <a:defRPr sz="1000" b="0">
+              <a:defRPr sz="1100" b="0">
                 <a:solidFill>
                   <a:srgbClr val="6B7B96"/>
                 </a:solidFill>
@@ -11967,21 +12636,21 @@
               </a:defRPr>
             </a:pPr>
             <a:r>
-              <a:t>AETHERIX — Interplanetary Communication Network</a:t>
-            </a:r>
-          </a:p>
-        </p:txBody>
-      </p:sp>
-      <p:sp>
-        <p:nvSpPr>
-          <p:cNvPr id="6" name="TextBox 5"/>
+              <a:t>Scenario: 30 Mbps, 15-min contact, oversubscribed. Deadline-aware, preemptive QoS scheduler delivers emergency + mission + science first; 6 GB software update fragmented to the next pass.  →  src/routing/prioritization.py</a:t>
+            </a:r>
+          </a:p>
+        </p:txBody>
+      </p:sp>
+      <p:sp>
+        <p:nvSpPr>
+          <p:cNvPr id="12" name="TextBox 11"/>
           <p:cNvSpPr txBox="1"/>
           <p:nvPr/>
         </p:nvSpPr>
         <p:spPr>
           <a:xfrm>
-            <a:off x="10058400" y="6400800"/>
-            <a:ext cx="1828800" cy="365760"/>
+            <a:off x="457200" y="6400800"/>
+            <a:ext cx="4572000" cy="365760"/>
           </a:xfrm>
           <a:prstGeom prst="rect">
             <a:avLst/>
@@ -11994,6 +12663,42 @@
           </a:bodyPr>
           <a:lstStyle/>
           <a:p>
+            <a:pPr algn="l">
+              <a:defRPr sz="1000" b="0">
+                <a:solidFill>
+                  <a:srgbClr val="6B7B96"/>
+                </a:solidFill>
+                <a:latin typeface="Calibri"/>
+              </a:defRPr>
+            </a:pPr>
+            <a:r>
+              <a:t>AETHERIX — Interplanetary Communication Network</a:t>
+            </a:r>
+          </a:p>
+        </p:txBody>
+      </p:sp>
+      <p:sp>
+        <p:nvSpPr>
+          <p:cNvPr id="13" name="TextBox 12"/>
+          <p:cNvSpPr txBox="1"/>
+          <p:nvPr/>
+        </p:nvSpPr>
+        <p:spPr>
+          <a:xfrm>
+            <a:off x="10058400" y="6400800"/>
+            <a:ext cx="1828800" cy="365760"/>
+          </a:xfrm>
+          <a:prstGeom prst="rect">
+            <a:avLst/>
+          </a:prstGeom>
+          <a:noFill/>
+        </p:spPr>
+        <p:txBody>
+          <a:bodyPr wrap="square">
+            <a:spAutoFit/>
+          </a:bodyPr>
+          <a:lstStyle/>
+          <a:p>
             <a:pPr algn="r">
               <a:defRPr sz="1000" b="0">
                 <a:solidFill>
@@ -12003,7 +12708,7 @@
               </a:defRPr>
             </a:pPr>
             <a:r>
-              <a:t>19 / 25</a:t>
+              <a:t>19 / 27</a:t>
             </a:r>
           </a:p>
         </p:txBody>
@@ -12011,7 +12716,7 @@
     </p:spTree>
   </p:cSld>
   <p:transition spd="med" advClick="1">
-    <p:wipe dir="d"/>
+    <p:push dir="l"/>
   </p:transition>
   <p:clrMapOvr>
     <a:masterClrMapping/>
@@ -12184,7 +12889,7 @@
               </a:defRPr>
             </a:pPr>
             <a:r>
-              <a:t>2 / 25</a:t>
+              <a:t>2 / 27</a:t>
             </a:r>
           </a:p>
         </p:txBody>
@@ -12197,8 +12902,8 @@
         </p:nvSpPr>
         <p:spPr>
           <a:xfrm>
-            <a:off x="640080" y="1188720"/>
-            <a:ext cx="5303520" cy="749808"/>
+            <a:off x="640080" y="1143000"/>
+            <a:ext cx="5303520" cy="658368"/>
           </a:xfrm>
           <a:prstGeom prst="roundRect">
             <a:avLst/>
@@ -12250,8 +12955,8 @@
         </p:nvSpPr>
         <p:spPr>
           <a:xfrm>
-            <a:off x="777240" y="1261872"/>
-            <a:ext cx="5029200" cy="320040"/>
+            <a:off x="777240" y="1197864"/>
+            <a:ext cx="5029200" cy="292608"/>
           </a:xfrm>
           <a:prstGeom prst="rect">
             <a:avLst/>
@@ -12265,7 +12970,7 @@
           <a:lstStyle/>
           <a:p>
             <a:pPr algn="l">
-              <a:defRPr sz="1400" b="1">
+              <a:defRPr sz="1300" b="1">
                 <a:solidFill>
                   <a:srgbClr val="FFFFFF"/>
                 </a:solidFill>
@@ -12286,8 +12991,8 @@
         </p:nvSpPr>
         <p:spPr>
           <a:xfrm>
-            <a:off x="777240" y="1572768"/>
-            <a:ext cx="5029200" cy="320040"/>
+            <a:off x="777240" y="1490472"/>
+            <a:ext cx="5029200" cy="274320"/>
           </a:xfrm>
           <a:prstGeom prst="rect">
             <a:avLst/>
@@ -12301,7 +13006,7 @@
           <a:lstStyle/>
           <a:p>
             <a:pPr algn="l">
-              <a:defRPr sz="1100" b="0">
+              <a:defRPr sz="1000" b="0">
                 <a:solidFill>
                   <a:srgbClr val="B0B8CC"/>
                 </a:solidFill>
@@ -12322,8 +13027,8 @@
         </p:nvSpPr>
         <p:spPr>
           <a:xfrm>
-            <a:off x="640080" y="2029968"/>
-            <a:ext cx="5303520" cy="749808"/>
+            <a:off x="640080" y="1874520"/>
+            <a:ext cx="5303520" cy="658368"/>
           </a:xfrm>
           <a:prstGeom prst="roundRect">
             <a:avLst/>
@@ -12375,8 +13080,8 @@
         </p:nvSpPr>
         <p:spPr>
           <a:xfrm>
-            <a:off x="777240" y="2103120"/>
-            <a:ext cx="5029200" cy="320040"/>
+            <a:off x="777240" y="1929384"/>
+            <a:ext cx="5029200" cy="292608"/>
           </a:xfrm>
           <a:prstGeom prst="rect">
             <a:avLst/>
@@ -12390,7 +13095,7 @@
           <a:lstStyle/>
           <a:p>
             <a:pPr algn="l">
-              <a:defRPr sz="1400" b="1">
+              <a:defRPr sz="1300" b="1">
                 <a:solidFill>
                   <a:srgbClr val="FFFFFF"/>
                 </a:solidFill>
@@ -12411,8 +13116,8 @@
         </p:nvSpPr>
         <p:spPr>
           <a:xfrm>
-            <a:off x="777240" y="2414016"/>
-            <a:ext cx="5029200" cy="320040"/>
+            <a:off x="777240" y="2221992"/>
+            <a:ext cx="5029200" cy="274320"/>
           </a:xfrm>
           <a:prstGeom prst="rect">
             <a:avLst/>
@@ -12426,7 +13131,7 @@
           <a:lstStyle/>
           <a:p>
             <a:pPr algn="l">
-              <a:defRPr sz="1100" b="0">
+              <a:defRPr sz="1000" b="0">
                 <a:solidFill>
                   <a:srgbClr val="B0B8CC"/>
                 </a:solidFill>
@@ -12447,8 +13152,8 @@
         </p:nvSpPr>
         <p:spPr>
           <a:xfrm>
-            <a:off x="640080" y="2871216"/>
-            <a:ext cx="5303520" cy="749808"/>
+            <a:off x="640080" y="2606040"/>
+            <a:ext cx="5303520" cy="658368"/>
           </a:xfrm>
           <a:prstGeom prst="roundRect">
             <a:avLst/>
@@ -12500,8 +13205,8 @@
         </p:nvSpPr>
         <p:spPr>
           <a:xfrm>
-            <a:off x="777240" y="2944368"/>
-            <a:ext cx="5029200" cy="320040"/>
+            <a:off x="777240" y="2660904"/>
+            <a:ext cx="5029200" cy="292608"/>
           </a:xfrm>
           <a:prstGeom prst="rect">
             <a:avLst/>
@@ -12515,7 +13220,7 @@
           <a:lstStyle/>
           <a:p>
             <a:pPr algn="l">
-              <a:defRPr sz="1400" b="1">
+              <a:defRPr sz="1300" b="1">
                 <a:solidFill>
                   <a:srgbClr val="FFFFFF"/>
                 </a:solidFill>
@@ -12536,8 +13241,8 @@
         </p:nvSpPr>
         <p:spPr>
           <a:xfrm>
-            <a:off x="777240" y="3255264"/>
-            <a:ext cx="5029200" cy="320040"/>
+            <a:off x="777240" y="2953512"/>
+            <a:ext cx="5029200" cy="274320"/>
           </a:xfrm>
           <a:prstGeom prst="rect">
             <a:avLst/>
@@ -12551,7 +13256,7 @@
           <a:lstStyle/>
           <a:p>
             <a:pPr algn="l">
-              <a:defRPr sz="1100" b="0">
+              <a:defRPr sz="1000" b="0">
                 <a:solidFill>
                   <a:srgbClr val="B0B8CC"/>
                 </a:solidFill>
@@ -12572,8 +13277,8 @@
         </p:nvSpPr>
         <p:spPr>
           <a:xfrm>
-            <a:off x="640080" y="3712464"/>
-            <a:ext cx="5303520" cy="749808"/>
+            <a:off x="640080" y="3337560"/>
+            <a:ext cx="5303520" cy="658368"/>
           </a:xfrm>
           <a:prstGeom prst="roundRect">
             <a:avLst/>
@@ -12625,8 +13330,8 @@
         </p:nvSpPr>
         <p:spPr>
           <a:xfrm>
-            <a:off x="777240" y="3785616"/>
-            <a:ext cx="5029200" cy="320040"/>
+            <a:off x="777240" y="3392424"/>
+            <a:ext cx="5029200" cy="292608"/>
           </a:xfrm>
           <a:prstGeom prst="rect">
             <a:avLst/>
@@ -12640,7 +13345,7 @@
           <a:lstStyle/>
           <a:p>
             <a:pPr algn="l">
-              <a:defRPr sz="1400" b="1">
+              <a:defRPr sz="1300" b="1">
                 <a:solidFill>
                   <a:srgbClr val="FFFFFF"/>
                 </a:solidFill>
@@ -12661,8 +13366,8 @@
         </p:nvSpPr>
         <p:spPr>
           <a:xfrm>
-            <a:off x="777240" y="4096512"/>
-            <a:ext cx="5029200" cy="320040"/>
+            <a:off x="777240" y="3685032"/>
+            <a:ext cx="5029200" cy="274320"/>
           </a:xfrm>
           <a:prstGeom prst="rect">
             <a:avLst/>
@@ -12676,7 +13381,7 @@
           <a:lstStyle/>
           <a:p>
             <a:pPr algn="l">
-              <a:defRPr sz="1100" b="0">
+              <a:defRPr sz="1000" b="0">
                 <a:solidFill>
                   <a:srgbClr val="B0B8CC"/>
                 </a:solidFill>
@@ -12697,8 +13402,8 @@
         </p:nvSpPr>
         <p:spPr>
           <a:xfrm>
-            <a:off x="640080" y="4553712"/>
-            <a:ext cx="5303520" cy="749808"/>
+            <a:off x="640080" y="4069080"/>
+            <a:ext cx="5303520" cy="658368"/>
           </a:xfrm>
           <a:prstGeom prst="roundRect">
             <a:avLst/>
@@ -12750,8 +13455,8 @@
         </p:nvSpPr>
         <p:spPr>
           <a:xfrm>
-            <a:off x="777240" y="4626864"/>
-            <a:ext cx="5029200" cy="320040"/>
+            <a:off x="777240" y="4123944"/>
+            <a:ext cx="5029200" cy="292608"/>
           </a:xfrm>
           <a:prstGeom prst="rect">
             <a:avLst/>
@@ -12765,7 +13470,7 @@
           <a:lstStyle/>
           <a:p>
             <a:pPr algn="l">
-              <a:defRPr sz="1400" b="1">
+              <a:defRPr sz="1300" b="1">
                 <a:solidFill>
                   <a:srgbClr val="FFFFFF"/>
                 </a:solidFill>
@@ -12786,8 +13491,8 @@
         </p:nvSpPr>
         <p:spPr>
           <a:xfrm>
-            <a:off x="777240" y="4937760"/>
-            <a:ext cx="5029200" cy="320040"/>
+            <a:off x="777240" y="4416552"/>
+            <a:ext cx="5029200" cy="274320"/>
           </a:xfrm>
           <a:prstGeom prst="rect">
             <a:avLst/>
@@ -12801,7 +13506,7 @@
           <a:lstStyle/>
           <a:p>
             <a:pPr algn="l">
-              <a:defRPr sz="1100" b="0">
+              <a:defRPr sz="1000" b="0">
                 <a:solidFill>
                   <a:srgbClr val="B0B8CC"/>
                 </a:solidFill>
@@ -12822,8 +13527,8 @@
         </p:nvSpPr>
         <p:spPr>
           <a:xfrm>
-            <a:off x="640080" y="5394960"/>
-            <a:ext cx="5303520" cy="749808"/>
+            <a:off x="640080" y="4800600"/>
+            <a:ext cx="5303520" cy="658368"/>
           </a:xfrm>
           <a:prstGeom prst="roundRect">
             <a:avLst/>
@@ -12875,8 +13580,8 @@
         </p:nvSpPr>
         <p:spPr>
           <a:xfrm>
-            <a:off x="777240" y="5468112"/>
-            <a:ext cx="5029200" cy="320040"/>
+            <a:off x="777240" y="4855464"/>
+            <a:ext cx="5029200" cy="292608"/>
           </a:xfrm>
           <a:prstGeom prst="rect">
             <a:avLst/>
@@ -12890,7 +13595,7 @@
           <a:lstStyle/>
           <a:p>
             <a:pPr algn="l">
-              <a:defRPr sz="1400" b="1">
+              <a:defRPr sz="1300" b="1">
                 <a:solidFill>
                   <a:srgbClr val="FFFFFF"/>
                 </a:solidFill>
@@ -12911,8 +13616,8 @@
         </p:nvSpPr>
         <p:spPr>
           <a:xfrm>
-            <a:off x="777240" y="5779008"/>
-            <a:ext cx="5029200" cy="320040"/>
+            <a:off x="777240" y="5148072"/>
+            <a:ext cx="5029200" cy="274320"/>
           </a:xfrm>
           <a:prstGeom prst="rect">
             <a:avLst/>
@@ -12926,7 +13631,7 @@
           <a:lstStyle/>
           <a:p>
             <a:pPr algn="l">
-              <a:defRPr sz="1100" b="0">
+              <a:defRPr sz="1000" b="0">
                 <a:solidFill>
                   <a:srgbClr val="B0B8CC"/>
                 </a:solidFill>
@@ -12947,8 +13652,8 @@
         </p:nvSpPr>
         <p:spPr>
           <a:xfrm>
-            <a:off x="6217920" y="1188720"/>
-            <a:ext cx="5303520" cy="749808"/>
+            <a:off x="640080" y="5532120"/>
+            <a:ext cx="5303520" cy="658368"/>
           </a:xfrm>
           <a:prstGeom prst="roundRect">
             <a:avLst/>
@@ -13000,8 +13705,8 @@
         </p:nvSpPr>
         <p:spPr>
           <a:xfrm>
-            <a:off x="6355080" y="1261872"/>
-            <a:ext cx="5029200" cy="320040"/>
+            <a:off x="777240" y="5586984"/>
+            <a:ext cx="5029200" cy="292608"/>
           </a:xfrm>
           <a:prstGeom prst="rect">
             <a:avLst/>
@@ -13015,7 +13720,7 @@
           <a:lstStyle/>
           <a:p>
             <a:pPr algn="l">
-              <a:defRPr sz="1400" b="1">
+              <a:defRPr sz="1300" b="1">
                 <a:solidFill>
                   <a:srgbClr val="FFFFFF"/>
                 </a:solidFill>
@@ -13036,8 +13741,8 @@
         </p:nvSpPr>
         <p:spPr>
           <a:xfrm>
-            <a:off x="6355080" y="1572768"/>
-            <a:ext cx="5029200" cy="320040"/>
+            <a:off x="777240" y="5879592"/>
+            <a:ext cx="5029200" cy="274320"/>
           </a:xfrm>
           <a:prstGeom prst="rect">
             <a:avLst/>
@@ -13051,7 +13756,7 @@
           <a:lstStyle/>
           <a:p>
             <a:pPr algn="l">
-              <a:defRPr sz="1100" b="0">
+              <a:defRPr sz="1000" b="0">
                 <a:solidFill>
                   <a:srgbClr val="B0B8CC"/>
                 </a:solidFill>
@@ -13072,8 +13777,8 @@
         </p:nvSpPr>
         <p:spPr>
           <a:xfrm>
-            <a:off x="6217920" y="2029968"/>
-            <a:ext cx="5303520" cy="749808"/>
+            <a:off x="6217920" y="1143000"/>
+            <a:ext cx="5303520" cy="658368"/>
           </a:xfrm>
           <a:prstGeom prst="roundRect">
             <a:avLst/>
@@ -13125,8 +13830,8 @@
         </p:nvSpPr>
         <p:spPr>
           <a:xfrm>
-            <a:off x="6355080" y="2103120"/>
-            <a:ext cx="5029200" cy="320040"/>
+            <a:off x="6355080" y="1197864"/>
+            <a:ext cx="5029200" cy="292608"/>
           </a:xfrm>
           <a:prstGeom prst="rect">
             <a:avLst/>
@@ -13140,7 +13845,7 @@
           <a:lstStyle/>
           <a:p>
             <a:pPr algn="l">
-              <a:defRPr sz="1400" b="1">
+              <a:defRPr sz="1300" b="1">
                 <a:solidFill>
                   <a:srgbClr val="FFFFFF"/>
                 </a:solidFill>
@@ -13161,8 +13866,8 @@
         </p:nvSpPr>
         <p:spPr>
           <a:xfrm>
-            <a:off x="6355080" y="2414016"/>
-            <a:ext cx="5029200" cy="320040"/>
+            <a:off x="6355080" y="1490472"/>
+            <a:ext cx="5029200" cy="274320"/>
           </a:xfrm>
           <a:prstGeom prst="rect">
             <a:avLst/>
@@ -13176,7 +13881,7 @@
           <a:lstStyle/>
           <a:p>
             <a:pPr algn="l">
-              <a:defRPr sz="1100" b="0">
+              <a:defRPr sz="1000" b="0">
                 <a:solidFill>
                   <a:srgbClr val="B0B8CC"/>
                 </a:solidFill>
@@ -13197,8 +13902,133 @@
         </p:nvSpPr>
         <p:spPr>
           <a:xfrm>
-            <a:off x="6217920" y="2871216"/>
-            <a:ext cx="5303520" cy="749808"/>
+            <a:off x="6217920" y="1874520"/>
+            <a:ext cx="5303520" cy="658368"/>
+          </a:xfrm>
+          <a:prstGeom prst="roundRect">
+            <a:avLst/>
+          </a:prstGeom>
+          <a:solidFill>
+            <a:srgbClr val="141B2D"/>
+          </a:solidFill>
+          <a:ln w="12700">
+            <a:solidFill>
+              <a:srgbClr val="FF4D4D"/>
+            </a:solidFill>
+          </a:ln>
+          <a:effectLst/>
+        </p:spPr>
+        <p:style>
+          <a:lnRef idx="1">
+            <a:schemeClr val="accent1"/>
+          </a:lnRef>
+          <a:fillRef idx="3">
+            <a:schemeClr val="accent1"/>
+          </a:fillRef>
+          <a:effectRef idx="2">
+            <a:schemeClr val="accent1"/>
+          </a:effectRef>
+          <a:fontRef idx="minor">
+            <a:schemeClr val="lt1"/>
+          </a:fontRef>
+        </p:style>
+        <p:txBody>
+          <a:bodyPr rtlCol="0" anchor="ctr" wrap="square" lIns="137160" rIns="137160" tIns="91440" bIns="91440"/>
+          <a:lstStyle/>
+          <a:p>
+            <a:pPr algn="ctr">
+              <a:defRPr sz="1600" b="1">
+                <a:solidFill>
+                  <a:srgbClr val="009EFF"/>
+                </a:solidFill>
+                <a:latin typeface="Calibri"/>
+              </a:defRPr>
+            </a:pPr>
+          </a:p>
+        </p:txBody>
+      </p:sp>
+      <p:sp>
+        <p:nvSpPr>
+          <p:cNvPr id="31" name="TextBox 30"/>
+          <p:cNvSpPr txBox="1"/>
+          <p:nvPr/>
+        </p:nvSpPr>
+        <p:spPr>
+          <a:xfrm>
+            <a:off x="6355080" y="1929384"/>
+            <a:ext cx="5029200" cy="292608"/>
+          </a:xfrm>
+          <a:prstGeom prst="rect">
+            <a:avLst/>
+          </a:prstGeom>
+          <a:noFill/>
+        </p:spPr>
+        <p:txBody>
+          <a:bodyPr wrap="square">
+            <a:spAutoFit/>
+          </a:bodyPr>
+          <a:lstStyle/>
+          <a:p>
+            <a:pPr algn="l">
+              <a:defRPr sz="1300" b="1">
+                <a:solidFill>
+                  <a:srgbClr val="FFFFFF"/>
+                </a:solidFill>
+                <a:latin typeface="Calibri"/>
+              </a:defRPr>
+            </a:pPr>
+            <a:r>
+              <a:t>09  Radiation Hardening</a:t>
+            </a:r>
+          </a:p>
+        </p:txBody>
+      </p:sp>
+      <p:sp>
+        <p:nvSpPr>
+          <p:cNvPr id="32" name="TextBox 31"/>
+          <p:cNvSpPr txBox="1"/>
+          <p:nvPr/>
+        </p:nvSpPr>
+        <p:spPr>
+          <a:xfrm>
+            <a:off x="6355080" y="2221992"/>
+            <a:ext cx="5029200" cy="274320"/>
+          </a:xfrm>
+          <a:prstGeom prst="rect">
+            <a:avLst/>
+          </a:prstGeom>
+          <a:noFill/>
+        </p:spPr>
+        <p:txBody>
+          <a:bodyPr wrap="square">
+            <a:spAutoFit/>
+          </a:bodyPr>
+          <a:lstStyle/>
+          <a:p>
+            <a:pPr algn="l">
+              <a:defRPr sz="1000" b="0">
+                <a:solidFill>
+                  <a:srgbClr val="B0B8CC"/>
+                </a:solidFill>
+                <a:latin typeface="Calibri"/>
+              </a:defRPr>
+            </a:pPr>
+            <a:r>
+              <a:t>SEU/TID, TMR, ECC, scrubbing, FDIR</a:t>
+            </a:r>
+          </a:p>
+        </p:txBody>
+      </p:sp>
+      <p:sp>
+        <p:nvSpPr>
+          <p:cNvPr id="33" name="Rounded Rectangle 32"/>
+          <p:cNvSpPr/>
+          <p:nvPr/>
+        </p:nvSpPr>
+        <p:spPr>
+          <a:xfrm>
+            <a:off x="6217920" y="2606040"/>
+            <a:ext cx="5303520" cy="658368"/>
           </a:xfrm>
           <a:prstGeom prst="roundRect">
             <a:avLst/>
@@ -13244,14 +14074,14 @@
       </p:sp>
       <p:sp>
         <p:nvSpPr>
-          <p:cNvPr id="31" name="TextBox 30"/>
+          <p:cNvPr id="34" name="TextBox 33"/>
           <p:cNvSpPr txBox="1"/>
           <p:nvPr/>
         </p:nvSpPr>
         <p:spPr>
           <a:xfrm>
-            <a:off x="6355080" y="2944368"/>
-            <a:ext cx="5029200" cy="320040"/>
+            <a:off x="6355080" y="2660904"/>
+            <a:ext cx="5029200" cy="292608"/>
           </a:xfrm>
           <a:prstGeom prst="rect">
             <a:avLst/>
@@ -13265,7 +14095,7 @@
           <a:lstStyle/>
           <a:p>
             <a:pPr algn="l">
-              <a:defRPr sz="1400" b="1">
+              <a:defRPr sz="1300" b="1">
                 <a:solidFill>
                   <a:srgbClr val="FFFFFF"/>
                 </a:solidFill>
@@ -13273,21 +14103,21 @@
               </a:defRPr>
             </a:pPr>
             <a:r>
-              <a:t>09  Mars Mission</a:t>
-            </a:r>
-          </a:p>
-        </p:txBody>
-      </p:sp>
-      <p:sp>
-        <p:nvSpPr>
-          <p:cNvPr id="32" name="TextBox 31"/>
+              <a:t>10  Data Prioritization</a:t>
+            </a:r>
+          </a:p>
+        </p:txBody>
+      </p:sp>
+      <p:sp>
+        <p:nvSpPr>
+          <p:cNvPr id="35" name="TextBox 34"/>
           <p:cNvSpPr txBox="1"/>
           <p:nvPr/>
         </p:nvSpPr>
         <p:spPr>
           <a:xfrm>
-            <a:off x="6355080" y="3255264"/>
-            <a:ext cx="5029200" cy="320040"/>
+            <a:off x="6355080" y="2953512"/>
+            <a:ext cx="5029200" cy="274320"/>
           </a:xfrm>
           <a:prstGeom prst="rect">
             <a:avLst/>
@@ -13301,7 +14131,7 @@
           <a:lstStyle/>
           <a:p>
             <a:pPr algn="l">
-              <a:defRPr sz="1100" b="0">
+              <a:defRPr sz="1000" b="0">
                 <a:solidFill>
                   <a:srgbClr val="B0B8CC"/>
                 </a:solidFill>
@@ -13309,6 +14139,131 @@
               </a:defRPr>
             </a:pPr>
             <a:r>
+              <a:t>QoS triage, compression, preemption</a:t>
+            </a:r>
+          </a:p>
+        </p:txBody>
+      </p:sp>
+      <p:sp>
+        <p:nvSpPr>
+          <p:cNvPr id="36" name="Rounded Rectangle 35"/>
+          <p:cNvSpPr/>
+          <p:nvPr/>
+        </p:nvSpPr>
+        <p:spPr>
+          <a:xfrm>
+            <a:off x="6217920" y="3337560"/>
+            <a:ext cx="5303520" cy="658368"/>
+          </a:xfrm>
+          <a:prstGeom prst="roundRect">
+            <a:avLst/>
+          </a:prstGeom>
+          <a:solidFill>
+            <a:srgbClr val="141B2D"/>
+          </a:solidFill>
+          <a:ln w="12700">
+            <a:solidFill>
+              <a:srgbClr val="FF8C00"/>
+            </a:solidFill>
+          </a:ln>
+          <a:effectLst/>
+        </p:spPr>
+        <p:style>
+          <a:lnRef idx="1">
+            <a:schemeClr val="accent1"/>
+          </a:lnRef>
+          <a:fillRef idx="3">
+            <a:schemeClr val="accent1"/>
+          </a:fillRef>
+          <a:effectRef idx="2">
+            <a:schemeClr val="accent1"/>
+          </a:effectRef>
+          <a:fontRef idx="minor">
+            <a:schemeClr val="lt1"/>
+          </a:fontRef>
+        </p:style>
+        <p:txBody>
+          <a:bodyPr rtlCol="0" anchor="ctr" wrap="square" lIns="137160" rIns="137160" tIns="91440" bIns="91440"/>
+          <a:lstStyle/>
+          <a:p>
+            <a:pPr algn="ctr">
+              <a:defRPr sz="1600" b="1">
+                <a:solidFill>
+                  <a:srgbClr val="009EFF"/>
+                </a:solidFill>
+                <a:latin typeface="Calibri"/>
+              </a:defRPr>
+            </a:pPr>
+          </a:p>
+        </p:txBody>
+      </p:sp>
+      <p:sp>
+        <p:nvSpPr>
+          <p:cNvPr id="37" name="TextBox 36"/>
+          <p:cNvSpPr txBox="1"/>
+          <p:nvPr/>
+        </p:nvSpPr>
+        <p:spPr>
+          <a:xfrm>
+            <a:off x="6355080" y="3392424"/>
+            <a:ext cx="5029200" cy="292608"/>
+          </a:xfrm>
+          <a:prstGeom prst="rect">
+            <a:avLst/>
+          </a:prstGeom>
+          <a:noFill/>
+        </p:spPr>
+        <p:txBody>
+          <a:bodyPr wrap="square">
+            <a:spAutoFit/>
+          </a:bodyPr>
+          <a:lstStyle/>
+          <a:p>
+            <a:pPr algn="l">
+              <a:defRPr sz="1300" b="1">
+                <a:solidFill>
+                  <a:srgbClr val="FFFFFF"/>
+                </a:solidFill>
+                <a:latin typeface="Calibri"/>
+              </a:defRPr>
+            </a:pPr>
+            <a:r>
+              <a:t>11  Mars Mission</a:t>
+            </a:r>
+          </a:p>
+        </p:txBody>
+      </p:sp>
+      <p:sp>
+        <p:nvSpPr>
+          <p:cNvPr id="38" name="TextBox 37"/>
+          <p:cNvSpPr txBox="1"/>
+          <p:nvPr/>
+        </p:nvSpPr>
+        <p:spPr>
+          <a:xfrm>
+            <a:off x="6355080" y="3685032"/>
+            <a:ext cx="5029200" cy="274320"/>
+          </a:xfrm>
+          <a:prstGeom prst="rect">
+            <a:avLst/>
+          </a:prstGeom>
+          <a:noFill/>
+        </p:spPr>
+        <p:txBody>
+          <a:bodyPr wrap="square">
+            <a:spAutoFit/>
+          </a:bodyPr>
+          <a:lstStyle/>
+          <a:p>
+            <a:pPr algn="l">
+              <a:defRPr sz="1000" b="0">
+                <a:solidFill>
+                  <a:srgbClr val="B0B8CC"/>
+                </a:solidFill>
+                <a:latin typeface="Calibri"/>
+              </a:defRPr>
+            </a:pPr>
+            <a:r>
               <a:t>End-to-end simulation walkthrough</a:t>
             </a:r>
           </a:p>
@@ -13316,14 +14271,14 @@
       </p:sp>
       <p:sp>
         <p:nvSpPr>
-          <p:cNvPr id="33" name="Rounded Rectangle 32"/>
+          <p:cNvPr id="39" name="Rounded Rectangle 38"/>
           <p:cNvSpPr/>
           <p:nvPr/>
         </p:nvSpPr>
         <p:spPr>
           <a:xfrm>
-            <a:off x="6217920" y="3712464"/>
-            <a:ext cx="5303520" cy="749808"/>
+            <a:off x="6217920" y="4069080"/>
+            <a:ext cx="5303520" cy="658368"/>
           </a:xfrm>
           <a:prstGeom prst="roundRect">
             <a:avLst/>
@@ -13369,14 +14324,14 @@
       </p:sp>
       <p:sp>
         <p:nvSpPr>
-          <p:cNvPr id="34" name="TextBox 33"/>
+          <p:cNvPr id="40" name="TextBox 39"/>
           <p:cNvSpPr txBox="1"/>
           <p:nvPr/>
         </p:nvSpPr>
         <p:spPr>
           <a:xfrm>
-            <a:off x="6355080" y="3785616"/>
-            <a:ext cx="5029200" cy="320040"/>
+            <a:off x="6355080" y="4123944"/>
+            <a:ext cx="5029200" cy="292608"/>
           </a:xfrm>
           <a:prstGeom prst="rect">
             <a:avLst/>
@@ -13390,7 +14345,7 @@
           <a:lstStyle/>
           <a:p>
             <a:pPr algn="l">
-              <a:defRPr sz="1400" b="1">
+              <a:defRPr sz="1300" b="1">
                 <a:solidFill>
                   <a:srgbClr val="FFFFFF"/>
                 </a:solidFill>
@@ -13398,21 +14353,21 @@
               </a:defRPr>
             </a:pPr>
             <a:r>
-              <a:t>10  Performance</a:t>
-            </a:r>
-          </a:p>
-        </p:txBody>
-      </p:sp>
-      <p:sp>
-        <p:nvSpPr>
-          <p:cNvPr id="35" name="TextBox 34"/>
+              <a:t>12  Performance</a:t>
+            </a:r>
+          </a:p>
+        </p:txBody>
+      </p:sp>
+      <p:sp>
+        <p:nvSpPr>
+          <p:cNvPr id="41" name="TextBox 40"/>
           <p:cNvSpPr txBox="1"/>
           <p:nvPr/>
         </p:nvSpPr>
         <p:spPr>
           <a:xfrm>
-            <a:off x="6355080" y="4096512"/>
-            <a:ext cx="5029200" cy="320040"/>
+            <a:off x="6355080" y="4416552"/>
+            <a:ext cx="5029200" cy="274320"/>
           </a:xfrm>
           <a:prstGeom prst="rect">
             <a:avLst/>
@@ -13426,7 +14381,7 @@
           <a:lstStyle/>
           <a:p>
             <a:pPr algn="l">
-              <a:defRPr sz="1100" b="0">
+              <a:defRPr sz="1000" b="0">
                 <a:solidFill>
                   <a:srgbClr val="B0B8CC"/>
                 </a:solidFill>
@@ -13441,14 +14396,14 @@
       </p:sp>
       <p:sp>
         <p:nvSpPr>
-          <p:cNvPr id="36" name="Rounded Rectangle 35"/>
+          <p:cNvPr id="42" name="Rounded Rectangle 41"/>
           <p:cNvSpPr/>
           <p:nvPr/>
         </p:nvSpPr>
         <p:spPr>
           <a:xfrm>
-            <a:off x="6217920" y="4553712"/>
-            <a:ext cx="5303520" cy="749808"/>
+            <a:off x="6217920" y="4800600"/>
+            <a:ext cx="5303520" cy="658368"/>
           </a:xfrm>
           <a:prstGeom prst="roundRect">
             <a:avLst/>
@@ -13494,14 +14449,14 @@
       </p:sp>
       <p:sp>
         <p:nvSpPr>
-          <p:cNvPr id="37" name="TextBox 36"/>
+          <p:cNvPr id="43" name="TextBox 42"/>
           <p:cNvSpPr txBox="1"/>
           <p:nvPr/>
         </p:nvSpPr>
         <p:spPr>
           <a:xfrm>
-            <a:off x="6355080" y="4626864"/>
-            <a:ext cx="5029200" cy="320040"/>
+            <a:off x="6355080" y="4855464"/>
+            <a:ext cx="5029200" cy="292608"/>
           </a:xfrm>
           <a:prstGeom prst="rect">
             <a:avLst/>
@@ -13515,7 +14470,7 @@
           <a:lstStyle/>
           <a:p>
             <a:pPr algn="l">
-              <a:defRPr sz="1400" b="1">
+              <a:defRPr sz="1300" b="1">
                 <a:solidFill>
                   <a:srgbClr val="FFFFFF"/>
                 </a:solidFill>
@@ -13523,21 +14478,21 @@
               </a:defRPr>
             </a:pPr>
             <a:r>
-              <a:t>11  Roadmap</a:t>
-            </a:r>
-          </a:p>
-        </p:txBody>
-      </p:sp>
-      <p:sp>
-        <p:nvSpPr>
-          <p:cNvPr id="38" name="TextBox 37"/>
+              <a:t>13  Roadmap</a:t>
+            </a:r>
+          </a:p>
+        </p:txBody>
+      </p:sp>
+      <p:sp>
+        <p:nvSpPr>
+          <p:cNvPr id="44" name="TextBox 43"/>
           <p:cNvSpPr txBox="1"/>
           <p:nvPr/>
         </p:nvSpPr>
         <p:spPr>
           <a:xfrm>
-            <a:off x="6355080" y="4937760"/>
-            <a:ext cx="5029200" cy="320040"/>
+            <a:off x="6355080" y="5148072"/>
+            <a:ext cx="5029200" cy="274320"/>
           </a:xfrm>
           <a:prstGeom prst="rect">
             <a:avLst/>
@@ -13551,7 +14506,7 @@
           <a:lstStyle/>
           <a:p>
             <a:pPr algn="l">
-              <a:defRPr sz="1100" b="0">
+              <a:defRPr sz="1000" b="0">
                 <a:solidFill>
                   <a:srgbClr val="B0B8CC"/>
                 </a:solidFill>
@@ -13566,14 +14521,14 @@
       </p:sp>
       <p:sp>
         <p:nvSpPr>
-          <p:cNvPr id="39" name="Rounded Rectangle 38"/>
+          <p:cNvPr id="45" name="Rounded Rectangle 44"/>
           <p:cNvSpPr/>
           <p:nvPr/>
         </p:nvSpPr>
         <p:spPr>
           <a:xfrm>
-            <a:off x="6217920" y="5394960"/>
-            <a:ext cx="5303520" cy="749808"/>
+            <a:off x="6217920" y="5532120"/>
+            <a:ext cx="5303520" cy="658368"/>
           </a:xfrm>
           <a:prstGeom prst="roundRect">
             <a:avLst/>
@@ -13619,14 +14574,14 @@
       </p:sp>
       <p:sp>
         <p:nvSpPr>
-          <p:cNvPr id="40" name="TextBox 39"/>
+          <p:cNvPr id="46" name="TextBox 45"/>
           <p:cNvSpPr txBox="1"/>
           <p:nvPr/>
         </p:nvSpPr>
         <p:spPr>
           <a:xfrm>
-            <a:off x="6355080" y="5468112"/>
-            <a:ext cx="5029200" cy="320040"/>
+            <a:off x="6355080" y="5586984"/>
+            <a:ext cx="5029200" cy="292608"/>
           </a:xfrm>
           <a:prstGeom prst="rect">
             <a:avLst/>
@@ -13640,7 +14595,7 @@
           <a:lstStyle/>
           <a:p>
             <a:pPr algn="l">
-              <a:defRPr sz="1400" b="1">
+              <a:defRPr sz="1300" b="1">
                 <a:solidFill>
                   <a:srgbClr val="FFFFFF"/>
                 </a:solidFill>
@@ -13648,21 +14603,21 @@
               </a:defRPr>
             </a:pPr>
             <a:r>
-              <a:t>12  Q&amp;A</a:t>
-            </a:r>
-          </a:p>
-        </p:txBody>
-      </p:sp>
-      <p:sp>
-        <p:nvSpPr>
-          <p:cNvPr id="41" name="TextBox 40"/>
+              <a:t>14  Q&amp;A</a:t>
+            </a:r>
+          </a:p>
+        </p:txBody>
+      </p:sp>
+      <p:sp>
+        <p:nvSpPr>
+          <p:cNvPr id="47" name="TextBox 46"/>
           <p:cNvSpPr txBox="1"/>
           <p:nvPr/>
         </p:nvSpPr>
         <p:spPr>
           <a:xfrm>
-            <a:off x="6355080" y="5779008"/>
-            <a:ext cx="5029200" cy="320040"/>
+            <a:off x="6355080" y="5879592"/>
+            <a:ext cx="5029200" cy="274320"/>
           </a:xfrm>
           <a:prstGeom prst="rect">
             <a:avLst/>
@@ -13676,7 +14631,7 @@
           <a:lstStyle/>
           <a:p>
             <a:pPr algn="l">
-              <a:defRPr sz="1100" b="0">
+              <a:defRPr sz="1000" b="0">
                 <a:solidFill>
                   <a:srgbClr val="B0B8CC"/>
                 </a:solidFill>
@@ -13758,7 +14713,7 @@
             <p:par>
               <p:cTn id="3" fill="hold">
                 <p:stCondLst>
-                  <p:cond delay="100"/>
+                  <p:cond delay="80"/>
                 </p:stCondLst>
                 <p:childTnLst>
                   <p:par>
@@ -13770,7 +14725,7 @@
                         <p:par>
                           <p:cTn id="5" presetID="10" presetClass="entr" presetSubtype="0" fill="hold" nodeType="afterEffect">
                             <p:stCondLst>
-                              <p:cond delay="100"/>
+                              <p:cond delay="80"/>
                             </p:stCondLst>
                             <p:childTnLst>
                               <p:set>
@@ -13811,7 +14766,7 @@
             <p:par>
               <p:cTn id="4" fill="hold">
                 <p:stCondLst>
-                  <p:cond delay="200"/>
+                  <p:cond delay="160"/>
                 </p:stCondLst>
                 <p:childTnLst>
                   <p:par>
@@ -13823,7 +14778,7 @@
                         <p:par>
                           <p:cTn id="6" presetID="10" presetClass="entr" presetSubtype="0" fill="hold" nodeType="afterEffect">
                             <p:stCondLst>
-                              <p:cond delay="200"/>
+                              <p:cond delay="160"/>
                             </p:stCondLst>
                             <p:childTnLst>
                               <p:set>
@@ -13864,7 +14819,7 @@
             <p:par>
               <p:cTn id="5" fill="hold">
                 <p:stCondLst>
-                  <p:cond delay="300"/>
+                  <p:cond delay="240"/>
                 </p:stCondLst>
                 <p:childTnLst>
                   <p:par>
@@ -13876,7 +14831,7 @@
                         <p:par>
                           <p:cTn id="7" presetID="10" presetClass="entr" presetSubtype="0" fill="hold" nodeType="afterEffect">
                             <p:stCondLst>
-                              <p:cond delay="300"/>
+                              <p:cond delay="240"/>
                             </p:stCondLst>
                             <p:childTnLst>
                               <p:set>
@@ -13917,7 +14872,7 @@
             <p:par>
               <p:cTn id="6" fill="hold">
                 <p:stCondLst>
-                  <p:cond delay="400"/>
+                  <p:cond delay="320"/>
                 </p:stCondLst>
                 <p:childTnLst>
                   <p:par>
@@ -13929,7 +14884,7 @@
                         <p:par>
                           <p:cTn id="8" presetID="10" presetClass="entr" presetSubtype="0" fill="hold" nodeType="afterEffect">
                             <p:stCondLst>
-                              <p:cond delay="400"/>
+                              <p:cond delay="320"/>
                             </p:stCondLst>
                             <p:childTnLst>
                               <p:set>
@@ -13970,7 +14925,7 @@
             <p:par>
               <p:cTn id="7" fill="hold">
                 <p:stCondLst>
-                  <p:cond delay="500"/>
+                  <p:cond delay="400"/>
                 </p:stCondLst>
                 <p:childTnLst>
                   <p:par>
@@ -13982,7 +14937,7 @@
                         <p:par>
                           <p:cTn id="9" presetID="10" presetClass="entr" presetSubtype="0" fill="hold" nodeType="afterEffect">
                             <p:stCondLst>
-                              <p:cond delay="500"/>
+                              <p:cond delay="400"/>
                             </p:stCondLst>
                             <p:childTnLst>
                               <p:set>
@@ -14023,7 +14978,7 @@
             <p:par>
               <p:cTn id="8" fill="hold">
                 <p:stCondLst>
-                  <p:cond delay="600"/>
+                  <p:cond delay="480"/>
                 </p:stCondLst>
                 <p:childTnLst>
                   <p:par>
@@ -14035,7 +14990,7 @@
                         <p:par>
                           <p:cTn id="10" presetID="10" presetClass="entr" presetSubtype="0" fill="hold" nodeType="afterEffect">
                             <p:stCondLst>
-                              <p:cond delay="600"/>
+                              <p:cond delay="480"/>
                             </p:stCondLst>
                             <p:childTnLst>
                               <p:set>
@@ -14076,7 +15031,7 @@
             <p:par>
               <p:cTn id="9" fill="hold">
                 <p:stCondLst>
-                  <p:cond delay="700"/>
+                  <p:cond delay="560"/>
                 </p:stCondLst>
                 <p:childTnLst>
                   <p:par>
@@ -14088,7 +15043,7 @@
                         <p:par>
                           <p:cTn id="11" presetID="10" presetClass="entr" presetSubtype="0" fill="hold" nodeType="afterEffect">
                             <p:stCondLst>
-                              <p:cond delay="700"/>
+                              <p:cond delay="560"/>
                             </p:stCondLst>
                             <p:childTnLst>
                               <p:set>
@@ -14129,7 +15084,7 @@
             <p:par>
               <p:cTn id="10" fill="hold">
                 <p:stCondLst>
-                  <p:cond delay="800"/>
+                  <p:cond delay="640"/>
                 </p:stCondLst>
                 <p:childTnLst>
                   <p:par>
@@ -14141,7 +15096,7 @@
                         <p:par>
                           <p:cTn id="12" presetID="10" presetClass="entr" presetSubtype="0" fill="hold" nodeType="afterEffect">
                             <p:stCondLst>
-                              <p:cond delay="800"/>
+                              <p:cond delay="640"/>
                             </p:stCondLst>
                             <p:childTnLst>
                               <p:set>
@@ -14182,7 +15137,7 @@
             <p:par>
               <p:cTn id="11" fill="hold">
                 <p:stCondLst>
-                  <p:cond delay="900"/>
+                  <p:cond delay="720"/>
                 </p:stCondLst>
                 <p:childTnLst>
                   <p:par>
@@ -14194,7 +15149,7 @@
                         <p:par>
                           <p:cTn id="13" presetID="10" presetClass="entr" presetSubtype="0" fill="hold" nodeType="afterEffect">
                             <p:stCondLst>
-                              <p:cond delay="900"/>
+                              <p:cond delay="720"/>
                             </p:stCondLst>
                             <p:childTnLst>
                               <p:set>
@@ -14235,7 +15190,7 @@
             <p:par>
               <p:cTn id="12" fill="hold">
                 <p:stCondLst>
-                  <p:cond delay="1000"/>
+                  <p:cond delay="800"/>
                 </p:stCondLst>
                 <p:childTnLst>
                   <p:par>
@@ -14247,7 +15202,7 @@
                         <p:par>
                           <p:cTn id="14" presetID="10" presetClass="entr" presetSubtype="0" fill="hold" nodeType="afterEffect">
                             <p:stCondLst>
-                              <p:cond delay="1000"/>
+                              <p:cond delay="800"/>
                             </p:stCondLst>
                             <p:childTnLst>
                               <p:set>
@@ -14288,7 +15243,7 @@
             <p:par>
               <p:cTn id="13" fill="hold">
                 <p:stCondLst>
-                  <p:cond delay="1100"/>
+                  <p:cond delay="880"/>
                 </p:stCondLst>
                 <p:childTnLst>
                   <p:par>
@@ -14300,7 +15255,7 @@
                         <p:par>
                           <p:cTn id="15" presetID="10" presetClass="entr" presetSubtype="0" fill="hold" nodeType="afterEffect">
                             <p:stCondLst>
-                              <p:cond delay="1100"/>
+                              <p:cond delay="880"/>
                             </p:stCondLst>
                             <p:childTnLst>
                               <p:set>
@@ -14326,6 +15281,112 @@
                                   <p:cTn id="17" dur="500"/>
                                   <p:tgtEl>
                                     <p:spTgt spid="39"/>
+                                  </p:tgtEl>
+                                </p:cBhvr>
+                              </p:animEffect>
+                            </p:childTnLst>
+                          </p:cTn>
+                        </p:par>
+                      </p:childTnLst>
+                    </p:cTn>
+                  </p:par>
+                </p:childTnLst>
+              </p:cTn>
+            </p:par>
+            <p:par>
+              <p:cTn id="14" fill="hold">
+                <p:stCondLst>
+                  <p:cond delay="960"/>
+                </p:stCondLst>
+                <p:childTnLst>
+                  <p:par>
+                    <p:cTn id="15" fill="hold">
+                      <p:stCondLst>
+                        <p:cond delay="0"/>
+                      </p:stCondLst>
+                      <p:childTnLst>
+                        <p:par>
+                          <p:cTn id="16" presetID="10" presetClass="entr" presetSubtype="0" fill="hold" nodeType="afterEffect">
+                            <p:stCondLst>
+                              <p:cond delay="960"/>
+                            </p:stCondLst>
+                            <p:childTnLst>
+                              <p:set>
+                                <p:cBhvr>
+                                  <p:cTn id="17" dur="500" fill="hold">
+                                    <p:stCondLst>
+                                      <p:cond delay="0"/>
+                                    </p:stCondLst>
+                                  </p:cTn>
+                                  <p:tgtEl>
+                                    <p:spTgt spid="42"/>
+                                  </p:tgtEl>
+                                  <p:attrNameLst>
+                                    <p:attrName>style.visibility</p:attrName>
+                                  </p:attrNameLst>
+                                </p:cBhvr>
+                                <p:to>
+                                  <p:strVal val="visible"/>
+                                </p:to>
+                              </p:set>
+                              <p:animEffect transition="in" filter="fade">
+                                <p:cBhvr>
+                                  <p:cTn id="18" dur="500"/>
+                                  <p:tgtEl>
+                                    <p:spTgt spid="42"/>
+                                  </p:tgtEl>
+                                </p:cBhvr>
+                              </p:animEffect>
+                            </p:childTnLst>
+                          </p:cTn>
+                        </p:par>
+                      </p:childTnLst>
+                    </p:cTn>
+                  </p:par>
+                </p:childTnLst>
+              </p:cTn>
+            </p:par>
+            <p:par>
+              <p:cTn id="15" fill="hold">
+                <p:stCondLst>
+                  <p:cond delay="1040"/>
+                </p:stCondLst>
+                <p:childTnLst>
+                  <p:par>
+                    <p:cTn id="16" fill="hold">
+                      <p:stCondLst>
+                        <p:cond delay="0"/>
+                      </p:stCondLst>
+                      <p:childTnLst>
+                        <p:par>
+                          <p:cTn id="17" presetID="10" presetClass="entr" presetSubtype="0" fill="hold" nodeType="afterEffect">
+                            <p:stCondLst>
+                              <p:cond delay="1040"/>
+                            </p:stCondLst>
+                            <p:childTnLst>
+                              <p:set>
+                                <p:cBhvr>
+                                  <p:cTn id="18" dur="500" fill="hold">
+                                    <p:stCondLst>
+                                      <p:cond delay="0"/>
+                                    </p:stCondLst>
+                                  </p:cTn>
+                                  <p:tgtEl>
+                                    <p:spTgt spid="45"/>
+                                  </p:tgtEl>
+                                  <p:attrNameLst>
+                                    <p:attrName>style.visibility</p:attrName>
+                                  </p:attrNameLst>
+                                </p:cBhvr>
+                                <p:to>
+                                  <p:strVal val="visible"/>
+                                </p:to>
+                              </p:set>
+                              <p:animEffect transition="in" filter="fade">
+                                <p:cBhvr>
+                                  <p:cTn id="19" dur="500"/>
+                                  <p:tgtEl>
+                                    <p:spTgt spid="45"/>
                                   </p:tgtEl>
                                 </p:cBhvr>
                               </p:animEffect>
@@ -14394,6 +15455,1658 @@
               </a:defRPr>
             </a:pPr>
             <a:r>
+              <a:t>END-TO-END MISSION</a:t>
+            </a:r>
+          </a:p>
+        </p:txBody>
+      </p:sp>
+      <p:sp>
+        <p:nvSpPr>
+          <p:cNvPr id="3" name="TextBox 2"/>
+          <p:cNvSpPr txBox="1"/>
+          <p:nvPr/>
+        </p:nvSpPr>
+        <p:spPr>
+          <a:xfrm>
+            <a:off x="548640" y="868680"/>
+            <a:ext cx="8229600" cy="365760"/>
+          </a:xfrm>
+          <a:prstGeom prst="rect">
+            <a:avLst/>
+          </a:prstGeom>
+          <a:noFill/>
+        </p:spPr>
+        <p:txBody>
+          <a:bodyPr wrap="none">
+            <a:spAutoFit/>
+          </a:bodyPr>
+          <a:lstStyle/>
+          <a:p>
+            <a:pPr algn="l">
+              <a:defRPr sz="1400">
+                <a:solidFill>
+                  <a:srgbClr val="00D4AA"/>
+                </a:solidFill>
+              </a:defRPr>
+            </a:pPr>
+            <a:r>
+              <a:t>Mars Surface → Earth</a:t>
+            </a:r>
+          </a:p>
+        </p:txBody>
+      </p:sp>
+      <p:sp>
+        <p:nvSpPr>
+          <p:cNvPr id="4" name="Rounded Rectangle 3"/>
+          <p:cNvSpPr/>
+          <p:nvPr/>
+        </p:nvSpPr>
+        <p:spPr>
+          <a:xfrm>
+            <a:off x="365760" y="365760"/>
+            <a:ext cx="822960" cy="411480"/>
+          </a:xfrm>
+          <a:prstGeom prst="roundRect">
+            <a:avLst/>
+          </a:prstGeom>
+          <a:solidFill>
+            <a:srgbClr val="009EFF"/>
+          </a:solidFill>
+          <a:ln w="12700">
+            <a:solidFill>
+              <a:srgbClr val="1E2A42"/>
+            </a:solidFill>
+          </a:ln>
+          <a:effectLst/>
+        </p:spPr>
+        <p:style>
+          <a:lnRef idx="1">
+            <a:schemeClr val="accent1"/>
+          </a:lnRef>
+          <a:fillRef idx="3">
+            <a:schemeClr val="accent1"/>
+          </a:fillRef>
+          <a:effectRef idx="2">
+            <a:schemeClr val="accent1"/>
+          </a:effectRef>
+          <a:fontRef idx="minor">
+            <a:schemeClr val="lt1"/>
+          </a:fontRef>
+        </p:style>
+        <p:txBody>
+          <a:bodyPr rtlCol="0" anchor="ctr" wrap="square"/>
+          <a:lstStyle/>
+          <a:p>
+            <a:pPr algn="ctr">
+              <a:defRPr sz="900" b="1">
+                <a:solidFill>
+                  <a:srgbClr val="FFFFFF"/>
+                </a:solidFill>
+              </a:defRPr>
+            </a:pPr>
+            <a:r>
+              <a:t>Rover</a:t>
+            </a:r>
+          </a:p>
+        </p:txBody>
+      </p:sp>
+      <p:sp>
+        <p:nvSpPr>
+          <p:cNvPr id="5" name="Right Arrow 4"/>
+          <p:cNvSpPr/>
+          <p:nvPr/>
+        </p:nvSpPr>
+        <p:spPr>
+          <a:xfrm>
+            <a:off x="1595823" y="1691640"/>
+            <a:ext cx="182880" cy="137160"/>
+          </a:xfrm>
+          <a:prstGeom prst="rightArrow">
+            <a:avLst/>
+          </a:prstGeom>
+          <a:solidFill>
+            <a:srgbClr val="00D4AA"/>
+          </a:solidFill>
+          <a:ln>
+            <a:noFill/>
+          </a:ln>
+        </p:spPr>
+        <p:style>
+          <a:lnRef idx="1">
+            <a:schemeClr val="accent1"/>
+          </a:lnRef>
+          <a:fillRef idx="3">
+            <a:schemeClr val="accent1"/>
+          </a:fillRef>
+          <a:effectRef idx="2">
+            <a:schemeClr val="accent1"/>
+          </a:effectRef>
+          <a:fontRef idx="minor">
+            <a:schemeClr val="lt1"/>
+          </a:fontRef>
+        </p:style>
+        <p:txBody>
+          <a:bodyPr rtlCol="0" anchor="ctr"/>
+          <a:lstStyle/>
+          <a:p>
+            <a:pPr algn="ctr"/>
+          </a:p>
+        </p:txBody>
+      </p:sp>
+      <p:sp>
+        <p:nvSpPr>
+          <p:cNvPr id="6" name="Rounded Rectangle 5"/>
+          <p:cNvSpPr/>
+          <p:nvPr/>
+        </p:nvSpPr>
+        <p:spPr>
+          <a:xfrm>
+            <a:off x="365760" y="365760"/>
+            <a:ext cx="822960" cy="411480"/>
+          </a:xfrm>
+          <a:prstGeom prst="roundRect">
+            <a:avLst/>
+          </a:prstGeom>
+          <a:solidFill>
+            <a:srgbClr val="009EFF"/>
+          </a:solidFill>
+          <a:ln w="12700">
+            <a:solidFill>
+              <a:srgbClr val="1E2A42"/>
+            </a:solidFill>
+          </a:ln>
+          <a:effectLst/>
+        </p:spPr>
+        <p:style>
+          <a:lnRef idx="1">
+            <a:schemeClr val="accent1"/>
+          </a:lnRef>
+          <a:fillRef idx="3">
+            <a:schemeClr val="accent1"/>
+          </a:fillRef>
+          <a:effectRef idx="2">
+            <a:schemeClr val="accent1"/>
+          </a:effectRef>
+          <a:fontRef idx="minor">
+            <a:schemeClr val="lt1"/>
+          </a:fontRef>
+        </p:style>
+        <p:txBody>
+          <a:bodyPr rtlCol="0" anchor="ctr" wrap="square"/>
+          <a:lstStyle/>
+          <a:p>
+            <a:pPr algn="ctr">
+              <a:defRPr sz="900" b="1">
+                <a:solidFill>
+                  <a:srgbClr val="FFFFFF"/>
+                </a:solidFill>
+              </a:defRPr>
+            </a:pPr>
+            <a:r>
+              <a:t>UHF</a:t>
+            </a:r>
+          </a:p>
+        </p:txBody>
+      </p:sp>
+      <p:sp>
+        <p:nvSpPr>
+          <p:cNvPr id="7" name="Right Arrow 6"/>
+          <p:cNvSpPr/>
+          <p:nvPr/>
+        </p:nvSpPr>
+        <p:spPr>
+          <a:xfrm>
+            <a:off x="3232990" y="1691640"/>
+            <a:ext cx="182880" cy="137160"/>
+          </a:xfrm>
+          <a:prstGeom prst="rightArrow">
+            <a:avLst/>
+          </a:prstGeom>
+          <a:solidFill>
+            <a:srgbClr val="00D4AA"/>
+          </a:solidFill>
+          <a:ln>
+            <a:noFill/>
+          </a:ln>
+        </p:spPr>
+        <p:style>
+          <a:lnRef idx="1">
+            <a:schemeClr val="accent1"/>
+          </a:lnRef>
+          <a:fillRef idx="3">
+            <a:schemeClr val="accent1"/>
+          </a:fillRef>
+          <a:effectRef idx="2">
+            <a:schemeClr val="accent1"/>
+          </a:effectRef>
+          <a:fontRef idx="minor">
+            <a:schemeClr val="lt1"/>
+          </a:fontRef>
+        </p:style>
+        <p:txBody>
+          <a:bodyPr rtlCol="0" anchor="ctr"/>
+          <a:lstStyle/>
+          <a:p>
+            <a:pPr algn="ctr"/>
+          </a:p>
+        </p:txBody>
+      </p:sp>
+      <p:sp>
+        <p:nvSpPr>
+          <p:cNvPr id="8" name="Rounded Rectangle 7"/>
+          <p:cNvSpPr/>
+          <p:nvPr/>
+        </p:nvSpPr>
+        <p:spPr>
+          <a:xfrm>
+            <a:off x="365760" y="365760"/>
+            <a:ext cx="822960" cy="411480"/>
+          </a:xfrm>
+          <a:prstGeom prst="roundRect">
+            <a:avLst/>
+          </a:prstGeom>
+          <a:solidFill>
+            <a:srgbClr val="009EFF"/>
+          </a:solidFill>
+          <a:ln w="12700">
+            <a:solidFill>
+              <a:srgbClr val="1E2A42"/>
+            </a:solidFill>
+          </a:ln>
+          <a:effectLst/>
+        </p:spPr>
+        <p:style>
+          <a:lnRef idx="1">
+            <a:schemeClr val="accent1"/>
+          </a:lnRef>
+          <a:fillRef idx="3">
+            <a:schemeClr val="accent1"/>
+          </a:fillRef>
+          <a:effectRef idx="2">
+            <a:schemeClr val="accent1"/>
+          </a:effectRef>
+          <a:fontRef idx="minor">
+            <a:schemeClr val="lt1"/>
+          </a:fontRef>
+        </p:style>
+        <p:txBody>
+          <a:bodyPr rtlCol="0" anchor="ctr" wrap="square"/>
+          <a:lstStyle/>
+          <a:p>
+            <a:pPr algn="ctr">
+              <a:defRPr sz="900" b="1">
+                <a:solidFill>
+                  <a:srgbClr val="FFFFFF"/>
+                </a:solidFill>
+              </a:defRPr>
+            </a:pPr>
+            <a:r>
+              <a:t>Areostationary</a:t>
+            </a:r>
+          </a:p>
+        </p:txBody>
+      </p:sp>
+      <p:sp>
+        <p:nvSpPr>
+          <p:cNvPr id="9" name="Right Arrow 8"/>
+          <p:cNvSpPr/>
+          <p:nvPr/>
+        </p:nvSpPr>
+        <p:spPr>
+          <a:xfrm>
+            <a:off x="4870158" y="1691640"/>
+            <a:ext cx="182880" cy="137160"/>
+          </a:xfrm>
+          <a:prstGeom prst="rightArrow">
+            <a:avLst/>
+          </a:prstGeom>
+          <a:solidFill>
+            <a:srgbClr val="00D4AA"/>
+          </a:solidFill>
+          <a:ln>
+            <a:noFill/>
+          </a:ln>
+        </p:spPr>
+        <p:style>
+          <a:lnRef idx="1">
+            <a:schemeClr val="accent1"/>
+          </a:lnRef>
+          <a:fillRef idx="3">
+            <a:schemeClr val="accent1"/>
+          </a:fillRef>
+          <a:effectRef idx="2">
+            <a:schemeClr val="accent1"/>
+          </a:effectRef>
+          <a:fontRef idx="minor">
+            <a:schemeClr val="lt1"/>
+          </a:fontRef>
+        </p:style>
+        <p:txBody>
+          <a:bodyPr rtlCol="0" anchor="ctr"/>
+          <a:lstStyle/>
+          <a:p>
+            <a:pPr algn="ctr"/>
+          </a:p>
+        </p:txBody>
+      </p:sp>
+      <p:sp>
+        <p:nvSpPr>
+          <p:cNvPr id="10" name="Rounded Rectangle 9"/>
+          <p:cNvSpPr/>
+          <p:nvPr/>
+        </p:nvSpPr>
+        <p:spPr>
+          <a:xfrm>
+            <a:off x="365760" y="365760"/>
+            <a:ext cx="822960" cy="411480"/>
+          </a:xfrm>
+          <a:prstGeom prst="roundRect">
+            <a:avLst/>
+          </a:prstGeom>
+          <a:solidFill>
+            <a:srgbClr val="009EFF"/>
+          </a:solidFill>
+          <a:ln w="12700">
+            <a:solidFill>
+              <a:srgbClr val="1E2A42"/>
+            </a:solidFill>
+          </a:ln>
+          <a:effectLst/>
+        </p:spPr>
+        <p:style>
+          <a:lnRef idx="1">
+            <a:schemeClr val="accent1"/>
+          </a:lnRef>
+          <a:fillRef idx="3">
+            <a:schemeClr val="accent1"/>
+          </a:fillRef>
+          <a:effectRef idx="2">
+            <a:schemeClr val="accent1"/>
+          </a:effectRef>
+          <a:fontRef idx="minor">
+            <a:schemeClr val="lt1"/>
+          </a:fontRef>
+        </p:style>
+        <p:txBody>
+          <a:bodyPr rtlCol="0" anchor="ctr" wrap="square"/>
+          <a:lstStyle/>
+          <a:p>
+            <a:pPr algn="ctr">
+              <a:defRPr sz="900" b="1">
+                <a:solidFill>
+                  <a:srgbClr val="FFFFFF"/>
+                </a:solidFill>
+              </a:defRPr>
+            </a:pPr>
+            <a:r>
+              <a:t>Polar</a:t>
+            </a:r>
+          </a:p>
+        </p:txBody>
+      </p:sp>
+      <p:sp>
+        <p:nvSpPr>
+          <p:cNvPr id="11" name="Right Arrow 10"/>
+          <p:cNvSpPr/>
+          <p:nvPr/>
+        </p:nvSpPr>
+        <p:spPr>
+          <a:xfrm>
+            <a:off x="6507326" y="1691640"/>
+            <a:ext cx="182880" cy="137160"/>
+          </a:xfrm>
+          <a:prstGeom prst="rightArrow">
+            <a:avLst/>
+          </a:prstGeom>
+          <a:solidFill>
+            <a:srgbClr val="00D4AA"/>
+          </a:solidFill>
+          <a:ln>
+            <a:noFill/>
+          </a:ln>
+        </p:spPr>
+        <p:style>
+          <a:lnRef idx="1">
+            <a:schemeClr val="accent1"/>
+          </a:lnRef>
+          <a:fillRef idx="3">
+            <a:schemeClr val="accent1"/>
+          </a:fillRef>
+          <a:effectRef idx="2">
+            <a:schemeClr val="accent1"/>
+          </a:effectRef>
+          <a:fontRef idx="minor">
+            <a:schemeClr val="lt1"/>
+          </a:fontRef>
+        </p:style>
+        <p:txBody>
+          <a:bodyPr rtlCol="0" anchor="ctr"/>
+          <a:lstStyle/>
+          <a:p>
+            <a:pPr algn="ctr"/>
+          </a:p>
+        </p:txBody>
+      </p:sp>
+      <p:sp>
+        <p:nvSpPr>
+          <p:cNvPr id="12" name="Rounded Rectangle 11"/>
+          <p:cNvSpPr/>
+          <p:nvPr/>
+        </p:nvSpPr>
+        <p:spPr>
+          <a:xfrm>
+            <a:off x="365760" y="365760"/>
+            <a:ext cx="822960" cy="411480"/>
+          </a:xfrm>
+          <a:prstGeom prst="roundRect">
+            <a:avLst/>
+          </a:prstGeom>
+          <a:solidFill>
+            <a:srgbClr val="009EFF"/>
+          </a:solidFill>
+          <a:ln w="12700">
+            <a:solidFill>
+              <a:srgbClr val="1E2A42"/>
+            </a:solidFill>
+          </a:ln>
+          <a:effectLst/>
+        </p:spPr>
+        <p:style>
+          <a:lnRef idx="1">
+            <a:schemeClr val="accent1"/>
+          </a:lnRef>
+          <a:fillRef idx="3">
+            <a:schemeClr val="accent1"/>
+          </a:fillRef>
+          <a:effectRef idx="2">
+            <a:schemeClr val="accent1"/>
+          </a:effectRef>
+          <a:fontRef idx="minor">
+            <a:schemeClr val="lt1"/>
+          </a:fontRef>
+        </p:style>
+        <p:txBody>
+          <a:bodyPr rtlCol="0" anchor="ctr" wrap="square"/>
+          <a:lstStyle/>
+          <a:p>
+            <a:pPr algn="ctr">
+              <a:defRPr sz="900" b="1">
+                <a:solidFill>
+                  <a:srgbClr val="FFFFFF"/>
+                </a:solidFill>
+              </a:defRPr>
+            </a:pPr>
+            <a:r>
+              <a:t>Deep Space 1550 nm</a:t>
+            </a:r>
+          </a:p>
+        </p:txBody>
+      </p:sp>
+      <p:sp>
+        <p:nvSpPr>
+          <p:cNvPr id="13" name="Right Arrow 12"/>
+          <p:cNvSpPr/>
+          <p:nvPr/>
+        </p:nvSpPr>
+        <p:spPr>
+          <a:xfrm>
+            <a:off x="8144494" y="1691640"/>
+            <a:ext cx="182880" cy="137160"/>
+          </a:xfrm>
+          <a:prstGeom prst="rightArrow">
+            <a:avLst/>
+          </a:prstGeom>
+          <a:solidFill>
+            <a:srgbClr val="00D4AA"/>
+          </a:solidFill>
+          <a:ln>
+            <a:noFill/>
+          </a:ln>
+        </p:spPr>
+        <p:style>
+          <a:lnRef idx="1">
+            <a:schemeClr val="accent1"/>
+          </a:lnRef>
+          <a:fillRef idx="3">
+            <a:schemeClr val="accent1"/>
+          </a:fillRef>
+          <a:effectRef idx="2">
+            <a:schemeClr val="accent1"/>
+          </a:effectRef>
+          <a:fontRef idx="minor">
+            <a:schemeClr val="lt1"/>
+          </a:fontRef>
+        </p:style>
+        <p:txBody>
+          <a:bodyPr rtlCol="0" anchor="ctr"/>
+          <a:lstStyle/>
+          <a:p>
+            <a:pPr algn="ctr"/>
+          </a:p>
+        </p:txBody>
+      </p:sp>
+      <p:sp>
+        <p:nvSpPr>
+          <p:cNvPr id="14" name="Rounded Rectangle 13"/>
+          <p:cNvSpPr/>
+          <p:nvPr/>
+        </p:nvSpPr>
+        <p:spPr>
+          <a:xfrm>
+            <a:off x="365760" y="365760"/>
+            <a:ext cx="822960" cy="411480"/>
+          </a:xfrm>
+          <a:prstGeom prst="roundRect">
+            <a:avLst/>
+          </a:prstGeom>
+          <a:solidFill>
+            <a:srgbClr val="009EFF"/>
+          </a:solidFill>
+          <a:ln w="12700">
+            <a:solidFill>
+              <a:srgbClr val="1E2A42"/>
+            </a:solidFill>
+          </a:ln>
+          <a:effectLst/>
+        </p:spPr>
+        <p:style>
+          <a:lnRef idx="1">
+            <a:schemeClr val="accent1"/>
+          </a:lnRef>
+          <a:fillRef idx="3">
+            <a:schemeClr val="accent1"/>
+          </a:fillRef>
+          <a:effectRef idx="2">
+            <a:schemeClr val="accent1"/>
+          </a:effectRef>
+          <a:fontRef idx="minor">
+            <a:schemeClr val="lt1"/>
+          </a:fontRef>
+        </p:style>
+        <p:txBody>
+          <a:bodyPr rtlCol="0" anchor="ctr" wrap="square"/>
+          <a:lstStyle/>
+          <a:p>
+            <a:pPr algn="ctr">
+              <a:defRPr sz="900" b="1">
+                <a:solidFill>
+                  <a:srgbClr val="FFFFFF"/>
+                </a:solidFill>
+              </a:defRPr>
+            </a:pPr>
+            <a:r>
+              <a:t>LEO</a:t>
+            </a:r>
+          </a:p>
+        </p:txBody>
+      </p:sp>
+      <p:sp>
+        <p:nvSpPr>
+          <p:cNvPr id="15" name="Right Arrow 14"/>
+          <p:cNvSpPr/>
+          <p:nvPr/>
+        </p:nvSpPr>
+        <p:spPr>
+          <a:xfrm>
+            <a:off x="9781662" y="1691640"/>
+            <a:ext cx="182880" cy="137160"/>
+          </a:xfrm>
+          <a:prstGeom prst="rightArrow">
+            <a:avLst/>
+          </a:prstGeom>
+          <a:solidFill>
+            <a:srgbClr val="00D4AA"/>
+          </a:solidFill>
+          <a:ln>
+            <a:noFill/>
+          </a:ln>
+        </p:spPr>
+        <p:style>
+          <a:lnRef idx="1">
+            <a:schemeClr val="accent1"/>
+          </a:lnRef>
+          <a:fillRef idx="3">
+            <a:schemeClr val="accent1"/>
+          </a:fillRef>
+          <a:effectRef idx="2">
+            <a:schemeClr val="accent1"/>
+          </a:effectRef>
+          <a:fontRef idx="minor">
+            <a:schemeClr val="lt1"/>
+          </a:fontRef>
+        </p:style>
+        <p:txBody>
+          <a:bodyPr rtlCol="0" anchor="ctr"/>
+          <a:lstStyle/>
+          <a:p>
+            <a:pPr algn="ctr"/>
+          </a:p>
+        </p:txBody>
+      </p:sp>
+      <p:sp>
+        <p:nvSpPr>
+          <p:cNvPr id="16" name="Rounded Rectangle 15"/>
+          <p:cNvSpPr/>
+          <p:nvPr/>
+        </p:nvSpPr>
+        <p:spPr>
+          <a:xfrm>
+            <a:off x="365760" y="365760"/>
+            <a:ext cx="822960" cy="411480"/>
+          </a:xfrm>
+          <a:prstGeom prst="roundRect">
+            <a:avLst/>
+          </a:prstGeom>
+          <a:solidFill>
+            <a:srgbClr val="009EFF"/>
+          </a:solidFill>
+          <a:ln w="12700">
+            <a:solidFill>
+              <a:srgbClr val="1E2A42"/>
+            </a:solidFill>
+          </a:ln>
+          <a:effectLst/>
+        </p:spPr>
+        <p:style>
+          <a:lnRef idx="1">
+            <a:schemeClr val="accent1"/>
+          </a:lnRef>
+          <a:fillRef idx="3">
+            <a:schemeClr val="accent1"/>
+          </a:fillRef>
+          <a:effectRef idx="2">
+            <a:schemeClr val="accent1"/>
+          </a:effectRef>
+          <a:fontRef idx="minor">
+            <a:schemeClr val="lt1"/>
+          </a:fontRef>
+        </p:style>
+        <p:txBody>
+          <a:bodyPr rtlCol="0" anchor="ctr" wrap="square"/>
+          <a:lstStyle/>
+          <a:p>
+            <a:pPr algn="ctr">
+              <a:defRPr sz="900" b="1">
+                <a:solidFill>
+                  <a:srgbClr val="FFFFFF"/>
+                </a:solidFill>
+              </a:defRPr>
+            </a:pPr>
+            <a:r>
+              <a:t>DSN / MOC</a:t>
+            </a:r>
+          </a:p>
+        </p:txBody>
+      </p:sp>
+      <p:sp>
+        <p:nvSpPr>
+          <p:cNvPr id="17" name="Rounded Rectangle 16"/>
+          <p:cNvSpPr/>
+          <p:nvPr/>
+        </p:nvSpPr>
+        <p:spPr>
+          <a:xfrm>
+            <a:off x="1912467" y="2331720"/>
+            <a:ext cx="1920240" cy="1005840"/>
+          </a:xfrm>
+          <a:prstGeom prst="roundRect">
+            <a:avLst/>
+          </a:prstGeom>
+          <a:solidFill>
+            <a:srgbClr val="141B2D"/>
+          </a:solidFill>
+          <a:ln w="12700">
+            <a:solidFill>
+              <a:srgbClr val="009EFF"/>
+            </a:solidFill>
+          </a:ln>
+          <a:effectLst/>
+        </p:spPr>
+        <p:style>
+          <a:lnRef idx="1">
+            <a:schemeClr val="accent1"/>
+          </a:lnRef>
+          <a:fillRef idx="3">
+            <a:schemeClr val="accent1"/>
+          </a:fillRef>
+          <a:effectRef idx="2">
+            <a:schemeClr val="accent1"/>
+          </a:effectRef>
+          <a:fontRef idx="minor">
+            <a:schemeClr val="lt1"/>
+          </a:fontRef>
+        </p:style>
+        <p:txBody>
+          <a:bodyPr rtlCol="0" anchor="ctr" wrap="square"/>
+          <a:lstStyle/>
+          <a:p>
+            <a:pPr algn="ctr">
+              <a:defRPr sz="2400" b="1">
+                <a:solidFill>
+                  <a:srgbClr val="009EFF"/>
+                </a:solidFill>
+                <a:latin typeface="Calibri"/>
+              </a:defRPr>
+            </a:pPr>
+            <a:r>
+              <a:t>~13 min</a:t>
+            </a:r>
+          </a:p>
+          <a:p>
+            <a:pPr algn="ctr">
+              <a:spcBef>
+                <a:spcPts val="200"/>
+              </a:spcBef>
+              <a:spcAft>
+                <a:spcPts val="400"/>
+              </a:spcAft>
+              <a:defRPr sz="1000" b="0">
+                <a:solidFill>
+                  <a:srgbClr val="B0B8CC"/>
+                </a:solidFill>
+                <a:latin typeface="Calibri"/>
+              </a:defRPr>
+            </a:pPr>
+            <a:r>
+              <a:t>End-to-End Latency</a:t>
+            </a:r>
+          </a:p>
+        </p:txBody>
+      </p:sp>
+      <p:sp>
+        <p:nvSpPr>
+          <p:cNvPr id="18" name="Rounded Rectangle 17"/>
+          <p:cNvSpPr/>
+          <p:nvPr/>
+        </p:nvSpPr>
+        <p:spPr>
+          <a:xfrm>
+            <a:off x="4061307" y="2331720"/>
+            <a:ext cx="1920240" cy="1005840"/>
+          </a:xfrm>
+          <a:prstGeom prst="roundRect">
+            <a:avLst/>
+          </a:prstGeom>
+          <a:solidFill>
+            <a:srgbClr val="141B2D"/>
+          </a:solidFill>
+          <a:ln w="12700">
+            <a:solidFill>
+              <a:srgbClr val="2ECC71"/>
+            </a:solidFill>
+          </a:ln>
+          <a:effectLst/>
+        </p:spPr>
+        <p:style>
+          <a:lnRef idx="1">
+            <a:schemeClr val="accent1"/>
+          </a:lnRef>
+          <a:fillRef idx="3">
+            <a:schemeClr val="accent1"/>
+          </a:fillRef>
+          <a:effectRef idx="2">
+            <a:schemeClr val="accent1"/>
+          </a:effectRef>
+          <a:fontRef idx="minor">
+            <a:schemeClr val="lt1"/>
+          </a:fontRef>
+        </p:style>
+        <p:txBody>
+          <a:bodyPr rtlCol="0" anchor="ctr" wrap="square"/>
+          <a:lstStyle/>
+          <a:p>
+            <a:pPr algn="ctr">
+              <a:defRPr sz="2400" b="1">
+                <a:solidFill>
+                  <a:srgbClr val="2ECC71"/>
+                </a:solidFill>
+                <a:latin typeface="Calibri"/>
+              </a:defRPr>
+            </a:pPr>
+            <a:r>
+              <a:t>&lt;5%</a:t>
+            </a:r>
+          </a:p>
+          <a:p>
+            <a:pPr algn="ctr">
+              <a:spcBef>
+                <a:spcPts val="200"/>
+              </a:spcBef>
+              <a:spcAft>
+                <a:spcPts val="400"/>
+              </a:spcAft>
+              <a:defRPr sz="1000" b="0">
+                <a:solidFill>
+                  <a:srgbClr val="B0B8CC"/>
+                </a:solidFill>
+                <a:latin typeface="Calibri"/>
+              </a:defRPr>
+            </a:pPr>
+            <a:r>
+              <a:t>Packet Loss</a:t>
+            </a:r>
+          </a:p>
+        </p:txBody>
+      </p:sp>
+      <p:sp>
+        <p:nvSpPr>
+          <p:cNvPr id="19" name="Rounded Rectangle 18"/>
+          <p:cNvSpPr/>
+          <p:nvPr/>
+        </p:nvSpPr>
+        <p:spPr>
+          <a:xfrm>
+            <a:off x="6210147" y="2331720"/>
+            <a:ext cx="1920240" cy="1005840"/>
+          </a:xfrm>
+          <a:prstGeom prst="roundRect">
+            <a:avLst/>
+          </a:prstGeom>
+          <a:solidFill>
+            <a:srgbClr val="141B2D"/>
+          </a:solidFill>
+          <a:ln w="12700">
+            <a:solidFill>
+              <a:srgbClr val="8B5CF6"/>
+            </a:solidFill>
+          </a:ln>
+          <a:effectLst/>
+        </p:spPr>
+        <p:style>
+          <a:lnRef idx="1">
+            <a:schemeClr val="accent1"/>
+          </a:lnRef>
+          <a:fillRef idx="3">
+            <a:schemeClr val="accent1"/>
+          </a:fillRef>
+          <a:effectRef idx="2">
+            <a:schemeClr val="accent1"/>
+          </a:effectRef>
+          <a:fontRef idx="minor">
+            <a:schemeClr val="lt1"/>
+          </a:fontRef>
+        </p:style>
+        <p:txBody>
+          <a:bodyPr rtlCol="0" anchor="ctr" wrap="square"/>
+          <a:lstStyle/>
+          <a:p>
+            <a:pPr algn="ctr">
+              <a:defRPr sz="2400" b="1">
+                <a:solidFill>
+                  <a:srgbClr val="8B5CF6"/>
+                </a:solidFill>
+                <a:latin typeface="Calibri"/>
+              </a:defRPr>
+            </a:pPr>
+            <a:r>
+              <a:t>98.7%</a:t>
+            </a:r>
+          </a:p>
+          <a:p>
+            <a:pPr algn="ctr">
+              <a:spcBef>
+                <a:spcPts val="200"/>
+              </a:spcBef>
+              <a:spcAft>
+                <a:spcPts val="400"/>
+              </a:spcAft>
+              <a:defRPr sz="1000" b="0">
+                <a:solidFill>
+                  <a:srgbClr val="B0B8CC"/>
+                </a:solidFill>
+                <a:latin typeface="Calibri"/>
+              </a:defRPr>
+            </a:pPr>
+            <a:r>
+              <a:t>Delivery Rate</a:t>
+            </a:r>
+          </a:p>
+        </p:txBody>
+      </p:sp>
+      <p:sp>
+        <p:nvSpPr>
+          <p:cNvPr id="20" name="Rounded Rectangle 19"/>
+          <p:cNvSpPr/>
+          <p:nvPr/>
+        </p:nvSpPr>
+        <p:spPr>
+          <a:xfrm>
+            <a:off x="8358987" y="2331720"/>
+            <a:ext cx="1920240" cy="1005840"/>
+          </a:xfrm>
+          <a:prstGeom prst="roundRect">
+            <a:avLst/>
+          </a:prstGeom>
+          <a:solidFill>
+            <a:srgbClr val="141B2D"/>
+          </a:solidFill>
+          <a:ln w="12700">
+            <a:solidFill>
+              <a:srgbClr val="FF8C00"/>
+            </a:solidFill>
+          </a:ln>
+          <a:effectLst/>
+        </p:spPr>
+        <p:style>
+          <a:lnRef idx="1">
+            <a:schemeClr val="accent1"/>
+          </a:lnRef>
+          <a:fillRef idx="3">
+            <a:schemeClr val="accent1"/>
+          </a:fillRef>
+          <a:effectRef idx="2">
+            <a:schemeClr val="accent1"/>
+          </a:effectRef>
+          <a:fontRef idx="minor">
+            <a:schemeClr val="lt1"/>
+          </a:fontRef>
+        </p:style>
+        <p:txBody>
+          <a:bodyPr rtlCol="0" anchor="ctr" wrap="square"/>
+          <a:lstStyle/>
+          <a:p>
+            <a:pPr algn="ctr">
+              <a:defRPr sz="2400" b="1">
+                <a:solidFill>
+                  <a:srgbClr val="FF8C00"/>
+                </a:solidFill>
+                <a:latin typeface="Calibri"/>
+              </a:defRPr>
+            </a:pPr>
+            <a:r>
+              <a:t>7 hops</a:t>
+            </a:r>
+          </a:p>
+          <a:p>
+            <a:pPr algn="ctr">
+              <a:spcBef>
+                <a:spcPts val="200"/>
+              </a:spcBef>
+              <a:spcAft>
+                <a:spcPts val="400"/>
+              </a:spcAft>
+              <a:defRPr sz="1000" b="0">
+                <a:solidFill>
+                  <a:srgbClr val="B0B8CC"/>
+                </a:solidFill>
+                <a:latin typeface="Calibri"/>
+              </a:defRPr>
+            </a:pPr>
+            <a:r>
+              <a:t>Network Path</a:t>
+            </a:r>
+          </a:p>
+        </p:txBody>
+      </p:sp>
+      <p:sp>
+        <p:nvSpPr>
+          <p:cNvPr id="21" name="Rounded Rectangle 20"/>
+          <p:cNvSpPr/>
+          <p:nvPr/>
+        </p:nvSpPr>
+        <p:spPr>
+          <a:xfrm>
+            <a:off x="548640" y="3657600"/>
+            <a:ext cx="11094415" cy="1097280"/>
+          </a:xfrm>
+          <a:prstGeom prst="roundRect">
+            <a:avLst/>
+          </a:prstGeom>
+          <a:solidFill>
+            <a:srgbClr val="141B2D"/>
+          </a:solidFill>
+          <a:ln w="31750">
+            <a:solidFill>
+              <a:srgbClr val="FF4D4D"/>
+            </a:solidFill>
+          </a:ln>
+          <a:effectLst/>
+        </p:spPr>
+        <p:style>
+          <a:lnRef idx="1">
+            <a:schemeClr val="accent1"/>
+          </a:lnRef>
+          <a:fillRef idx="3">
+            <a:schemeClr val="accent1"/>
+          </a:fillRef>
+          <a:effectRef idx="2">
+            <a:schemeClr val="accent1"/>
+          </a:effectRef>
+          <a:fontRef idx="minor">
+            <a:schemeClr val="lt1"/>
+          </a:fontRef>
+        </p:style>
+        <p:txBody>
+          <a:bodyPr rtlCol="0" anchor="ctr" wrap="square" lIns="137160" rIns="137160" tIns="91440" bIns="91440"/>
+          <a:lstStyle/>
+          <a:p>
+            <a:pPr algn="ctr">
+              <a:defRPr sz="1200" b="1">
+                <a:solidFill>
+                  <a:srgbClr val="FF4D4D"/>
+                </a:solidFill>
+                <a:latin typeface="Calibri"/>
+              </a:defRPr>
+            </a:pPr>
+            <a:r>
+              <a:t>⚠ FAILURE SCENARIO</a:t>
+            </a:r>
+          </a:p>
+          <a:p>
+            <a:pPr>
+              <a:defRPr sz="1100">
+                <a:solidFill>
+                  <a:srgbClr val="FFFFFF"/>
+                </a:solidFill>
+              </a:defRPr>
+            </a:pPr>
+            <a:r>
+              <a:t>Solar flare at T+400s → stored at MRS-Polar → rerouted via ES-L4 → delayed ~30 min NOT LOST</a:t>
+            </a:r>
+          </a:p>
+        </p:txBody>
+      </p:sp>
+      <p:sp>
+        <p:nvSpPr>
+          <p:cNvPr id="22" name="TextBox 21"/>
+          <p:cNvSpPr txBox="1"/>
+          <p:nvPr/>
+        </p:nvSpPr>
+        <p:spPr>
+          <a:xfrm>
+            <a:off x="457200" y="6400800"/>
+            <a:ext cx="4572000" cy="365760"/>
+          </a:xfrm>
+          <a:prstGeom prst="rect">
+            <a:avLst/>
+          </a:prstGeom>
+          <a:noFill/>
+        </p:spPr>
+        <p:txBody>
+          <a:bodyPr wrap="square">
+            <a:spAutoFit/>
+          </a:bodyPr>
+          <a:lstStyle/>
+          <a:p>
+            <a:pPr algn="l">
+              <a:defRPr sz="1000" b="0">
+                <a:solidFill>
+                  <a:srgbClr val="6B7B96"/>
+                </a:solidFill>
+                <a:latin typeface="Calibri"/>
+              </a:defRPr>
+            </a:pPr>
+            <a:r>
+              <a:t>AETHERIX — Interplanetary Communication Network</a:t>
+            </a:r>
+          </a:p>
+        </p:txBody>
+      </p:sp>
+      <p:sp>
+        <p:nvSpPr>
+          <p:cNvPr id="23" name="TextBox 22"/>
+          <p:cNvSpPr txBox="1"/>
+          <p:nvPr/>
+        </p:nvSpPr>
+        <p:spPr>
+          <a:xfrm>
+            <a:off x="10058400" y="6400800"/>
+            <a:ext cx="1828800" cy="365760"/>
+          </a:xfrm>
+          <a:prstGeom prst="rect">
+            <a:avLst/>
+          </a:prstGeom>
+          <a:noFill/>
+        </p:spPr>
+        <p:txBody>
+          <a:bodyPr wrap="square">
+            <a:spAutoFit/>
+          </a:bodyPr>
+          <a:lstStyle/>
+          <a:p>
+            <a:pPr algn="r">
+              <a:defRPr sz="1000" b="0">
+                <a:solidFill>
+                  <a:srgbClr val="6B7B96"/>
+                </a:solidFill>
+                <a:latin typeface="Calibri"/>
+              </a:defRPr>
+            </a:pPr>
+            <a:r>
+              <a:t>20 / 27</a:t>
+            </a:r>
+          </a:p>
+        </p:txBody>
+      </p:sp>
+    </p:spTree>
+  </p:cSld>
+  <p:transition spd="med" advClick="1">
+    <p:push dir="l"/>
+  </p:transition>
+  <p:clrMapOvr>
+    <a:masterClrMapping/>
+  </p:clrMapOvr>
+</p:sld>
+</file>
+
+<file path=ppt/slides/slide21.xml><?xml version="1.0" encoding="utf-8"?>
+<p:sld xmlns:a="http://schemas.openxmlformats.org/drawingml/2006/main" xmlns:p="http://schemas.openxmlformats.org/presentationml/2006/main" xmlns:r="http://schemas.openxmlformats.org/officeDocument/2006/relationships">
+  <p:cSld>
+    <p:bg>
+      <p:bgPr>
+        <a:solidFill>
+          <a:srgbClr val="0B0E1A"/>
+        </a:solidFill>
+        <a:effectLst/>
+      </p:bgPr>
+    </p:bg>
+    <p:spTree>
+      <p:nvGrpSpPr>
+        <p:cNvPr id="1" name=""/>
+        <p:cNvGrpSpPr/>
+        <p:nvPr/>
+      </p:nvGrpSpPr>
+      <p:grpSpPr/>
+      <p:sp>
+        <p:nvSpPr>
+          <p:cNvPr id="2" name="TextBox 1"/>
+          <p:cNvSpPr txBox="1"/>
+          <p:nvPr/>
+        </p:nvSpPr>
+        <p:spPr>
+          <a:xfrm>
+            <a:off x="548640" y="365760"/>
+            <a:ext cx="8229600" cy="548640"/>
+          </a:xfrm>
+          <a:prstGeom prst="rect">
+            <a:avLst/>
+          </a:prstGeom>
+          <a:noFill/>
+        </p:spPr>
+        <p:txBody>
+          <a:bodyPr wrap="none">
+            <a:spAutoFit/>
+          </a:bodyPr>
+          <a:lstStyle/>
+          <a:p>
+            <a:pPr algn="l">
+              <a:defRPr sz="2800" b="1">
+                <a:solidFill>
+                  <a:srgbClr val="FFFFFF"/>
+                </a:solidFill>
+              </a:defRPr>
+            </a:pPr>
+            <a:r>
+              <a:t>DATA FLOW DIAGRAM</a:t>
+            </a:r>
+          </a:p>
+        </p:txBody>
+      </p:sp>
+      <p:sp>
+        <p:nvSpPr>
+          <p:cNvPr id="3" name="Rounded Rectangle 2"/>
+          <p:cNvSpPr/>
+          <p:nvPr/>
+        </p:nvSpPr>
+        <p:spPr>
+          <a:xfrm>
+            <a:off x="457200" y="1188720"/>
+            <a:ext cx="3931920" cy="3474720"/>
+          </a:xfrm>
+          <a:prstGeom prst="roundRect">
+            <a:avLst/>
+          </a:prstGeom>
+          <a:solidFill>
+            <a:srgbClr val="141B2D"/>
+          </a:solidFill>
+          <a:ln w="12700">
+            <a:solidFill>
+              <a:srgbClr val="1E2A42"/>
+            </a:solidFill>
+          </a:ln>
+          <a:effectLst/>
+        </p:spPr>
+        <p:style>
+          <a:lnRef idx="1">
+            <a:schemeClr val="accent1"/>
+          </a:lnRef>
+          <a:fillRef idx="3">
+            <a:schemeClr val="accent1"/>
+          </a:fillRef>
+          <a:effectRef idx="2">
+            <a:schemeClr val="accent1"/>
+          </a:effectRef>
+          <a:fontRef idx="minor">
+            <a:schemeClr val="lt1"/>
+          </a:fontRef>
+        </p:style>
+        <p:txBody>
+          <a:bodyPr rtlCol="0" anchor="ctr" wrap="square" lIns="137160" rIns="137160" tIns="91440" bIns="91440"/>
+          <a:lstStyle/>
+          <a:p>
+            <a:pPr algn="ctr">
+              <a:spcAft>
+                <a:spcPts val="1000"/>
+              </a:spcAft>
+              <a:defRPr sz="1400" b="1">
+                <a:solidFill>
+                  <a:srgbClr val="00D4AA"/>
+                </a:solidFill>
+                <a:latin typeface="Calibri"/>
+              </a:defRPr>
+            </a:pPr>
+            <a:r>
+              <a:t>Application → Transport</a:t>
+            </a:r>
+          </a:p>
+          <a:p>
+            <a:pPr>
+              <a:spcBef>
+                <a:spcPts val="600"/>
+              </a:spcBef>
+              <a:defRPr sz="1100" b="1">
+                <a:solidFill>
+                  <a:srgbClr val="FFFFFF"/>
+                </a:solidFill>
+              </a:defRPr>
+            </a:pPr>
+            <a:r>
+              <a:t>1. Source Node</a:t>
+            </a:r>
+          </a:p>
+          <a:p>
+            <a:pPr>
+              <a:defRPr sz="900">
+                <a:solidFill>
+                  <a:srgbClr val="B0B8CC"/>
+                </a:solidFill>
+              </a:defRPr>
+            </a:pPr>
+            <a:r>
+              <a:t>Science data generated</a:t>
+            </a:r>
+          </a:p>
+          <a:p>
+            <a:pPr>
+              <a:spcBef>
+                <a:spcPts val="600"/>
+              </a:spcBef>
+              <a:defRPr sz="1100" b="1">
+                <a:solidFill>
+                  <a:srgbClr val="FFFFFF"/>
+                </a:solidFill>
+              </a:defRPr>
+            </a:pPr>
+            <a:r>
+              <a:t>2. Bundle Protocol</a:t>
+            </a:r>
+          </a:p>
+          <a:p>
+            <a:pPr>
+              <a:defRPr sz="900">
+                <a:solidFill>
+                  <a:srgbClr val="B0B8CC"/>
+                </a:solidFill>
+              </a:defRPr>
+            </a:pPr>
+            <a:r>
+              <a:t>BPv7 wraps data + metadata</a:t>
+            </a:r>
+          </a:p>
+          <a:p>
+            <a:pPr>
+              <a:spcBef>
+                <a:spcPts val="600"/>
+              </a:spcBef>
+              <a:defRPr sz="1100" b="1">
+                <a:solidFill>
+                  <a:srgbClr val="FFFFFF"/>
+                </a:solidFill>
+              </a:defRPr>
+            </a:pPr>
+            <a:r>
+              <a:t>3. RL Routing</a:t>
+            </a:r>
+          </a:p>
+          <a:p>
+            <a:pPr>
+              <a:defRPr sz="900">
+                <a:solidFill>
+                  <a:srgbClr val="B0B8CC"/>
+                </a:solidFill>
+              </a:defRPr>
+            </a:pPr>
+            <a:r>
+              <a:t>Agent evaluates state, selects hop</a:t>
+            </a:r>
+          </a:p>
+          <a:p>
+            <a:pPr>
+              <a:spcBef>
+                <a:spcPts val="600"/>
+              </a:spcBef>
+              <a:defRPr sz="1100" b="1">
+                <a:solidFill>
+                  <a:srgbClr val="FFFFFF"/>
+                </a:solidFill>
+              </a:defRPr>
+            </a:pPr>
+            <a:r>
+              <a:t>4. QKD Encrypt</a:t>
+            </a:r>
+          </a:p>
+          <a:p>
+            <a:pPr>
+              <a:defRPr sz="900">
+                <a:solidFill>
+                  <a:srgbClr val="B0B8CC"/>
+                </a:solidFill>
+              </a:defRPr>
+            </a:pPr>
+            <a:r>
+              <a:t>BB84 shared key applied</a:t>
+            </a:r>
+          </a:p>
+        </p:txBody>
+      </p:sp>
+      <p:sp>
+        <p:nvSpPr>
+          <p:cNvPr id="4" name="Rounded Rectangle 3"/>
+          <p:cNvSpPr/>
+          <p:nvPr/>
+        </p:nvSpPr>
+        <p:spPr>
+          <a:xfrm>
+            <a:off x="4754880" y="1188720"/>
+            <a:ext cx="3931920" cy="3474720"/>
+          </a:xfrm>
+          <a:prstGeom prst="roundRect">
+            <a:avLst/>
+          </a:prstGeom>
+          <a:solidFill>
+            <a:srgbClr val="141B2D"/>
+          </a:solidFill>
+          <a:ln w="12700">
+            <a:solidFill>
+              <a:srgbClr val="1E2A42"/>
+            </a:solidFill>
+          </a:ln>
+          <a:effectLst/>
+        </p:spPr>
+        <p:style>
+          <a:lnRef idx="1">
+            <a:schemeClr val="accent1"/>
+          </a:lnRef>
+          <a:fillRef idx="3">
+            <a:schemeClr val="accent1"/>
+          </a:fillRef>
+          <a:effectRef idx="2">
+            <a:schemeClr val="accent1"/>
+          </a:effectRef>
+          <a:fontRef idx="minor">
+            <a:schemeClr val="lt1"/>
+          </a:fontRef>
+        </p:style>
+        <p:txBody>
+          <a:bodyPr rtlCol="0" anchor="ctr" wrap="square" lIns="137160" rIns="137160" tIns="91440" bIns="91440"/>
+          <a:lstStyle/>
+          <a:p>
+            <a:pPr algn="ctr">
+              <a:spcAft>
+                <a:spcPts val="1000"/>
+              </a:spcAft>
+              <a:defRPr sz="1400" b="1">
+                <a:solidFill>
+                  <a:srgbClr val="00D4AA"/>
+                </a:solidFill>
+                <a:latin typeface="Calibri"/>
+              </a:defRPr>
+            </a:pPr>
+            <a:r>
+              <a:t>Convergence → Physical → Delivery</a:t>
+            </a:r>
+          </a:p>
+          <a:p>
+            <a:pPr>
+              <a:spcBef>
+                <a:spcPts val="600"/>
+              </a:spcBef>
+              <a:defRPr sz="1100" b="1">
+                <a:solidFill>
+                  <a:srgbClr val="FFFFFF"/>
+                </a:solidFill>
+              </a:defRPr>
+            </a:pPr>
+            <a:r>
+              <a:t>1. LTP Segmentation</a:t>
+            </a:r>
+          </a:p>
+          <a:p>
+            <a:pPr>
+              <a:defRPr sz="900">
+                <a:solidFill>
+                  <a:srgbClr val="B0B8CC"/>
+                </a:solidFill>
+              </a:defRPr>
+            </a:pPr>
+            <a:r>
+              <a:t>Bundle split into blocks</a:t>
+            </a:r>
+          </a:p>
+          <a:p>
+            <a:pPr>
+              <a:spcBef>
+                <a:spcPts val="600"/>
+              </a:spcBef>
+              <a:defRPr sz="1100" b="1">
+                <a:solidFill>
+                  <a:srgbClr val="FFFFFF"/>
+                </a:solidFill>
+              </a:defRPr>
+            </a:pPr>
+            <a:r>
+              <a:t>2. Store &amp; Wait</a:t>
+            </a:r>
+          </a:p>
+          <a:p>
+            <a:pPr>
+              <a:defRPr sz="900">
+                <a:solidFill>
+                  <a:srgbClr val="B0B8CC"/>
+                </a:solidFill>
+              </a:defRPr>
+            </a:pPr>
+            <a:r>
+              <a:t>Buffer until link available</a:t>
+            </a:r>
+          </a:p>
+          <a:p>
+            <a:pPr>
+              <a:spcBef>
+                <a:spcPts val="600"/>
+              </a:spcBef>
+              <a:defRPr sz="1100" b="1">
+                <a:solidFill>
+                  <a:srgbClr val="FFFFFF"/>
+                </a:solidFill>
+              </a:defRPr>
+            </a:pPr>
+            <a:r>
+              <a:t>3. Physical TX</a:t>
+            </a:r>
+          </a:p>
+          <a:p>
+            <a:pPr>
+              <a:defRPr sz="900">
+                <a:solidFill>
+                  <a:srgbClr val="B0B8CC"/>
+                </a:solidFill>
+              </a:defRPr>
+            </a:pPr>
+            <a:r>
+              <a:t>UHF → Optical ISL → 1550 nm → Ka-band</a:t>
+            </a:r>
+          </a:p>
+          <a:p>
+            <a:pPr>
+              <a:spcBef>
+                <a:spcPts val="600"/>
+              </a:spcBef>
+              <a:defRPr sz="1100" b="1">
+                <a:solidFill>
+                  <a:srgbClr val="FFFFFF"/>
+                </a:solidFill>
+              </a:defRPr>
+            </a:pPr>
+            <a:r>
+              <a:t>4. LTP Reassemble</a:t>
+            </a:r>
+          </a:p>
+          <a:p>
+            <a:pPr>
+              <a:defRPr sz="900">
+                <a:solidFill>
+                  <a:srgbClr val="B0B8CC"/>
+                </a:solidFill>
+              </a:defRPr>
+            </a:pPr>
+            <a:r>
+              <a:t>Reassemble → Decrypt → Deliver</a:t>
+            </a:r>
+          </a:p>
+        </p:txBody>
+      </p:sp>
+      <p:sp>
+        <p:nvSpPr>
+          <p:cNvPr id="5" name="TextBox 4"/>
+          <p:cNvSpPr txBox="1"/>
+          <p:nvPr/>
+        </p:nvSpPr>
+        <p:spPr>
+          <a:xfrm>
+            <a:off x="457200" y="6400800"/>
+            <a:ext cx="4572000" cy="365760"/>
+          </a:xfrm>
+          <a:prstGeom prst="rect">
+            <a:avLst/>
+          </a:prstGeom>
+          <a:noFill/>
+        </p:spPr>
+        <p:txBody>
+          <a:bodyPr wrap="square">
+            <a:spAutoFit/>
+          </a:bodyPr>
+          <a:lstStyle/>
+          <a:p>
+            <a:pPr algn="l">
+              <a:defRPr sz="1000" b="0">
+                <a:solidFill>
+                  <a:srgbClr val="6B7B96"/>
+                </a:solidFill>
+                <a:latin typeface="Calibri"/>
+              </a:defRPr>
+            </a:pPr>
+            <a:r>
+              <a:t>AETHERIX — Interplanetary Communication Network</a:t>
+            </a:r>
+          </a:p>
+        </p:txBody>
+      </p:sp>
+      <p:sp>
+        <p:nvSpPr>
+          <p:cNvPr id="6" name="TextBox 5"/>
+          <p:cNvSpPr txBox="1"/>
+          <p:nvPr/>
+        </p:nvSpPr>
+        <p:spPr>
+          <a:xfrm>
+            <a:off x="10058400" y="6400800"/>
+            <a:ext cx="1828800" cy="365760"/>
+          </a:xfrm>
+          <a:prstGeom prst="rect">
+            <a:avLst/>
+          </a:prstGeom>
+          <a:noFill/>
+        </p:spPr>
+        <p:txBody>
+          <a:bodyPr wrap="square">
+            <a:spAutoFit/>
+          </a:bodyPr>
+          <a:lstStyle/>
+          <a:p>
+            <a:pPr algn="r">
+              <a:defRPr sz="1000" b="0">
+                <a:solidFill>
+                  <a:srgbClr val="6B7B96"/>
+                </a:solidFill>
+                <a:latin typeface="Calibri"/>
+              </a:defRPr>
+            </a:pPr>
+            <a:r>
+              <a:t>21 / 27</a:t>
+            </a:r>
+          </a:p>
+        </p:txBody>
+      </p:sp>
+    </p:spTree>
+  </p:cSld>
+  <p:transition spd="med" advClick="1">
+    <p:wipe dir="d"/>
+  </p:transition>
+  <p:clrMapOvr>
+    <a:masterClrMapping/>
+  </p:clrMapOvr>
+</p:sld>
+</file>
+
+<file path=ppt/slides/slide22.xml><?xml version="1.0" encoding="utf-8"?>
+<p:sld xmlns:a="http://schemas.openxmlformats.org/drawingml/2006/main" xmlns:p="http://schemas.openxmlformats.org/presentationml/2006/main" xmlns:r="http://schemas.openxmlformats.org/officeDocument/2006/relationships">
+  <p:cSld>
+    <p:bg>
+      <p:bgPr>
+        <a:solidFill>
+          <a:srgbClr val="0B0E1A"/>
+        </a:solidFill>
+        <a:effectLst/>
+      </p:bgPr>
+    </p:bg>
+    <p:spTree>
+      <p:nvGrpSpPr>
+        <p:cNvPr id="1" name=""/>
+        <p:cNvGrpSpPr/>
+        <p:nvPr/>
+      </p:nvGrpSpPr>
+      <p:grpSpPr/>
+      <p:sp>
+        <p:nvSpPr>
+          <p:cNvPr id="2" name="TextBox 1"/>
+          <p:cNvSpPr txBox="1"/>
+          <p:nvPr/>
+        </p:nvSpPr>
+        <p:spPr>
+          <a:xfrm>
+            <a:off x="548640" y="365760"/>
+            <a:ext cx="8229600" cy="548640"/>
+          </a:xfrm>
+          <a:prstGeom prst="rect">
+            <a:avLst/>
+          </a:prstGeom>
+          <a:noFill/>
+        </p:spPr>
+        <p:txBody>
+          <a:bodyPr wrap="none">
+            <a:spAutoFit/>
+          </a:bodyPr>
+          <a:lstStyle/>
+          <a:p>
+            <a:pPr algn="l">
+              <a:defRPr sz="2800" b="1">
+                <a:solidFill>
+                  <a:srgbClr val="FFFFFF"/>
+                </a:solidFill>
+              </a:defRPr>
+            </a:pPr>
+            <a:r>
               <a:t>DATA FLOW DIAGRAM</a:t>
             </a:r>
           </a:p>
@@ -14490,7 +17203,7 @@
               </a:defRPr>
             </a:pPr>
             <a:r>
-              <a:t>20 / 25</a:t>
+              <a:t>22 / 27</a:t>
             </a:r>
           </a:p>
         </p:txBody>
@@ -14506,7 +17219,7 @@
 </p:sld>
 </file>
 
-<file path=ppt/slides/slide21.xml><?xml version="1.0" encoding="utf-8"?>
+<file path=ppt/slides/slide23.xml><?xml version="1.0" encoding="utf-8"?>
 <p:sld xmlns:a="http://schemas.openxmlformats.org/drawingml/2006/main" xmlns:p="http://schemas.openxmlformats.org/presentationml/2006/main" xmlns:r="http://schemas.openxmlformats.org/officeDocument/2006/relationships">
   <p:cSld>
     <p:bg>
@@ -15619,7 +18332,7 @@
               </a:defRPr>
             </a:pPr>
             <a:r>
-              <a:t>21 / 25</a:t>
+              <a:t>23 / 27</a:t>
             </a:r>
           </a:p>
         </p:txBody>
@@ -15635,7 +18348,7 @@
 </p:sld>
 </file>
 
-<file path=ppt/slides/slide22.xml><?xml version="1.0" encoding="utf-8"?>
+<file path=ppt/slides/slide24.xml><?xml version="1.0" encoding="utf-8"?>
 <p:sld xmlns:a="http://schemas.openxmlformats.org/drawingml/2006/main" xmlns:p="http://schemas.openxmlformats.org/presentationml/2006/main" xmlns:r="http://schemas.openxmlformats.org/officeDocument/2006/relationships">
   <p:cSld>
     <p:bg>
@@ -16300,206 +19013,6 @@
                         </a:defRPr>
                       </a:pPr>
                       <a:r>
-                        <a:t>CCSDS 734.2-B-1</a:t>
-                      </a:r>
-                    </a:p>
-                  </a:txBody>
-                  <a:tcPr anchor="ctr" marL="73152" marR="73152" marT="36576" marB="36576">
-                    <a:solidFill>
-                      <a:srgbClr val="141B2D"/>
-                    </a:solidFill>
-                  </a:tcPr>
-                </a:tc>
-                <a:tc>
-                  <a:txBody>
-                    <a:bodyPr/>
-                    <a:lstStyle/>
-                    <a:p>
-                      <a:pPr>
-                        <a:defRPr sz="1100">
-                          <a:solidFill>
-                            <a:srgbClr val="B0B8CC"/>
-                          </a:solidFill>
-                          <a:latin typeface="Calibri"/>
-                        </a:defRPr>
-                      </a:pPr>
-                      <a:r>
-                        <a:t>DTN Architecture</a:t>
-                      </a:r>
-                    </a:p>
-                  </a:txBody>
-                  <a:tcPr anchor="ctr" marL="73152" marR="73152" marT="36576" marB="36576">
-                    <a:solidFill>
-                      <a:srgbClr val="141B2D"/>
-                    </a:solidFill>
-                  </a:tcPr>
-                </a:tc>
-              </a:tr>
-              <a:tr h="125730">
-                <a:tc>
-                  <a:txBody>
-                    <a:bodyPr/>
-                    <a:lstStyle/>
-                    <a:p>
-                      <a:pPr>
-                        <a:defRPr sz="1100">
-                          <a:solidFill>
-                            <a:srgbClr val="B0B8CC"/>
-                          </a:solidFill>
-                          <a:latin typeface="Calibri"/>
-                        </a:defRPr>
-                      </a:pPr>
-                      <a:r>
-                        <a:t>CCSDS 735.1-B-1</a:t>
-                      </a:r>
-                    </a:p>
-                  </a:txBody>
-                  <a:tcPr anchor="ctr" marL="73152" marR="73152" marT="36576" marB="36576">
-                    <a:solidFill>
-                      <a:srgbClr val="182236"/>
-                    </a:solidFill>
-                  </a:tcPr>
-                </a:tc>
-                <a:tc>
-                  <a:txBody>
-                    <a:bodyPr/>
-                    <a:lstStyle/>
-                    <a:p>
-                      <a:pPr>
-                        <a:defRPr sz="1100">
-                          <a:solidFill>
-                            <a:srgbClr val="B0B8CC"/>
-                          </a:solidFill>
-                          <a:latin typeface="Calibri"/>
-                        </a:defRPr>
-                      </a:pPr>
-                      <a:r>
-                        <a:t>Bundle Protocol</a:t>
-                      </a:r>
-                    </a:p>
-                  </a:txBody>
-                  <a:tcPr anchor="ctr" marL="73152" marR="73152" marT="36576" marB="36576">
-                    <a:solidFill>
-                      <a:srgbClr val="182236"/>
-                    </a:solidFill>
-                  </a:tcPr>
-                </a:tc>
-              </a:tr>
-              <a:tr h="125730">
-                <a:tc>
-                  <a:txBody>
-                    <a:bodyPr/>
-                    <a:lstStyle/>
-                    <a:p>
-                      <a:pPr>
-                        <a:defRPr sz="1100">
-                          <a:solidFill>
-                            <a:srgbClr val="B0B8CC"/>
-                          </a:solidFill>
-                          <a:latin typeface="Calibri"/>
-                        </a:defRPr>
-                      </a:pPr>
-                      <a:r>
-                        <a:t>CCSDS 141.0-B-1</a:t>
-                      </a:r>
-                    </a:p>
-                  </a:txBody>
-                  <a:tcPr anchor="ctr" marL="73152" marR="73152" marT="36576" marB="36576">
-                    <a:solidFill>
-                      <a:srgbClr val="141B2D"/>
-                    </a:solidFill>
-                  </a:tcPr>
-                </a:tc>
-                <a:tc>
-                  <a:txBody>
-                    <a:bodyPr/>
-                    <a:lstStyle/>
-                    <a:p>
-                      <a:pPr>
-                        <a:defRPr sz="1100">
-                          <a:solidFill>
-                            <a:srgbClr val="B0B8CC"/>
-                          </a:solidFill>
-                          <a:latin typeface="Calibri"/>
-                        </a:defRPr>
-                      </a:pPr>
-                      <a:r>
-                        <a:t>Optical Communications</a:t>
-                      </a:r>
-                    </a:p>
-                  </a:txBody>
-                  <a:tcPr anchor="ctr" marL="73152" marR="73152" marT="36576" marB="36576">
-                    <a:solidFill>
-                      <a:srgbClr val="141B2D"/>
-                    </a:solidFill>
-                  </a:tcPr>
-                </a:tc>
-              </a:tr>
-              <a:tr h="125730">
-                <a:tc>
-                  <a:txBody>
-                    <a:bodyPr/>
-                    <a:lstStyle/>
-                    <a:p>
-                      <a:pPr>
-                        <a:defRPr sz="1100">
-                          <a:solidFill>
-                            <a:srgbClr val="B0B8CC"/>
-                          </a:solidFill>
-                          <a:latin typeface="Calibri"/>
-                        </a:defRPr>
-                      </a:pPr>
-                      <a:r>
-                        <a:t>CCSDS 142.0-B-2</a:t>
-                      </a:r>
-                    </a:p>
-                  </a:txBody>
-                  <a:tcPr anchor="ctr" marL="73152" marR="73152" marT="36576" marB="36576">
-                    <a:solidFill>
-                      <a:srgbClr val="182236"/>
-                    </a:solidFill>
-                  </a:tcPr>
-                </a:tc>
-                <a:tc>
-                  <a:txBody>
-                    <a:bodyPr/>
-                    <a:lstStyle/>
-                    <a:p>
-                      <a:pPr>
-                        <a:defRPr sz="1100">
-                          <a:solidFill>
-                            <a:srgbClr val="B0B8CC"/>
-                          </a:solidFill>
-                          <a:latin typeface="Calibri"/>
-                        </a:defRPr>
-                      </a:pPr>
-                      <a:r>
-                        <a:t>Space Link Identifiers</a:t>
-                      </a:r>
-                    </a:p>
-                  </a:txBody>
-                  <a:tcPr anchor="ctr" marL="73152" marR="73152" marT="36576" marB="36576">
-                    <a:solidFill>
-                      <a:srgbClr val="182236"/>
-                    </a:solidFill>
-                  </a:tcPr>
-                </a:tc>
-              </a:tr>
-              <a:tr h="125730">
-                <a:tc>
-                  <a:txBody>
-                    <a:bodyPr/>
-                    <a:lstStyle/>
-                    <a:p>
-                      <a:pPr>
-                        <a:defRPr sz="1100">
-                          <a:solidFill>
-                            <a:srgbClr val="B0B8CC"/>
-                          </a:solidFill>
-                          <a:latin typeface="Calibri"/>
-                        </a:defRPr>
-                      </a:pPr>
-                      <a:r>
                         <a:t>RFC 9171</a:t>
                       </a:r>
                     </a:p>
@@ -16550,7 +19063,7 @@
                         </a:defRPr>
                       </a:pPr>
                       <a:r>
-                        <a:t>RFC 5326</a:t>
+                        <a:t>RFC 4838</a:t>
                       </a:r>
                     </a:p>
                   </a:txBody>
@@ -16574,7 +19087,7 @@
                         </a:defRPr>
                       </a:pPr>
                       <a:r>
-                        <a:t>LTP</a:t>
+                        <a:t>DTN Architecture</a:t>
                       </a:r>
                     </a:p>
                   </a:txBody>
@@ -16600,7 +19113,7 @@
                         </a:defRPr>
                       </a:pPr>
                       <a:r>
-                        <a:t>RFC 7242</a:t>
+                        <a:t>RFC 5326</a:t>
                       </a:r>
                     </a:p>
                   </a:txBody>
@@ -16624,7 +19137,207 @@
                         </a:defRPr>
                       </a:pPr>
                       <a:r>
-                        <a:t>TCPCL</a:t>
+                        <a:t>LTP (deep space)</a:t>
+                      </a:r>
+                    </a:p>
+                  </a:txBody>
+                  <a:tcPr anchor="ctr" marL="73152" marR="73152" marT="36576" marB="36576">
+                    <a:solidFill>
+                      <a:srgbClr val="141B2D"/>
+                    </a:solidFill>
+                  </a:tcPr>
+                </a:tc>
+              </a:tr>
+              <a:tr h="125730">
+                <a:tc>
+                  <a:txBody>
+                    <a:bodyPr/>
+                    <a:lstStyle/>
+                    <a:p>
+                      <a:pPr>
+                        <a:defRPr sz="1100">
+                          <a:solidFill>
+                            <a:srgbClr val="B0B8CC"/>
+                          </a:solidFill>
+                          <a:latin typeface="Calibri"/>
+                        </a:defRPr>
+                      </a:pPr>
+                      <a:r>
+                        <a:t>RFC 9172</a:t>
+                      </a:r>
+                    </a:p>
+                  </a:txBody>
+                  <a:tcPr anchor="ctr" marL="73152" marR="73152" marT="36576" marB="36576">
+                    <a:solidFill>
+                      <a:srgbClr val="182236"/>
+                    </a:solidFill>
+                  </a:tcPr>
+                </a:tc>
+                <a:tc>
+                  <a:txBody>
+                    <a:bodyPr/>
+                    <a:lstStyle/>
+                    <a:p>
+                      <a:pPr>
+                        <a:defRPr sz="1100">
+                          <a:solidFill>
+                            <a:srgbClr val="B0B8CC"/>
+                          </a:solidFill>
+                          <a:latin typeface="Calibri"/>
+                        </a:defRPr>
+                      </a:pPr>
+                      <a:r>
+                        <a:t>BPSec (security)</a:t>
+                      </a:r>
+                    </a:p>
+                  </a:txBody>
+                  <a:tcPr anchor="ctr" marL="73152" marR="73152" marT="36576" marB="36576">
+                    <a:solidFill>
+                      <a:srgbClr val="182236"/>
+                    </a:solidFill>
+                  </a:tcPr>
+                </a:tc>
+              </a:tr>
+              <a:tr h="125730">
+                <a:tc>
+                  <a:txBody>
+                    <a:bodyPr/>
+                    <a:lstStyle/>
+                    <a:p>
+                      <a:pPr>
+                        <a:defRPr sz="1100">
+                          <a:solidFill>
+                            <a:srgbClr val="B0B8CC"/>
+                          </a:solidFill>
+                          <a:latin typeface="Calibri"/>
+                        </a:defRPr>
+                      </a:pPr>
+                      <a:r>
+                        <a:t>CCSDS 734.2-B-1</a:t>
+                      </a:r>
+                    </a:p>
+                  </a:txBody>
+                  <a:tcPr anchor="ctr" marL="73152" marR="73152" marT="36576" marB="36576">
+                    <a:solidFill>
+                      <a:srgbClr val="141B2D"/>
+                    </a:solidFill>
+                  </a:tcPr>
+                </a:tc>
+                <a:tc>
+                  <a:txBody>
+                    <a:bodyPr/>
+                    <a:lstStyle/>
+                    <a:p>
+                      <a:pPr>
+                        <a:defRPr sz="1100">
+                          <a:solidFill>
+                            <a:srgbClr val="B0B8CC"/>
+                          </a:solidFill>
+                          <a:latin typeface="Calibri"/>
+                        </a:defRPr>
+                      </a:pPr>
+                      <a:r>
+                        <a:t>CCSDS Bundle Protocol</a:t>
+                      </a:r>
+                    </a:p>
+                  </a:txBody>
+                  <a:tcPr anchor="ctr" marL="73152" marR="73152" marT="36576" marB="36576">
+                    <a:solidFill>
+                      <a:srgbClr val="141B2D"/>
+                    </a:solidFill>
+                  </a:tcPr>
+                </a:tc>
+              </a:tr>
+              <a:tr h="125730">
+                <a:tc>
+                  <a:txBody>
+                    <a:bodyPr/>
+                    <a:lstStyle/>
+                    <a:p>
+                      <a:pPr>
+                        <a:defRPr sz="1100">
+                          <a:solidFill>
+                            <a:srgbClr val="B0B8CC"/>
+                          </a:solidFill>
+                          <a:latin typeface="Calibri"/>
+                        </a:defRPr>
+                      </a:pPr>
+                      <a:r>
+                        <a:t>CCSDS 734.3-B-1</a:t>
+                      </a:r>
+                    </a:p>
+                  </a:txBody>
+                  <a:tcPr anchor="ctr" marL="73152" marR="73152" marT="36576" marB="36576">
+                    <a:solidFill>
+                      <a:srgbClr val="182236"/>
+                    </a:solidFill>
+                  </a:tcPr>
+                </a:tc>
+                <a:tc>
+                  <a:txBody>
+                    <a:bodyPr/>
+                    <a:lstStyle/>
+                    <a:p>
+                      <a:pPr>
+                        <a:defRPr sz="1100">
+                          <a:solidFill>
+                            <a:srgbClr val="B0B8CC"/>
+                          </a:solidFill>
+                          <a:latin typeface="Calibri"/>
+                        </a:defRPr>
+                      </a:pPr>
+                      <a:r>
+                        <a:t>SABR (contact routing)</a:t>
+                      </a:r>
+                    </a:p>
+                  </a:txBody>
+                  <a:tcPr anchor="ctr" marL="73152" marR="73152" marT="36576" marB="36576">
+                    <a:solidFill>
+                      <a:srgbClr val="182236"/>
+                    </a:solidFill>
+                  </a:tcPr>
+                </a:tc>
+              </a:tr>
+              <a:tr h="125730">
+                <a:tc>
+                  <a:txBody>
+                    <a:bodyPr/>
+                    <a:lstStyle/>
+                    <a:p>
+                      <a:pPr>
+                        <a:defRPr sz="1100">
+                          <a:solidFill>
+                            <a:srgbClr val="B0B8CC"/>
+                          </a:solidFill>
+                          <a:latin typeface="Calibri"/>
+                        </a:defRPr>
+                      </a:pPr>
+                      <a:r>
+                        <a:t>CCSDS 141.0-B-1</a:t>
+                      </a:r>
+                    </a:p>
+                  </a:txBody>
+                  <a:tcPr anchor="ctr" marL="73152" marR="73152" marT="36576" marB="36576">
+                    <a:solidFill>
+                      <a:srgbClr val="141B2D"/>
+                    </a:solidFill>
+                  </a:tcPr>
+                </a:tc>
+                <a:tc>
+                  <a:txBody>
+                    <a:bodyPr/>
+                    <a:lstStyle/>
+                    <a:p>
+                      <a:pPr>
+                        <a:defRPr sz="1100">
+                          <a:solidFill>
+                            <a:srgbClr val="B0B8CC"/>
+                          </a:solidFill>
+                          <a:latin typeface="Calibri"/>
+                        </a:defRPr>
+                      </a:pPr>
+                      <a:r>
+                        <a:t>Optical comms phys.</a:t>
                       </a:r>
                     </a:p>
                   </a:txBody>
@@ -16706,7 +19419,7 @@
               </a:defRPr>
             </a:pPr>
             <a:r>
-              <a:t>22 / 25</a:t>
+              <a:t>24 / 27</a:t>
             </a:r>
           </a:p>
         </p:txBody>
@@ -16722,7 +19435,7 @@
 </p:sld>
 </file>
 
-<file path=ppt/slides/slide23.xml><?xml version="1.0" encoding="utf-8"?>
+<file path=ppt/slides/slide25.xml><?xml version="1.0" encoding="utf-8"?>
 <p:sld xmlns:a="http://schemas.openxmlformats.org/drawingml/2006/main" xmlns:p="http://schemas.openxmlformats.org/presentationml/2006/main" xmlns:r="http://schemas.openxmlformats.org/officeDocument/2006/relationships">
   <p:cSld>
     <p:bg>
@@ -17349,7 +20062,7 @@
               </a:defRPr>
             </a:pPr>
             <a:r>
-              <a:t>23 / 25</a:t>
+              <a:t>25 / 27</a:t>
             </a:r>
           </a:p>
         </p:txBody>
@@ -17365,7 +20078,7 @@
 </p:sld>
 </file>
 
-<file path=ppt/slides/slide24.xml><?xml version="1.0" encoding="utf-8"?>
+<file path=ppt/slides/slide26.xml><?xml version="1.0" encoding="utf-8"?>
 <p:sld xmlns:a="http://schemas.openxmlformats.org/drawingml/2006/main" xmlns:p="http://schemas.openxmlformats.org/presentationml/2006/main" xmlns:r="http://schemas.openxmlformats.org/officeDocument/2006/relationships">
   <p:cSld>
     <p:bg>
@@ -17962,7 +20675,7 @@
               </a:defRPr>
             </a:pPr>
             <a:r>
-              <a:t>24 / 25</a:t>
+              <a:t>26 / 27</a:t>
             </a:r>
           </a:p>
         </p:txBody>
@@ -17978,7 +20691,7 @@
 </p:sld>
 </file>
 
-<file path=ppt/slides/slide25.xml><?xml version="1.0" encoding="utf-8"?>
+<file path=ppt/slides/slide27.xml><?xml version="1.0" encoding="utf-8"?>
 <p:sld xmlns:a="http://schemas.openxmlformats.org/drawingml/2006/main" xmlns:p="http://schemas.openxmlformats.org/presentationml/2006/main" xmlns:r="http://schemas.openxmlformats.org/officeDocument/2006/relationships">
   <p:cSld>
     <p:bg>
@@ -18780,7 +21493,7 @@
               </a:defRPr>
             </a:pPr>
             <a:r>
-              <a:t>3 / 25</a:t>
+              <a:t>3 / 27</a:t>
             </a:r>
           </a:p>
         </p:txBody>
@@ -19823,7 +22536,7 @@
               </a:defRPr>
             </a:pPr>
             <a:r>
-              <a:t>4 / 25</a:t>
+              <a:t>4 / 27</a:t>
             </a:r>
           </a:p>
         </p:txBody>
@@ -21425,7 +24138,7 @@
               </a:defRPr>
             </a:pPr>
             <a:r>
-              <a:t>5 / 25</a:t>
+              <a:t>5 / 27</a:t>
             </a:r>
           </a:p>
         </p:txBody>
@@ -23044,7 +25757,7 @@
               </a:defRPr>
             </a:pPr>
             <a:r>
-              <a:t>6 / 25</a:t>
+              <a:t>6 / 27</a:t>
             </a:r>
           </a:p>
         </p:txBody>
@@ -24456,7 +27169,7 @@
               </a:defRPr>
             </a:pPr>
             <a:r>
-              <a:t>7 / 25</a:t>
+              <a:t>7 / 27</a:t>
             </a:r>
           </a:p>
         </p:txBody>
@@ -24697,7 +27410,7 @@
               </a:defRPr>
             </a:pPr>
             <a:r>
-              <a:t>8 / 25</a:t>
+              <a:t>8 / 27</a:t>
             </a:r>
           </a:p>
         </p:txBody>
@@ -26125,7 +28838,7 @@
               </a:defRPr>
             </a:pPr>
             <a:r>
-              <a:t>Standards: RFC 9171 (BPv7)  •  RFC 5326 (LTP)  •  CCSDS 734.2-B-1 (DTN Arch)  •  CCSDS 735.1-B-1 (BP)  •  CCSDS 142.0-B-2 (Space Link IDs)</a:t>
+              <a:t>Standards: RFC 9171 (BPv7)  •  RFC 4838 (DTN Arch)  •  RFC 5326 (LTP)  •  CCSDS 734.2-B-1 (Bundle Protocol)  •  CCSDS 734.3-B-1 (SABR)</a:t>
             </a:r>
           </a:p>
         </p:txBody>
@@ -27002,7 +29715,7 @@
               </a:defRPr>
             </a:pPr>
             <a:r>
-              <a:t>9 / 25</a:t>
+              <a:t>9 / 27</a:t>
             </a:r>
           </a:p>
         </p:txBody>

--- a/presentation/output/AETHERIX_Presentation.pptx
+++ b/presentation/output/AETHERIX_Presentation.pptx
@@ -131,6 +131,2246 @@
     </a:lvl9pPr>
   </p:defaultTextStyle>
 </p:presentation>
+</file>
+
+<file path=ppt/notesMasters/notesMaster1.xml><?xml version="1.0" encoding="utf-8"?>
+<p:notesMaster xmlns:a="http://schemas.openxmlformats.org/drawingml/2006/main" xmlns:p="http://schemas.openxmlformats.org/presentationml/2006/main" xmlns:r="http://schemas.openxmlformats.org/officeDocument/2006/relationships">
+  <p:cSld>
+    <p:bg>
+      <p:bgRef idx="1001">
+        <a:schemeClr val="bg1"/>
+      </p:bgRef>
+    </p:bg>
+    <p:spTree>
+      <p:nvGrpSpPr>
+        <p:cNvPr id="1" name=""/>
+        <p:cNvGrpSpPr/>
+        <p:nvPr/>
+      </p:nvGrpSpPr>
+      <p:grpSpPr>
+        <a:xfrm>
+          <a:off x="0" y="0"/>
+          <a:ext cx="0" cy="0"/>
+          <a:chOff x="0" y="0"/>
+          <a:chExt cx="0" cy="0"/>
+        </a:xfrm>
+      </p:grpSpPr>
+      <p:sp>
+        <p:nvSpPr>
+          <p:cNvPr id="2" name="Header Placeholder 1"/>
+          <p:cNvSpPr>
+            <a:spLocks noGrp="1"/>
+          </p:cNvSpPr>
+          <p:nvPr>
+            <p:ph type="hdr" sz="quarter"/>
+          </p:nvPr>
+        </p:nvSpPr>
+        <p:spPr>
+          <a:xfrm>
+            <a:off x="0" y="0"/>
+            <a:ext cx="2971800" cy="457200"/>
+          </a:xfrm>
+          <a:prstGeom prst="rect">
+            <a:avLst/>
+          </a:prstGeom>
+        </p:spPr>
+        <p:txBody>
+          <a:bodyPr vert="horz" lIns="91440" tIns="45720" rIns="91440" bIns="45720" rtlCol="0"/>
+          <a:lstStyle>
+            <a:lvl1pPr algn="l">
+              <a:defRPr sz="1200"/>
+            </a:lvl1pPr>
+          </a:lstStyle>
+          <a:p>
+            <a:endParaRPr lang="en-US"/>
+          </a:p>
+        </p:txBody>
+      </p:sp>
+      <p:sp>
+        <p:nvSpPr>
+          <p:cNvPr id="3" name="Date Placeholder 2"/>
+          <p:cNvSpPr>
+            <a:spLocks noGrp="1"/>
+          </p:cNvSpPr>
+          <p:nvPr>
+            <p:ph type="dt" idx="1"/>
+          </p:nvPr>
+        </p:nvSpPr>
+        <p:spPr>
+          <a:xfrm>
+            <a:off x="3884613" y="0"/>
+            <a:ext cx="2971800" cy="457200"/>
+          </a:xfrm>
+          <a:prstGeom prst="rect">
+            <a:avLst/>
+          </a:prstGeom>
+        </p:spPr>
+        <p:txBody>
+          <a:bodyPr vert="horz" lIns="91440" tIns="45720" rIns="91440" bIns="45720" rtlCol="0"/>
+          <a:lstStyle>
+            <a:lvl1pPr algn="r">
+              <a:defRPr sz="1200"/>
+            </a:lvl1pPr>
+          </a:lstStyle>
+          <a:p>
+            <a:fld id="{0F89C1C7-3DCD-1040-A9CF-14679D8B5DDD}" type="datetimeFigureOut">
+              <a:rPr lang="en-US" smtClean="0"/>
+              <a:t>10/17/16</a:t>
+            </a:fld>
+            <a:endParaRPr lang="en-US"/>
+          </a:p>
+        </p:txBody>
+      </p:sp>
+      <p:sp>
+        <p:nvSpPr>
+          <p:cNvPr id="4" name="Slide Image Placeholder 3"/>
+          <p:cNvSpPr>
+            <a:spLocks noGrp="1" noRot="1" noChangeAspect="1"/>
+          </p:cNvSpPr>
+          <p:nvPr>
+            <p:ph type="sldImg" idx="2"/>
+          </p:nvPr>
+        </p:nvSpPr>
+        <p:spPr>
+          <a:xfrm>
+            <a:off x="1143000" y="685800"/>
+            <a:ext cx="4572000" cy="3429000"/>
+          </a:xfrm>
+          <a:prstGeom prst="rect">
+            <a:avLst/>
+          </a:prstGeom>
+          <a:noFill/>
+          <a:ln w="12700">
+            <a:solidFill>
+              <a:prstClr val="black"/>
+            </a:solidFill>
+          </a:ln>
+        </p:spPr>
+        <p:txBody>
+          <a:bodyPr vert="horz" lIns="91440" tIns="45720" rIns="91440" bIns="45720" rtlCol="0" anchor="ctr"/>
+          <a:lstStyle/>
+          <a:p>
+            <a:endParaRPr lang="en-US"/>
+          </a:p>
+        </p:txBody>
+      </p:sp>
+      <p:sp>
+        <p:nvSpPr>
+          <p:cNvPr id="5" name="Notes Placeholder 4"/>
+          <p:cNvSpPr>
+            <a:spLocks noGrp="1"/>
+          </p:cNvSpPr>
+          <p:nvPr>
+            <p:ph type="body" sz="quarter" idx="3"/>
+          </p:nvPr>
+        </p:nvSpPr>
+        <p:spPr>
+          <a:xfrm>
+            <a:off x="685800" y="4343400"/>
+            <a:ext cx="5486400" cy="4114800"/>
+          </a:xfrm>
+          <a:prstGeom prst="rect">
+            <a:avLst/>
+          </a:prstGeom>
+        </p:spPr>
+        <p:txBody>
+          <a:bodyPr vert="horz" lIns="91440" tIns="45720" rIns="91440" bIns="45720" rtlCol="0"/>
+          <a:lstStyle/>
+          <a:p>
+            <a:pPr lvl="0"/>
+            <a:r>
+              <a:rPr lang="en-US" smtClean="0"/>
+              <a:t>Click to edit Master text styles</a:t>
+            </a:r>
+          </a:p>
+          <a:p>
+            <a:pPr lvl="1"/>
+            <a:r>
+              <a:rPr lang="en-US" smtClean="0"/>
+              <a:t>Second level</a:t>
+            </a:r>
+          </a:p>
+          <a:p>
+            <a:pPr lvl="2"/>
+            <a:r>
+              <a:rPr lang="en-US" smtClean="0"/>
+              <a:t>Third level</a:t>
+            </a:r>
+          </a:p>
+          <a:p>
+            <a:pPr lvl="3"/>
+            <a:r>
+              <a:rPr lang="en-US" smtClean="0"/>
+              <a:t>Fourth level</a:t>
+            </a:r>
+          </a:p>
+          <a:p>
+            <a:pPr lvl="4"/>
+            <a:r>
+              <a:rPr lang="en-US" smtClean="0"/>
+              <a:t>Fifth level</a:t>
+            </a:r>
+            <a:endParaRPr lang="en-US"/>
+          </a:p>
+        </p:txBody>
+      </p:sp>
+      <p:sp>
+        <p:nvSpPr>
+          <p:cNvPr id="6" name="Footer Placeholder 5"/>
+          <p:cNvSpPr>
+            <a:spLocks noGrp="1"/>
+          </p:cNvSpPr>
+          <p:nvPr>
+            <p:ph type="ftr" sz="quarter" idx="4"/>
+          </p:nvPr>
+        </p:nvSpPr>
+        <p:spPr>
+          <a:xfrm>
+            <a:off x="0" y="8685213"/>
+            <a:ext cx="2971800" cy="457200"/>
+          </a:xfrm>
+          <a:prstGeom prst="rect">
+            <a:avLst/>
+          </a:prstGeom>
+        </p:spPr>
+        <p:txBody>
+          <a:bodyPr vert="horz" lIns="91440" tIns="45720" rIns="91440" bIns="45720" rtlCol="0" anchor="b"/>
+          <a:lstStyle>
+            <a:lvl1pPr algn="l">
+              <a:defRPr sz="1200"/>
+            </a:lvl1pPr>
+          </a:lstStyle>
+          <a:p>
+            <a:endParaRPr lang="en-US"/>
+          </a:p>
+        </p:txBody>
+      </p:sp>
+      <p:sp>
+        <p:nvSpPr>
+          <p:cNvPr id="7" name="Slide Number Placeholder 6"/>
+          <p:cNvSpPr>
+            <a:spLocks noGrp="1"/>
+          </p:cNvSpPr>
+          <p:nvPr>
+            <p:ph type="sldNum" sz="quarter" idx="5"/>
+          </p:nvPr>
+        </p:nvSpPr>
+        <p:spPr>
+          <a:xfrm>
+            <a:off x="3884613" y="8685213"/>
+            <a:ext cx="2971800" cy="457200"/>
+          </a:xfrm>
+          <a:prstGeom prst="rect">
+            <a:avLst/>
+          </a:prstGeom>
+        </p:spPr>
+        <p:txBody>
+          <a:bodyPr vert="horz" lIns="91440" tIns="45720" rIns="91440" bIns="45720" rtlCol="0" anchor="b"/>
+          <a:lstStyle>
+            <a:lvl1pPr algn="r">
+              <a:defRPr sz="1200"/>
+            </a:lvl1pPr>
+          </a:lstStyle>
+          <a:p>
+            <a:fld id="{BB5E49A5-4136-284D-997B-48E1D791AD67}" type="slidenum">
+              <a:rPr lang="en-US" smtClean="0"/>
+              <a:t>‹#›</a:t>
+            </a:fld>
+            <a:endParaRPr lang="en-US"/>
+          </a:p>
+        </p:txBody>
+      </p:sp>
+    </p:spTree>
+    <p:extLst>
+      <p:ext uri="{BB962C8B-B14F-4D97-AF65-F5344CB8AC3E}">
+        <p14:creationId xmlns:p14="http://schemas.microsoft.com/office/powerpoint/2010/main" val="2623252185"/>
+      </p:ext>
+    </p:extLst>
+  </p:cSld>
+  <p:clrMap bg1="lt1" tx1="dk1" bg2="lt2" tx2="dk2" accent1="accent1" accent2="accent2" accent3="accent3" accent4="accent4" accent5="accent5" accent6="accent6" hlink="hlink" folHlink="folHlink"/>
+  <p:notesStyle>
+    <a:lvl1pPr marL="0" algn="l" defTabSz="457200" rtl="0" eaLnBrk="1" latinLnBrk="0" hangingPunct="1">
+      <a:defRPr sz="1200" kern="1200">
+        <a:solidFill>
+          <a:schemeClr val="tx1"/>
+        </a:solidFill>
+        <a:latin typeface="+mn-lt"/>
+        <a:ea typeface="+mn-ea"/>
+        <a:cs typeface="+mn-cs"/>
+      </a:defRPr>
+    </a:lvl1pPr>
+    <a:lvl2pPr marL="457200" algn="l" defTabSz="457200" rtl="0" eaLnBrk="1" latinLnBrk="0" hangingPunct="1">
+      <a:defRPr sz="1200" kern="1200">
+        <a:solidFill>
+          <a:schemeClr val="tx1"/>
+        </a:solidFill>
+        <a:latin typeface="+mn-lt"/>
+        <a:ea typeface="+mn-ea"/>
+        <a:cs typeface="+mn-cs"/>
+      </a:defRPr>
+    </a:lvl2pPr>
+    <a:lvl3pPr marL="914400" algn="l" defTabSz="457200" rtl="0" eaLnBrk="1" latinLnBrk="0" hangingPunct="1">
+      <a:defRPr sz="1200" kern="1200">
+        <a:solidFill>
+          <a:schemeClr val="tx1"/>
+        </a:solidFill>
+        <a:latin typeface="+mn-lt"/>
+        <a:ea typeface="+mn-ea"/>
+        <a:cs typeface="+mn-cs"/>
+      </a:defRPr>
+    </a:lvl3pPr>
+    <a:lvl4pPr marL="1371600" algn="l" defTabSz="457200" rtl="0" eaLnBrk="1" latinLnBrk="0" hangingPunct="1">
+      <a:defRPr sz="1200" kern="1200">
+        <a:solidFill>
+          <a:schemeClr val="tx1"/>
+        </a:solidFill>
+        <a:latin typeface="+mn-lt"/>
+        <a:ea typeface="+mn-ea"/>
+        <a:cs typeface="+mn-cs"/>
+      </a:defRPr>
+    </a:lvl4pPr>
+    <a:lvl5pPr marL="1828800" algn="l" defTabSz="457200" rtl="0" eaLnBrk="1" latinLnBrk="0" hangingPunct="1">
+      <a:defRPr sz="1200" kern="1200">
+        <a:solidFill>
+          <a:schemeClr val="tx1"/>
+        </a:solidFill>
+        <a:latin typeface="+mn-lt"/>
+        <a:ea typeface="+mn-ea"/>
+        <a:cs typeface="+mn-cs"/>
+      </a:defRPr>
+    </a:lvl5pPr>
+    <a:lvl6pPr marL="2286000" algn="l" defTabSz="457200" rtl="0" eaLnBrk="1" latinLnBrk="0" hangingPunct="1">
+      <a:defRPr sz="1200" kern="1200">
+        <a:solidFill>
+          <a:schemeClr val="tx1"/>
+        </a:solidFill>
+        <a:latin typeface="+mn-lt"/>
+        <a:ea typeface="+mn-ea"/>
+        <a:cs typeface="+mn-cs"/>
+      </a:defRPr>
+    </a:lvl6pPr>
+    <a:lvl7pPr marL="2743200" algn="l" defTabSz="457200" rtl="0" eaLnBrk="1" latinLnBrk="0" hangingPunct="1">
+      <a:defRPr sz="1200" kern="1200">
+        <a:solidFill>
+          <a:schemeClr val="tx1"/>
+        </a:solidFill>
+        <a:latin typeface="+mn-lt"/>
+        <a:ea typeface="+mn-ea"/>
+        <a:cs typeface="+mn-cs"/>
+      </a:defRPr>
+    </a:lvl7pPr>
+    <a:lvl8pPr marL="3200400" algn="l" defTabSz="457200" rtl="0" eaLnBrk="1" latinLnBrk="0" hangingPunct="1">
+      <a:defRPr sz="1200" kern="1200">
+        <a:solidFill>
+          <a:schemeClr val="tx1"/>
+        </a:solidFill>
+        <a:latin typeface="+mn-lt"/>
+        <a:ea typeface="+mn-ea"/>
+        <a:cs typeface="+mn-cs"/>
+      </a:defRPr>
+    </a:lvl8pPr>
+    <a:lvl9pPr marL="3657600" algn="l" defTabSz="457200" rtl="0" eaLnBrk="1" latinLnBrk="0" hangingPunct="1">
+      <a:defRPr sz="1200" kern="1200">
+        <a:solidFill>
+          <a:schemeClr val="tx1"/>
+        </a:solidFill>
+        <a:latin typeface="+mn-lt"/>
+        <a:ea typeface="+mn-ea"/>
+        <a:cs typeface="+mn-cs"/>
+      </a:defRPr>
+    </a:lvl9pPr>
+  </p:notesStyle>
+</p:notesMaster>
+</file>
+
+<file path=ppt/notesSlides/notesSlide1.xml><?xml version="1.0" encoding="utf-8"?>
+<p:notes xmlns:a="http://schemas.openxmlformats.org/drawingml/2006/main" xmlns:p="http://schemas.openxmlformats.org/presentationml/2006/main" xmlns:r="http://schemas.openxmlformats.org/officeDocument/2006/relationships">
+  <p:cSld>
+    <p:spTree>
+      <p:nvGrpSpPr>
+        <p:cNvPr id="1" name=""/>
+        <p:cNvGrpSpPr/>
+        <p:nvPr/>
+      </p:nvGrpSpPr>
+      <p:grpSpPr>
+        <a:xfrm>
+          <a:off x="0" y="0"/>
+          <a:ext cx="0" cy="0"/>
+          <a:chOff x="0" y="0"/>
+          <a:chExt cx="0" cy="0"/>
+        </a:xfrm>
+      </p:grpSpPr>
+      <p:sp>
+        <p:nvSpPr>
+          <p:cNvPr id="2" name="Slide Image Placeholder 1"/>
+          <p:cNvSpPr>
+            <a:spLocks noGrp="1"/>
+          </p:cNvSpPr>
+          <p:nvPr>
+            <p:ph type="sldImg" idx="2"/>
+          </p:nvPr>
+        </p:nvSpPr>
+        <p:spPr/>
+      </p:sp>
+      <p:sp>
+        <p:nvSpPr>
+          <p:cNvPr id="3" name="Notes Placeholder 2"/>
+          <p:cNvSpPr>
+            <a:spLocks noGrp="1"/>
+          </p:cNvSpPr>
+          <p:nvPr>
+            <p:ph type="body" idx="3" sz="quarter"/>
+          </p:nvPr>
+        </p:nvSpPr>
+        <p:spPr/>
+        <p:txBody>
+          <a:bodyPr/>
+          <a:lstStyle/>
+          <a:p>
+            <a:r>
+              <a:t>State your name clearly. Read the topic number and title exactly as on the exam paper. Pause to let examiners see it. Point to the logo. This is your first impression. (30 seconds)</a:t>
+            </a:r>
+          </a:p>
+        </p:txBody>
+      </p:sp>
+      <p:sp>
+        <p:nvSpPr>
+          <p:cNvPr id="4" name="Slide Number Placeholder 3"/>
+          <p:cNvSpPr>
+            <a:spLocks noGrp="1"/>
+          </p:cNvSpPr>
+          <p:nvPr>
+            <p:ph type="sldNum" idx="5" sz="quarter"/>
+          </p:nvPr>
+        </p:nvSpPr>
+        <p:spPr/>
+      </p:sp>
+    </p:spTree>
+  </p:cSld>
+  <p:clrMapOvr>
+    <a:masterClrMapping/>
+  </p:clrMapOvr>
+</p:notes>
+</file>
+
+<file path=ppt/notesSlides/notesSlide10.xml><?xml version="1.0" encoding="utf-8"?>
+<p:notes xmlns:a="http://schemas.openxmlformats.org/drawingml/2006/main" xmlns:p="http://schemas.openxmlformats.org/presentationml/2006/main" xmlns:r="http://schemas.openxmlformats.org/officeDocument/2006/relationships">
+  <p:cSld>
+    <p:spTree>
+      <p:nvGrpSpPr>
+        <p:cNvPr id="1" name=""/>
+        <p:cNvGrpSpPr/>
+        <p:nvPr/>
+      </p:nvGrpSpPr>
+      <p:grpSpPr>
+        <a:xfrm>
+          <a:off x="0" y="0"/>
+          <a:ext cx="0" cy="0"/>
+          <a:chOff x="0" y="0"/>
+          <a:chExt cx="0" cy="0"/>
+        </a:xfrm>
+      </p:grpSpPr>
+      <p:sp>
+        <p:nvSpPr>
+          <p:cNvPr id="2" name="Slide Image Placeholder 1"/>
+          <p:cNvSpPr>
+            <a:spLocks noGrp="1"/>
+          </p:cNvSpPr>
+          <p:nvPr>
+            <p:ph type="sldImg" idx="2"/>
+          </p:nvPr>
+        </p:nvSpPr>
+        <p:spPr/>
+      </p:sp>
+      <p:sp>
+        <p:nvSpPr>
+          <p:cNvPr id="3" name="Notes Placeholder 2"/>
+          <p:cNvSpPr>
+            <a:spLocks noGrp="1"/>
+          </p:cNvSpPr>
+          <p:nvPr>
+            <p:ph type="body" idx="3" sz="quarter"/>
+          </p:nvPr>
+        </p:nvSpPr>
+        <p:spPr/>
+        <p:txBody>
+          <a:bodyPr/>
+          <a:lstStyle/>
+          <a:p>
+            <a:r>
+              <a:t>241 nodes across 5 tiers. Walk through each tier. Earth Ground is the DSN - three stations around the globe for 24/7 coverage. Earth Orbital has LEO laser mesh for optical backhaul. Deep Space has Lagrange point relays - these are the critical innovation for conjunction coverage. Mars Orbital has areostationary relays at 17,032 km. Mars Surface is the most populated tier. (2 minutes)</a:t>
+            </a:r>
+          </a:p>
+        </p:txBody>
+      </p:sp>
+      <p:sp>
+        <p:nvSpPr>
+          <p:cNvPr id="4" name="Slide Number Placeholder 3"/>
+          <p:cNvSpPr>
+            <a:spLocks noGrp="1"/>
+          </p:cNvSpPr>
+          <p:nvPr>
+            <p:ph type="sldNum" idx="5" sz="quarter"/>
+          </p:nvPr>
+        </p:nvSpPr>
+        <p:spPr/>
+      </p:sp>
+    </p:spTree>
+  </p:cSld>
+  <p:clrMapOvr>
+    <a:masterClrMapping/>
+  </p:clrMapOvr>
+</p:notes>
+</file>
+
+<file path=ppt/notesSlides/notesSlide11.xml><?xml version="1.0" encoding="utf-8"?>
+<p:notes xmlns:a="http://schemas.openxmlformats.org/drawingml/2006/main" xmlns:p="http://schemas.openxmlformats.org/presentationml/2006/main" xmlns:r="http://schemas.openxmlformats.org/officeDocument/2006/relationships">
+  <p:cSld>
+    <p:spTree>
+      <p:nvGrpSpPr>
+        <p:cNvPr id="1" name=""/>
+        <p:cNvGrpSpPr/>
+        <p:nvPr/>
+      </p:nvGrpSpPr>
+      <p:grpSpPr>
+        <a:xfrm>
+          <a:off x="0" y="0"/>
+          <a:ext cx="0" cy="0"/>
+          <a:chOff x="0" y="0"/>
+          <a:chExt cx="0" cy="0"/>
+        </a:xfrm>
+      </p:grpSpPr>
+      <p:sp>
+        <p:nvSpPr>
+          <p:cNvPr id="2" name="Slide Image Placeholder 1"/>
+          <p:cNvSpPr>
+            <a:spLocks noGrp="1"/>
+          </p:cNvSpPr>
+          <p:nvPr>
+            <p:ph type="sldImg" idx="2"/>
+          </p:nvPr>
+        </p:nvSpPr>
+        <p:spPr/>
+      </p:sp>
+      <p:sp>
+        <p:nvSpPr>
+          <p:cNvPr id="3" name="Notes Placeholder 2"/>
+          <p:cNvSpPr>
+            <a:spLocks noGrp="1"/>
+          </p:cNvSpPr>
+          <p:nvPr>
+            <p:ph type="body" idx="3" sz="quarter"/>
+          </p:nvPr>
+        </p:nvSpPr>
+        <p:spPr/>
+        <p:txBody>
+          <a:bodyPr/>
+          <a:lstStyle/>
+          <a:p>
+            <a:r>
+              <a:t>Visual overview of the 5-tier topology with 3 redundant paths.</a:t>
+            </a:r>
+          </a:p>
+        </p:txBody>
+      </p:sp>
+      <p:sp>
+        <p:nvSpPr>
+          <p:cNvPr id="4" name="Slide Number Placeholder 3"/>
+          <p:cNvSpPr>
+            <a:spLocks noGrp="1"/>
+          </p:cNvSpPr>
+          <p:nvPr>
+            <p:ph type="sldNum" idx="5" sz="quarter"/>
+          </p:nvPr>
+        </p:nvSpPr>
+        <p:spPr/>
+      </p:sp>
+    </p:spTree>
+  </p:cSld>
+  <p:clrMapOvr>
+    <a:masterClrMapping/>
+  </p:clrMapOvr>
+</p:notes>
+</file>
+
+<file path=ppt/notesSlides/notesSlide12.xml><?xml version="1.0" encoding="utf-8"?>
+<p:notes xmlns:a="http://schemas.openxmlformats.org/drawingml/2006/main" xmlns:p="http://schemas.openxmlformats.org/presentationml/2006/main" xmlns:r="http://schemas.openxmlformats.org/officeDocument/2006/relationships">
+  <p:cSld>
+    <p:spTree>
+      <p:nvGrpSpPr>
+        <p:cNvPr id="1" name=""/>
+        <p:cNvGrpSpPr/>
+        <p:nvPr/>
+      </p:nvGrpSpPr>
+      <p:grpSpPr>
+        <a:xfrm>
+          <a:off x="0" y="0"/>
+          <a:ext cx="0" cy="0"/>
+          <a:chOff x="0" y="0"/>
+          <a:chExt cx="0" cy="0"/>
+        </a:xfrm>
+      </p:grpSpPr>
+      <p:sp>
+        <p:nvSpPr>
+          <p:cNvPr id="2" name="Slide Image Placeholder 1"/>
+          <p:cNvSpPr>
+            <a:spLocks noGrp="1"/>
+          </p:cNvSpPr>
+          <p:nvPr>
+            <p:ph type="sldImg" idx="2"/>
+          </p:nvPr>
+        </p:nvSpPr>
+        <p:spPr/>
+      </p:sp>
+      <p:sp>
+        <p:nvSpPr>
+          <p:cNvPr id="3" name="Notes Placeholder 2"/>
+          <p:cNvSpPr>
+            <a:spLocks noGrp="1"/>
+          </p:cNvSpPr>
+          <p:nvPr>
+            <p:ph type="body" idx="3" sz="quarter"/>
+          </p:nvPr>
+        </p:nvSpPr>
+        <p:spPr/>
+        <p:txBody>
+          <a:bodyPr/>
+          <a:lstStyle/>
+          <a:p>
+            <a:r>
+              <a:t>Network topology visualization.</a:t>
+            </a:r>
+          </a:p>
+        </p:txBody>
+      </p:sp>
+      <p:sp>
+        <p:nvSpPr>
+          <p:cNvPr id="4" name="Slide Number Placeholder 3"/>
+          <p:cNvSpPr>
+            <a:spLocks noGrp="1"/>
+          </p:cNvSpPr>
+          <p:nvPr>
+            <p:ph type="sldNum" idx="5" sz="quarter"/>
+          </p:nvPr>
+        </p:nvSpPr>
+        <p:spPr/>
+      </p:sp>
+    </p:spTree>
+  </p:cSld>
+  <p:clrMapOvr>
+    <a:masterClrMapping/>
+  </p:clrMapOvr>
+</p:notes>
+</file>
+
+<file path=ppt/notesSlides/notesSlide13.xml><?xml version="1.0" encoding="utf-8"?>
+<p:notes xmlns:a="http://schemas.openxmlformats.org/drawingml/2006/main" xmlns:p="http://schemas.openxmlformats.org/presentationml/2006/main" xmlns:r="http://schemas.openxmlformats.org/officeDocument/2006/relationships">
+  <p:cSld>
+    <p:spTree>
+      <p:nvGrpSpPr>
+        <p:cNvPr id="1" name=""/>
+        <p:cNvGrpSpPr/>
+        <p:nvPr/>
+      </p:nvGrpSpPr>
+      <p:grpSpPr>
+        <a:xfrm>
+          <a:off x="0" y="0"/>
+          <a:ext cx="0" cy="0"/>
+          <a:chOff x="0" y="0"/>
+          <a:chExt cx="0" cy="0"/>
+        </a:xfrm>
+      </p:grpSpPr>
+      <p:sp>
+        <p:nvSpPr>
+          <p:cNvPr id="2" name="Slide Image Placeholder 1"/>
+          <p:cNvSpPr>
+            <a:spLocks noGrp="1"/>
+          </p:cNvSpPr>
+          <p:nvPr>
+            <p:ph type="sldImg" idx="2"/>
+          </p:nvPr>
+        </p:nvSpPr>
+        <p:spPr/>
+      </p:sp>
+      <p:sp>
+        <p:nvSpPr>
+          <p:cNvPr id="3" name="Notes Placeholder 2"/>
+          <p:cNvSpPr>
+            <a:spLocks noGrp="1"/>
+          </p:cNvSpPr>
+          <p:nvPr>
+            <p:ph type="body" idx="3" sz="quarter"/>
+          </p:nvPr>
+        </p:nvSpPr>
+        <p:spPr/>
+        <p:txBody>
+          <a:bodyPr/>
+          <a:lstStyle/>
+          <a:p>
+            <a:r>
+              <a:t>RUN THE LIVE DEMO from the Link Budget page. Show the 3 distance scenarios. 1550nm was chosen for telecom heritage and eye safety. FSPL at average distance is -365 dB. The telescope apertures are realistic for spacecraft. RF backup for reliability. (2 minutes)</a:t>
+            </a:r>
+          </a:p>
+        </p:txBody>
+      </p:sp>
+      <p:sp>
+        <p:nvSpPr>
+          <p:cNvPr id="4" name="Slide Number Placeholder 3"/>
+          <p:cNvSpPr>
+            <a:spLocks noGrp="1"/>
+          </p:cNvSpPr>
+          <p:nvPr>
+            <p:ph type="sldNum" idx="5" sz="quarter"/>
+          </p:nvPr>
+        </p:nvSpPr>
+        <p:spPr/>
+      </p:sp>
+    </p:spTree>
+  </p:cSld>
+  <p:clrMapOvr>
+    <a:masterClrMapping/>
+  </p:clrMapOvr>
+</p:notes>
+</file>
+
+<file path=ppt/notesSlides/notesSlide14.xml><?xml version="1.0" encoding="utf-8"?>
+<p:notes xmlns:a="http://schemas.openxmlformats.org/drawingml/2006/main" xmlns:p="http://schemas.openxmlformats.org/presentationml/2006/main" xmlns:r="http://schemas.openxmlformats.org/officeDocument/2006/relationships">
+  <p:cSld>
+    <p:spTree>
+      <p:nvGrpSpPr>
+        <p:cNvPr id="1" name=""/>
+        <p:cNvGrpSpPr/>
+        <p:nvPr/>
+      </p:nvGrpSpPr>
+      <p:grpSpPr>
+        <a:xfrm>
+          <a:off x="0" y="0"/>
+          <a:ext cx="0" cy="0"/>
+          <a:chOff x="0" y="0"/>
+          <a:chExt cx="0" cy="0"/>
+        </a:xfrm>
+      </p:grpSpPr>
+      <p:sp>
+        <p:nvSpPr>
+          <p:cNvPr id="2" name="Slide Image Placeholder 1"/>
+          <p:cNvSpPr>
+            <a:spLocks noGrp="1"/>
+          </p:cNvSpPr>
+          <p:nvPr>
+            <p:ph type="sldImg" idx="2"/>
+          </p:nvPr>
+        </p:nvSpPr>
+        <p:spPr/>
+      </p:sp>
+      <p:sp>
+        <p:nvSpPr>
+          <p:cNvPr id="3" name="Notes Placeholder 2"/>
+          <p:cNvSpPr>
+            <a:spLocks noGrp="1"/>
+          </p:cNvSpPr>
+          <p:nvPr>
+            <p:ph type="body" idx="3" sz="quarter"/>
+          </p:nvPr>
+        </p:nvSpPr>
+        <p:spPr/>
+        <p:txBody>
+          <a:bodyPr/>
+          <a:lstStyle/>
+          <a:p>
+            <a:r>
+              <a:t>Interactive journey visualization.</a:t>
+            </a:r>
+          </a:p>
+        </p:txBody>
+      </p:sp>
+      <p:sp>
+        <p:nvSpPr>
+          <p:cNvPr id="4" name="Slide Number Placeholder 3"/>
+          <p:cNvSpPr>
+            <a:spLocks noGrp="1"/>
+          </p:cNvSpPr>
+          <p:nvPr>
+            <p:ph type="sldNum" idx="5" sz="quarter"/>
+          </p:nvPr>
+        </p:nvSpPr>
+        <p:spPr/>
+      </p:sp>
+    </p:spTree>
+  </p:cSld>
+  <p:clrMapOvr>
+    <a:masterClrMapping/>
+  </p:clrMapOvr>
+</p:notes>
+</file>
+
+<file path=ppt/notesSlides/notesSlide15.xml><?xml version="1.0" encoding="utf-8"?>
+<p:notes xmlns:a="http://schemas.openxmlformats.org/drawingml/2006/main" xmlns:p="http://schemas.openxmlformats.org/presentationml/2006/main" xmlns:r="http://schemas.openxmlformats.org/officeDocument/2006/relationships">
+  <p:cSld>
+    <p:spTree>
+      <p:nvGrpSpPr>
+        <p:cNvPr id="1" name=""/>
+        <p:cNvGrpSpPr/>
+        <p:nvPr/>
+      </p:nvGrpSpPr>
+      <p:grpSpPr>
+        <a:xfrm>
+          <a:off x="0" y="0"/>
+          <a:ext cx="0" cy="0"/>
+          <a:chOff x="0" y="0"/>
+          <a:chExt cx="0" cy="0"/>
+        </a:xfrm>
+      </p:grpSpPr>
+      <p:sp>
+        <p:nvSpPr>
+          <p:cNvPr id="2" name="Slide Image Placeholder 1"/>
+          <p:cNvSpPr>
+            <a:spLocks noGrp="1"/>
+          </p:cNvSpPr>
+          <p:nvPr>
+            <p:ph type="sldImg" idx="2"/>
+          </p:nvPr>
+        </p:nvSpPr>
+        <p:spPr/>
+      </p:sp>
+      <p:sp>
+        <p:nvSpPr>
+          <p:cNvPr id="3" name="Notes Placeholder 2"/>
+          <p:cNvSpPr>
+            <a:spLocks noGrp="1"/>
+          </p:cNvSpPr>
+          <p:nvPr>
+            <p:ph type="body" idx="3" sz="quarter"/>
+          </p:nvPr>
+        </p:nvSpPr>
+        <p:spPr/>
+        <p:txBody>
+          <a:bodyPr/>
+          <a:lstStyle/>
+          <a:p>
+            <a:r>
+              <a:t>CGR is what NASA uses today. It's static - you have to pre-compute schedules. Our RL agent learns from experience. 8 state variables, 4 actions. The reward function balances delivery probability against delay, hops, drops, and energy. Multi-agent federated learning means agents at each node share knowledge. (2 minutes)</a:t>
+            </a:r>
+          </a:p>
+        </p:txBody>
+      </p:sp>
+      <p:sp>
+        <p:nvSpPr>
+          <p:cNvPr id="4" name="Slide Number Placeholder 3"/>
+          <p:cNvSpPr>
+            <a:spLocks noGrp="1"/>
+          </p:cNvSpPr>
+          <p:nvPr>
+            <p:ph type="sldNum" idx="5" sz="quarter"/>
+          </p:nvPr>
+        </p:nvSpPr>
+        <p:spPr/>
+      </p:sp>
+    </p:spTree>
+  </p:cSld>
+  <p:clrMapOvr>
+    <a:masterClrMapping/>
+  </p:clrMapOvr>
+</p:notes>
+</file>
+
+<file path=ppt/notesSlides/notesSlide16.xml><?xml version="1.0" encoding="utf-8"?>
+<p:notes xmlns:a="http://schemas.openxmlformats.org/drawingml/2006/main" xmlns:p="http://schemas.openxmlformats.org/presentationml/2006/main" xmlns:r="http://schemas.openxmlformats.org/officeDocument/2006/relationships">
+  <p:cSld>
+    <p:spTree>
+      <p:nvGrpSpPr>
+        <p:cNvPr id="1" name=""/>
+        <p:cNvGrpSpPr/>
+        <p:nvPr/>
+      </p:nvGrpSpPr>
+      <p:grpSpPr>
+        <a:xfrm>
+          <a:off x="0" y="0"/>
+          <a:ext cx="0" cy="0"/>
+          <a:chOff x="0" y="0"/>
+          <a:chExt cx="0" cy="0"/>
+        </a:xfrm>
+      </p:grpSpPr>
+      <p:sp>
+        <p:nvSpPr>
+          <p:cNvPr id="2" name="Slide Image Placeholder 1"/>
+          <p:cNvSpPr>
+            <a:spLocks noGrp="1"/>
+          </p:cNvSpPr>
+          <p:nvPr>
+            <p:ph type="sldImg" idx="2"/>
+          </p:nvPr>
+        </p:nvSpPr>
+        <p:spPr/>
+      </p:sp>
+      <p:sp>
+        <p:nvSpPr>
+          <p:cNvPr id="3" name="Notes Placeholder 2"/>
+          <p:cNvSpPr>
+            <a:spLocks noGrp="1"/>
+          </p:cNvSpPr>
+          <p:nvPr>
+            <p:ph type="body" idx="3" sz="quarter"/>
+          </p:nvPr>
+        </p:nvSpPr>
+        <p:spPr/>
+        <p:txBody>
+          <a:bodyPr/>
+          <a:lstStyle/>
+          <a:p>
+            <a:r>
+              <a:t>BB84 is beautifully simple: send qubits, measure, compare bases, check QBER. If QBER is below 11%, no one listened in. CASCADE reconciliation and privacy amplification clean the key. E91 uses entanglement. Quantum repeaters at Lagrange points extend range. Post-quantum crypto as backup layer. (2 minutes)</a:t>
+            </a:r>
+          </a:p>
+        </p:txBody>
+      </p:sp>
+      <p:sp>
+        <p:nvSpPr>
+          <p:cNvPr id="4" name="Slide Number Placeholder 3"/>
+          <p:cNvSpPr>
+            <a:spLocks noGrp="1"/>
+          </p:cNvSpPr>
+          <p:nvPr>
+            <p:ph type="sldNum" idx="5" sz="quarter"/>
+          </p:nvPr>
+        </p:nvSpPr>
+        <p:spPr/>
+      </p:sp>
+    </p:spTree>
+  </p:cSld>
+  <p:clrMapOvr>
+    <a:masterClrMapping/>
+  </p:clrMapOvr>
+</p:notes>
+</file>
+
+<file path=ppt/notesSlides/notesSlide17.xml><?xml version="1.0" encoding="utf-8"?>
+<p:notes xmlns:a="http://schemas.openxmlformats.org/drawingml/2006/main" xmlns:p="http://schemas.openxmlformats.org/presentationml/2006/main" xmlns:r="http://schemas.openxmlformats.org/officeDocument/2006/relationships">
+  <p:cSld>
+    <p:spTree>
+      <p:nvGrpSpPr>
+        <p:cNvPr id="1" name=""/>
+        <p:cNvGrpSpPr/>
+        <p:nvPr/>
+      </p:nvGrpSpPr>
+      <p:grpSpPr>
+        <a:xfrm>
+          <a:off x="0" y="0"/>
+          <a:ext cx="0" cy="0"/>
+          <a:chOff x="0" y="0"/>
+          <a:chExt cx="0" cy="0"/>
+        </a:xfrm>
+      </p:grpSpPr>
+      <p:sp>
+        <p:nvSpPr>
+          <p:cNvPr id="2" name="Slide Image Placeholder 1"/>
+          <p:cNvSpPr>
+            <a:spLocks noGrp="1"/>
+          </p:cNvSpPr>
+          <p:nvPr>
+            <p:ph type="sldImg" idx="2"/>
+          </p:nvPr>
+        </p:nvSpPr>
+        <p:spPr/>
+      </p:sp>
+      <p:sp>
+        <p:nvSpPr>
+          <p:cNvPr id="3" name="Notes Placeholder 2"/>
+          <p:cNvSpPr>
+            <a:spLocks noGrp="1"/>
+          </p:cNvSpPr>
+          <p:nvPr>
+            <p:ph type="body" idx="3" sz="quarter"/>
+          </p:nvPr>
+        </p:nvSpPr>
+        <p:spPr/>
+        <p:txBody>
+          <a:bodyPr/>
+          <a:lstStyle/>
+          <a:p>
+            <a:r>
+              <a:t>Mars and Earth dance around the Sun with a 26-month synodic period. Everything changes - distance, delay, bandwidth. At opposition we get great bandwidth. At conjunction, the Sun blocks everything. Our Lagrange relays at ES-L4 and ES-L5 maintain 50-70% capacity during conjunction. Doppler shift of 15 GHz at optical wavelengths requires real-time compensation. (1.5 minutes)</a:t>
+            </a:r>
+          </a:p>
+        </p:txBody>
+      </p:sp>
+      <p:sp>
+        <p:nvSpPr>
+          <p:cNvPr id="4" name="Slide Number Placeholder 3"/>
+          <p:cNvSpPr>
+            <a:spLocks noGrp="1"/>
+          </p:cNvSpPr>
+          <p:nvPr>
+            <p:ph type="sldNum" idx="5" sz="quarter"/>
+          </p:nvPr>
+        </p:nvSpPr>
+        <p:spPr/>
+      </p:sp>
+    </p:spTree>
+  </p:cSld>
+  <p:clrMapOvr>
+    <a:masterClrMapping/>
+  </p:clrMapOvr>
+</p:notes>
+</file>
+
+<file path=ppt/notesSlides/notesSlide18.xml><?xml version="1.0" encoding="utf-8"?>
+<p:notes xmlns:a="http://schemas.openxmlformats.org/drawingml/2006/main" xmlns:p="http://schemas.openxmlformats.org/presentationml/2006/main" xmlns:r="http://schemas.openxmlformats.org/officeDocument/2006/relationships">
+  <p:cSld>
+    <p:spTree>
+      <p:nvGrpSpPr>
+        <p:cNvPr id="1" name=""/>
+        <p:cNvGrpSpPr/>
+        <p:nvPr/>
+      </p:nvGrpSpPr>
+      <p:grpSpPr>
+        <a:xfrm>
+          <a:off x="0" y="0"/>
+          <a:ext cx="0" cy="0"/>
+          <a:chOff x="0" y="0"/>
+          <a:chExt cx="0" cy="0"/>
+        </a:xfrm>
+      </p:grpSpPr>
+      <p:sp>
+        <p:nvSpPr>
+          <p:cNvPr id="2" name="Slide Image Placeholder 1"/>
+          <p:cNvSpPr>
+            <a:spLocks noGrp="1"/>
+          </p:cNvSpPr>
+          <p:nvPr>
+            <p:ph type="sldImg" idx="2"/>
+          </p:nvPr>
+        </p:nvSpPr>
+        <p:spPr/>
+      </p:sp>
+      <p:sp>
+        <p:nvSpPr>
+          <p:cNvPr id="3" name="Notes Placeholder 2"/>
+          <p:cNvSpPr>
+            <a:spLocks noGrp="1"/>
+          </p:cNvSpPr>
+          <p:nvPr>
+            <p:ph type="body" idx="3" sz="quarter"/>
+          </p:nvPr>
+        </p:nvSpPr>
+        <p:spPr/>
+        <p:txBody>
+          <a:bodyPr/>
+          <a:lstStyle/>
+          <a:p>
+            <a:r>
+              <a:t>Space radiation is relentless. SEUs flip bits constantly - about 37,000 during a Mars transit. Our defense-in-depth: TMR masks logic faults (3,334x reliability gain), SECDED ECC corrects single-bit errors, scrubbing prevents double-bit accumulation, and FDIR with a watchdog catches everything else. The RAD750 can tolerate 200 krad - far above what a Mars mission needs. (1.5 minutes)</a:t>
+            </a:r>
+          </a:p>
+        </p:txBody>
+      </p:sp>
+      <p:sp>
+        <p:nvSpPr>
+          <p:cNvPr id="4" name="Slide Number Placeholder 3"/>
+          <p:cNvSpPr>
+            <a:spLocks noGrp="1"/>
+          </p:cNvSpPr>
+          <p:nvPr>
+            <p:ph type="sldNum" idx="5" sz="quarter"/>
+          </p:nvPr>
+        </p:nvSpPr>
+        <p:spPr/>
+      </p:sp>
+    </p:spTree>
+  </p:cSld>
+  <p:clrMapOvr>
+    <a:masterClrMapping/>
+  </p:clrMapOvr>
+</p:notes>
+</file>
+
+<file path=ppt/notesSlides/notesSlide19.xml><?xml version="1.0" encoding="utf-8"?>
+<p:notes xmlns:a="http://schemas.openxmlformats.org/drawingml/2006/main" xmlns:p="http://schemas.openxmlformats.org/presentationml/2006/main" xmlns:r="http://schemas.openxmlformats.org/officeDocument/2006/relationships">
+  <p:cSld>
+    <p:spTree>
+      <p:nvGrpSpPr>
+        <p:cNvPr id="1" name=""/>
+        <p:cNvGrpSpPr/>
+        <p:nvPr/>
+      </p:nvGrpSpPr>
+      <p:grpSpPr>
+        <a:xfrm>
+          <a:off x="0" y="0"/>
+          <a:ext cx="0" cy="0"/>
+          <a:chOff x="0" y="0"/>
+          <a:chExt cx="0" cy="0"/>
+        </a:xfrm>
+      </p:grpSpPr>
+      <p:sp>
+        <p:nvSpPr>
+          <p:cNvPr id="2" name="Slide Image Placeholder 1"/>
+          <p:cNvSpPr>
+            <a:spLocks noGrp="1"/>
+          </p:cNvSpPr>
+          <p:nvPr>
+            <p:ph type="sldImg" idx="2"/>
+          </p:nvPr>
+        </p:nvSpPr>
+        <p:spPr/>
+      </p:sp>
+      <p:sp>
+        <p:nvSpPr>
+          <p:cNvPr id="3" name="Notes Placeholder 2"/>
+          <p:cNvSpPr>
+            <a:spLocks noGrp="1"/>
+          </p:cNvSpPr>
+          <p:nvPr>
+            <p:ph type="body" idx="3" sz="quarter"/>
+          </p:nvPr>
+        </p:nvSpPr>
+        <p:spPr/>
+        <p:txBody>
+          <a:bodyPr/>
+          <a:lstStyle/>
+          <a:p>
+            <a:r>
+              <a:t>Like an emergency room. P0 emergency gets sent immediately - it can even preempt an in-progress transfer. P1 mission-critical next. P2 routine science. P4 bulk data fills remaining bandwidth. Compression multiplies effective capacity: 3x for telemetry, 10x for images, 50x for video. Our scheduler keeps the link at 100% utilization by fragmenting large bundles. (1.5 minutes)</a:t>
+            </a:r>
+          </a:p>
+        </p:txBody>
+      </p:sp>
+      <p:sp>
+        <p:nvSpPr>
+          <p:cNvPr id="4" name="Slide Number Placeholder 3"/>
+          <p:cNvSpPr>
+            <a:spLocks noGrp="1"/>
+          </p:cNvSpPr>
+          <p:nvPr>
+            <p:ph type="sldNum" idx="5" sz="quarter"/>
+          </p:nvPr>
+        </p:nvSpPr>
+        <p:spPr/>
+      </p:sp>
+    </p:spTree>
+  </p:cSld>
+  <p:clrMapOvr>
+    <a:masterClrMapping/>
+  </p:clrMapOvr>
+</p:notes>
+</file>
+
+<file path=ppt/notesSlides/notesSlide2.xml><?xml version="1.0" encoding="utf-8"?>
+<p:notes xmlns:a="http://schemas.openxmlformats.org/drawingml/2006/main" xmlns:p="http://schemas.openxmlformats.org/presentationml/2006/main" xmlns:r="http://schemas.openxmlformats.org/officeDocument/2006/relationships">
+  <p:cSld>
+    <p:spTree>
+      <p:nvGrpSpPr>
+        <p:cNvPr id="1" name=""/>
+        <p:cNvGrpSpPr/>
+        <p:nvPr/>
+      </p:nvGrpSpPr>
+      <p:grpSpPr>
+        <a:xfrm>
+          <a:off x="0" y="0"/>
+          <a:ext cx="0" cy="0"/>
+          <a:chOff x="0" y="0"/>
+          <a:chExt cx="0" cy="0"/>
+        </a:xfrm>
+      </p:grpSpPr>
+      <p:sp>
+        <p:nvSpPr>
+          <p:cNvPr id="2" name="Slide Image Placeholder 1"/>
+          <p:cNvSpPr>
+            <a:spLocks noGrp="1"/>
+          </p:cNvSpPr>
+          <p:nvPr>
+            <p:ph type="sldImg" idx="2"/>
+          </p:nvPr>
+        </p:nvSpPr>
+        <p:spPr/>
+      </p:sp>
+      <p:sp>
+        <p:nvSpPr>
+          <p:cNvPr id="3" name="Notes Placeholder 2"/>
+          <p:cNvSpPr>
+            <a:spLocks noGrp="1"/>
+          </p:cNvSpPr>
+          <p:nvPr>
+            <p:ph type="body" idx="3" sz="quarter"/>
+          </p:nvPr>
+        </p:nvSpPr>
+        <p:spPr/>
+        <p:txBody>
+          <a:bodyPr/>
+          <a:lstStyle/>
+          <a:p>
+            <a:r>
+              <a:t>Quick overview of what we will cover. 13 topics across 29 slides. About 20 minutes. (20 seconds)</a:t>
+            </a:r>
+          </a:p>
+        </p:txBody>
+      </p:sp>
+      <p:sp>
+        <p:nvSpPr>
+          <p:cNvPr id="4" name="Slide Number Placeholder 3"/>
+          <p:cNvSpPr>
+            <a:spLocks noGrp="1"/>
+          </p:cNvSpPr>
+          <p:nvPr>
+            <p:ph type="sldNum" idx="5" sz="quarter"/>
+          </p:nvPr>
+        </p:nvSpPr>
+        <p:spPr/>
+      </p:sp>
+    </p:spTree>
+  </p:cSld>
+  <p:clrMapOvr>
+    <a:masterClrMapping/>
+  </p:clrMapOvr>
+</p:notes>
+</file>
+
+<file path=ppt/notesSlides/notesSlide20.xml><?xml version="1.0" encoding="utf-8"?>
+<p:notes xmlns:a="http://schemas.openxmlformats.org/drawingml/2006/main" xmlns:p="http://schemas.openxmlformats.org/presentationml/2006/main" xmlns:r="http://schemas.openxmlformats.org/officeDocument/2006/relationships">
+  <p:cSld>
+    <p:spTree>
+      <p:nvGrpSpPr>
+        <p:cNvPr id="1" name=""/>
+        <p:cNvGrpSpPr/>
+        <p:nvPr/>
+      </p:nvGrpSpPr>
+      <p:grpSpPr>
+        <a:xfrm>
+          <a:off x="0" y="0"/>
+          <a:ext cx="0" cy="0"/>
+          <a:chOff x="0" y="0"/>
+          <a:chExt cx="0" cy="0"/>
+        </a:xfrm>
+      </p:grpSpPr>
+      <p:sp>
+        <p:nvSpPr>
+          <p:cNvPr id="2" name="Slide Image Placeholder 1"/>
+          <p:cNvSpPr>
+            <a:spLocks noGrp="1"/>
+          </p:cNvSpPr>
+          <p:nvPr>
+            <p:ph type="sldImg" idx="2"/>
+          </p:nvPr>
+        </p:nvSpPr>
+        <p:spPr/>
+      </p:sp>
+      <p:sp>
+        <p:nvSpPr>
+          <p:cNvPr id="3" name="Notes Placeholder 2"/>
+          <p:cNvSpPr>
+            <a:spLocks noGrp="1"/>
+          </p:cNvSpPr>
+          <p:nvPr>
+            <p:ph type="body" idx="3" sz="quarter"/>
+          </p:nvPr>
+        </p:nvSpPr>
+        <p:spPr/>
+        <p:txBody>
+          <a:bodyPr/>
+          <a:lstStyle/>
+          <a:p>
+            <a:r>
+              <a:t>Walk through the 7-hop journey. 500MB from Perseverance to JPL. Total transit ~13 min vs 12.5 min light-time - near speed of light! DTN overhead under 5%. Key point: if link drops at hop 5, the bundle stays stored at hop 4 and retries. No data loss. RUN LIVE DEMO if time permits. (2 minutes)</a:t>
+            </a:r>
+          </a:p>
+        </p:txBody>
+      </p:sp>
+      <p:sp>
+        <p:nvSpPr>
+          <p:cNvPr id="4" name="Slide Number Placeholder 3"/>
+          <p:cNvSpPr>
+            <a:spLocks noGrp="1"/>
+          </p:cNvSpPr>
+          <p:nvPr>
+            <p:ph type="sldNum" idx="5" sz="quarter"/>
+          </p:nvPr>
+        </p:nvSpPr>
+        <p:spPr/>
+      </p:sp>
+    </p:spTree>
+  </p:cSld>
+  <p:clrMapOvr>
+    <a:masterClrMapping/>
+  </p:clrMapOvr>
+</p:notes>
+</file>
+
+<file path=ppt/notesSlides/notesSlide21.xml><?xml version="1.0" encoding="utf-8"?>
+<p:notes xmlns:a="http://schemas.openxmlformats.org/drawingml/2006/main" xmlns:p="http://schemas.openxmlformats.org/presentationml/2006/main" xmlns:r="http://schemas.openxmlformats.org/officeDocument/2006/relationships">
+  <p:cSld>
+    <p:spTree>
+      <p:nvGrpSpPr>
+        <p:cNvPr id="1" name=""/>
+        <p:cNvGrpSpPr/>
+        <p:nvPr/>
+      </p:nvGrpSpPr>
+      <p:grpSpPr>
+        <a:xfrm>
+          <a:off x="0" y="0"/>
+          <a:ext cx="0" cy="0"/>
+          <a:chOff x="0" y="0"/>
+          <a:chExt cx="0" cy="0"/>
+        </a:xfrm>
+      </p:grpSpPr>
+      <p:sp>
+        <p:nvSpPr>
+          <p:cNvPr id="2" name="Slide Image Placeholder 1"/>
+          <p:cNvSpPr>
+            <a:spLocks noGrp="1"/>
+          </p:cNvSpPr>
+          <p:nvPr>
+            <p:ph type="sldImg" idx="2"/>
+          </p:nvPr>
+        </p:nvSpPr>
+        <p:spPr/>
+      </p:sp>
+      <p:sp>
+        <p:nvSpPr>
+          <p:cNvPr id="3" name="Notes Placeholder 2"/>
+          <p:cNvSpPr>
+            <a:spLocks noGrp="1"/>
+          </p:cNvSpPr>
+          <p:nvPr>
+            <p:ph type="body" idx="3" sz="quarter"/>
+          </p:nvPr>
+        </p:nvSpPr>
+        <p:spPr/>
+        <p:txBody>
+          <a:bodyPr/>
+          <a:lstStyle/>
+          <a:p>
+            <a:r>
+              <a:t>End-to-end bundle journey through all protocol layers.</a:t>
+            </a:r>
+          </a:p>
+        </p:txBody>
+      </p:sp>
+      <p:sp>
+        <p:nvSpPr>
+          <p:cNvPr id="4" name="Slide Number Placeholder 3"/>
+          <p:cNvSpPr>
+            <a:spLocks noGrp="1"/>
+          </p:cNvSpPr>
+          <p:nvPr>
+            <p:ph type="sldNum" idx="5" sz="quarter"/>
+          </p:nvPr>
+        </p:nvSpPr>
+        <p:spPr/>
+      </p:sp>
+    </p:spTree>
+  </p:cSld>
+  <p:clrMapOvr>
+    <a:masterClrMapping/>
+  </p:clrMapOvr>
+</p:notes>
+</file>
+
+<file path=ppt/notesSlides/notesSlide22.xml><?xml version="1.0" encoding="utf-8"?>
+<p:notes xmlns:a="http://schemas.openxmlformats.org/drawingml/2006/main" xmlns:p="http://schemas.openxmlformats.org/presentationml/2006/main" xmlns:r="http://schemas.openxmlformats.org/officeDocument/2006/relationships">
+  <p:cSld>
+    <p:spTree>
+      <p:nvGrpSpPr>
+        <p:cNvPr id="1" name=""/>
+        <p:cNvGrpSpPr/>
+        <p:nvPr/>
+      </p:nvGrpSpPr>
+      <p:grpSpPr>
+        <a:xfrm>
+          <a:off x="0" y="0"/>
+          <a:ext cx="0" cy="0"/>
+          <a:chOff x="0" y="0"/>
+          <a:chExt cx="0" cy="0"/>
+        </a:xfrm>
+      </p:grpSpPr>
+      <p:sp>
+        <p:nvSpPr>
+          <p:cNvPr id="2" name="Slide Image Placeholder 1"/>
+          <p:cNvSpPr>
+            <a:spLocks noGrp="1"/>
+          </p:cNvSpPr>
+          <p:nvPr>
+            <p:ph type="sldImg" idx="2"/>
+          </p:nvPr>
+        </p:nvSpPr>
+        <p:spPr/>
+      </p:sp>
+      <p:sp>
+        <p:nvSpPr>
+          <p:cNvPr id="3" name="Notes Placeholder 2"/>
+          <p:cNvSpPr>
+            <a:spLocks noGrp="1"/>
+          </p:cNvSpPr>
+          <p:nvPr>
+            <p:ph type="body" idx="3" sz="quarter"/>
+          </p:nvPr>
+        </p:nvSpPr>
+        <p:spPr/>
+        <p:txBody>
+          <a:bodyPr/>
+          <a:lstStyle/>
+          <a:p>
+            <a:r>
+              <a:t>Visual data flow through the protocol stack.</a:t>
+            </a:r>
+          </a:p>
+        </p:txBody>
+      </p:sp>
+      <p:sp>
+        <p:nvSpPr>
+          <p:cNvPr id="4" name="Slide Number Placeholder 3"/>
+          <p:cNvSpPr>
+            <a:spLocks noGrp="1"/>
+          </p:cNvSpPr>
+          <p:nvPr>
+            <p:ph type="sldNum" idx="5" sz="quarter"/>
+          </p:nvPr>
+        </p:nvSpPr>
+        <p:spPr/>
+      </p:sp>
+    </p:spTree>
+  </p:cSld>
+  <p:clrMapOvr>
+    <a:masterClrMapping/>
+  </p:clrMapOvr>
+</p:notes>
+</file>
+
+<file path=ppt/notesSlides/notesSlide23.xml><?xml version="1.0" encoding="utf-8"?>
+<p:notes xmlns:a="http://schemas.openxmlformats.org/drawingml/2006/main" xmlns:p="http://schemas.openxmlformats.org/presentationml/2006/main" xmlns:r="http://schemas.openxmlformats.org/officeDocument/2006/relationships">
+  <p:cSld>
+    <p:spTree>
+      <p:nvGrpSpPr>
+        <p:cNvPr id="1" name=""/>
+        <p:cNvGrpSpPr/>
+        <p:nvPr/>
+      </p:nvGrpSpPr>
+      <p:grpSpPr>
+        <a:xfrm>
+          <a:off x="0" y="0"/>
+          <a:ext cx="0" cy="0"/>
+          <a:chOff x="0" y="0"/>
+          <a:chExt cx="0" cy="0"/>
+        </a:xfrm>
+      </p:grpSpPr>
+      <p:sp>
+        <p:nvSpPr>
+          <p:cNvPr id="2" name="Slide Image Placeholder 1"/>
+          <p:cNvSpPr>
+            <a:spLocks noGrp="1"/>
+          </p:cNvSpPr>
+          <p:nvPr>
+            <p:ph type="sldImg" idx="2"/>
+          </p:nvPr>
+        </p:nvSpPr>
+        <p:spPr/>
+      </p:sp>
+      <p:sp>
+        <p:nvSpPr>
+          <p:cNvPr id="3" name="Notes Placeholder 2"/>
+          <p:cNvSpPr>
+            <a:spLocks noGrp="1"/>
+          </p:cNvSpPr>
+          <p:nvPr>
+            <p:ph type="body" idx="3" sz="quarter"/>
+          </p:nvPr>
+        </p:nvSpPr>
+        <p:spPr/>
+        <p:txBody>
+          <a:bodyPr/>
+          <a:lstStyle/>
+          <a:p>
+            <a:r>
+              <a:t>Hit these numbers with confidence. 10-100x faster. &gt;95% availability vs 60-75%. Quantum-secure. 241 nodes vs 5-10 assets. The conjunction improvement is thanks to Lagrange relays. All metrics are backed by our simulation engine. (1 minute)</a:t>
+            </a:r>
+          </a:p>
+        </p:txBody>
+      </p:sp>
+      <p:sp>
+        <p:nvSpPr>
+          <p:cNvPr id="4" name="Slide Number Placeholder 3"/>
+          <p:cNvSpPr>
+            <a:spLocks noGrp="1"/>
+          </p:cNvSpPr>
+          <p:nvPr>
+            <p:ph type="sldNum" idx="5" sz="quarter"/>
+          </p:nvPr>
+        </p:nvSpPr>
+        <p:spPr/>
+      </p:sp>
+    </p:spTree>
+  </p:cSld>
+  <p:clrMapOvr>
+    <a:masterClrMapping/>
+  </p:clrMapOvr>
+</p:notes>
+</file>
+
+<file path=ppt/notesSlides/notesSlide24.xml><?xml version="1.0" encoding="utf-8"?>
+<p:notes xmlns:a="http://schemas.openxmlformats.org/drawingml/2006/main" xmlns:p="http://schemas.openxmlformats.org/presentationml/2006/main" xmlns:r="http://schemas.openxmlformats.org/officeDocument/2006/relationships">
+  <p:cSld>
+    <p:spTree>
+      <p:nvGrpSpPr>
+        <p:cNvPr id="1" name=""/>
+        <p:cNvGrpSpPr/>
+        <p:nvPr/>
+      </p:nvGrpSpPr>
+      <p:grpSpPr>
+        <a:xfrm>
+          <a:off x="0" y="0"/>
+          <a:ext cx="0" cy="0"/>
+          <a:chOff x="0" y="0"/>
+          <a:chExt cx="0" cy="0"/>
+        </a:xfrm>
+      </p:grpSpPr>
+      <p:sp>
+        <p:nvSpPr>
+          <p:cNvPr id="2" name="Slide Image Placeholder 1"/>
+          <p:cNvSpPr>
+            <a:spLocks noGrp="1"/>
+          </p:cNvSpPr>
+          <p:nvPr>
+            <p:ph type="sldImg" idx="2"/>
+          </p:nvPr>
+        </p:nvSpPr>
+        <p:spPr/>
+      </p:sp>
+      <p:sp>
+        <p:nvSpPr>
+          <p:cNvPr id="3" name="Notes Placeholder 2"/>
+          <p:cNvSpPr>
+            <a:spLocks noGrp="1"/>
+          </p:cNvSpPr>
+          <p:nvPr>
+            <p:ph type="body" idx="3" sz="quarter"/>
+          </p:nvPr>
+        </p:nvSpPr>
+        <p:spPr/>
+        <p:txBody>
+          <a:bodyPr/>
+          <a:lstStyle/>
+          <a:p>
+            <a:r>
+              <a:t>This is real, working code. 27 Python modules, 189 tests, 12 interactive demos. All the physics is real - no mocked data. The showcase site has live calculators you can use right now. Standards compliance is complete - CCSDS, IETF, and NIST. (1.5 minutes)</a:t>
+            </a:r>
+          </a:p>
+        </p:txBody>
+      </p:sp>
+      <p:sp>
+        <p:nvSpPr>
+          <p:cNvPr id="4" name="Slide Number Placeholder 3"/>
+          <p:cNvSpPr>
+            <a:spLocks noGrp="1"/>
+          </p:cNvSpPr>
+          <p:nvPr>
+            <p:ph type="sldNum" idx="5" sz="quarter"/>
+          </p:nvPr>
+        </p:nvSpPr>
+        <p:spPr/>
+      </p:sp>
+    </p:spTree>
+  </p:cSld>
+  <p:clrMapOvr>
+    <a:masterClrMapping/>
+  </p:clrMapOvr>
+</p:notes>
+</file>
+
+<file path=ppt/notesSlides/notesSlide25.xml><?xml version="1.0" encoding="utf-8"?>
+<p:notes xmlns:a="http://schemas.openxmlformats.org/drawingml/2006/main" xmlns:p="http://schemas.openxmlformats.org/presentationml/2006/main" xmlns:r="http://schemas.openxmlformats.org/officeDocument/2006/relationships">
+  <p:cSld>
+    <p:spTree>
+      <p:nvGrpSpPr>
+        <p:cNvPr id="1" name=""/>
+        <p:cNvGrpSpPr/>
+        <p:nvPr/>
+      </p:nvGrpSpPr>
+      <p:grpSpPr>
+        <a:xfrm>
+          <a:off x="0" y="0"/>
+          <a:ext cx="0" cy="0"/>
+          <a:chOff x="0" y="0"/>
+          <a:chExt cx="0" cy="0"/>
+        </a:xfrm>
+      </p:grpSpPr>
+      <p:sp>
+        <p:nvSpPr>
+          <p:cNvPr id="2" name="Slide Image Placeholder 1"/>
+          <p:cNvSpPr>
+            <a:spLocks noGrp="1"/>
+          </p:cNvSpPr>
+          <p:nvPr>
+            <p:ph type="sldImg" idx="2"/>
+          </p:nvPr>
+        </p:nvSpPr>
+        <p:spPr/>
+      </p:sp>
+      <p:sp>
+        <p:nvSpPr>
+          <p:cNvPr id="3" name="Notes Placeholder 2"/>
+          <p:cNvSpPr>
+            <a:spLocks noGrp="1"/>
+          </p:cNvSpPr>
+          <p:nvPr>
+            <p:ph type="body" idx="3" sz="quarter"/>
+          </p:nvPr>
+        </p:nvSpPr>
+        <p:spPr/>
+        <p:txBody>
+          <a:bodyPr/>
+          <a:lstStyle/>
+          <a:p>
+            <a:r>
+              <a:t>Phases 1-4 are done - this is what you see today. Phase 5: ns-3 simulation for realistic network modeling. Phase 6: Upgrade to DQN and integrate with NASA's ION-DTN implementation. Phase 7: Hardware prototypes with SDRs and optical links. (1.5 minutes)</a:t>
+            </a:r>
+          </a:p>
+        </p:txBody>
+      </p:sp>
+      <p:sp>
+        <p:nvSpPr>
+          <p:cNvPr id="4" name="Slide Number Placeholder 3"/>
+          <p:cNvSpPr>
+            <a:spLocks noGrp="1"/>
+          </p:cNvSpPr>
+          <p:nvPr>
+            <p:ph type="sldNum" idx="5" sz="quarter"/>
+          </p:nvPr>
+        </p:nvSpPr>
+        <p:spPr/>
+      </p:sp>
+    </p:spTree>
+  </p:cSld>
+  <p:clrMapOvr>
+    <a:masterClrMapping/>
+  </p:clrMapOvr>
+</p:notes>
+</file>
+
+<file path=ppt/notesSlides/notesSlide26.xml><?xml version="1.0" encoding="utf-8"?>
+<p:notes xmlns:a="http://schemas.openxmlformats.org/drawingml/2006/main" xmlns:p="http://schemas.openxmlformats.org/presentationml/2006/main" xmlns:r="http://schemas.openxmlformats.org/officeDocument/2006/relationships">
+  <p:cSld>
+    <p:spTree>
+      <p:nvGrpSpPr>
+        <p:cNvPr id="1" name=""/>
+        <p:cNvGrpSpPr/>
+        <p:nvPr/>
+      </p:nvGrpSpPr>
+      <p:grpSpPr>
+        <a:xfrm>
+          <a:off x="0" y="0"/>
+          <a:ext cx="0" cy="0"/>
+          <a:chOff x="0" y="0"/>
+          <a:chExt cx="0" cy="0"/>
+        </a:xfrm>
+      </p:grpSpPr>
+      <p:sp>
+        <p:nvSpPr>
+          <p:cNvPr id="2" name="Slide Image Placeholder 1"/>
+          <p:cNvSpPr>
+            <a:spLocks noGrp="1"/>
+          </p:cNvSpPr>
+          <p:nvPr>
+            <p:ph type="sldImg" idx="2"/>
+          </p:nvPr>
+        </p:nvSpPr>
+        <p:spPr/>
+      </p:sp>
+      <p:sp>
+        <p:nvSpPr>
+          <p:cNvPr id="3" name="Notes Placeholder 2"/>
+          <p:cNvSpPr>
+            <a:spLocks noGrp="1"/>
+          </p:cNvSpPr>
+          <p:nvPr>
+            <p:ph type="body" idx="3" sz="quarter"/>
+          </p:nvPr>
+        </p:nvSpPr>
+        <p:spPr/>
+        <p:txBody>
+          <a:bodyPr/>
+          <a:lstStyle/>
+          <a:p>
+            <a:r>
+              <a:t>Summarize the problem and solution clearly. Re-read the exam topic verbatim. Point to the numbers. Offer to show live demos or answer questions. Thank the examiners. (1 minute)</a:t>
+            </a:r>
+          </a:p>
+        </p:txBody>
+      </p:sp>
+      <p:sp>
+        <p:nvSpPr>
+          <p:cNvPr id="4" name="Slide Number Placeholder 3"/>
+          <p:cNvSpPr>
+            <a:spLocks noGrp="1"/>
+          </p:cNvSpPr>
+          <p:nvPr>
+            <p:ph type="sldNum" idx="5" sz="quarter"/>
+          </p:nvPr>
+        </p:nvSpPr>
+        <p:spPr/>
+      </p:sp>
+    </p:spTree>
+  </p:cSld>
+  <p:clrMapOvr>
+    <a:masterClrMapping/>
+  </p:clrMapOvr>
+</p:notes>
+</file>
+
+<file path=ppt/notesSlides/notesSlide27.xml><?xml version="1.0" encoding="utf-8"?>
+<p:notes xmlns:a="http://schemas.openxmlformats.org/drawingml/2006/main" xmlns:p="http://schemas.openxmlformats.org/presentationml/2006/main" xmlns:r="http://schemas.openxmlformats.org/officeDocument/2006/relationships">
+  <p:cSld>
+    <p:spTree>
+      <p:nvGrpSpPr>
+        <p:cNvPr id="1" name=""/>
+        <p:cNvGrpSpPr/>
+        <p:nvPr/>
+      </p:nvGrpSpPr>
+      <p:grpSpPr>
+        <a:xfrm>
+          <a:off x="0" y="0"/>
+          <a:ext cx="0" cy="0"/>
+          <a:chOff x="0" y="0"/>
+          <a:chExt cx="0" cy="0"/>
+        </a:xfrm>
+      </p:grpSpPr>
+      <p:sp>
+        <p:nvSpPr>
+          <p:cNvPr id="2" name="Slide Image Placeholder 1"/>
+          <p:cNvSpPr>
+            <a:spLocks noGrp="1"/>
+          </p:cNvSpPr>
+          <p:nvPr>
+            <p:ph type="sldImg" idx="2"/>
+          </p:nvPr>
+        </p:nvSpPr>
+        <p:spPr/>
+      </p:sp>
+      <p:sp>
+        <p:nvSpPr>
+          <p:cNvPr id="3" name="Notes Placeholder 2"/>
+          <p:cNvSpPr>
+            <a:spLocks noGrp="1"/>
+          </p:cNvSpPr>
+          <p:nvPr>
+            <p:ph type="body" idx="3" sz="quarter"/>
+          </p:nvPr>
+        </p:nvSpPr>
+        <p:spPr/>
+        <p:txBody>
+          <a:bodyPr/>
+          <a:lstStyle/>
+          <a:p>
+            <a:r>
+              <a:t>Summarize the four key numbers: 10-100x faster, &gt;95% availability, AI-powered routing, quantum-secure. Invite questions confidently. Make eye contact. Point to the live demo link. Thank the audience. (30 seconds)</a:t>
+            </a:r>
+          </a:p>
+        </p:txBody>
+      </p:sp>
+      <p:sp>
+        <p:nvSpPr>
+          <p:cNvPr id="4" name="Slide Number Placeholder 3"/>
+          <p:cNvSpPr>
+            <a:spLocks noGrp="1"/>
+          </p:cNvSpPr>
+          <p:nvPr>
+            <p:ph type="sldNum" idx="5" sz="quarter"/>
+          </p:nvPr>
+        </p:nvSpPr>
+        <p:spPr/>
+      </p:sp>
+    </p:spTree>
+  </p:cSld>
+  <p:clrMapOvr>
+    <a:masterClrMapping/>
+  </p:clrMapOvr>
+</p:notes>
+</file>
+
+<file path=ppt/notesSlides/notesSlide3.xml><?xml version="1.0" encoding="utf-8"?>
+<p:notes xmlns:a="http://schemas.openxmlformats.org/drawingml/2006/main" xmlns:p="http://schemas.openxmlformats.org/presentationml/2006/main" xmlns:r="http://schemas.openxmlformats.org/officeDocument/2006/relationships">
+  <p:cSld>
+    <p:spTree>
+      <p:nvGrpSpPr>
+        <p:cNvPr id="1" name=""/>
+        <p:cNvGrpSpPr/>
+        <p:nvPr/>
+      </p:nvGrpSpPr>
+      <p:grpSpPr>
+        <a:xfrm>
+          <a:off x="0" y="0"/>
+          <a:ext cx="0" cy="0"/>
+          <a:chOff x="0" y="0"/>
+          <a:chExt cx="0" cy="0"/>
+        </a:xfrm>
+      </p:grpSpPr>
+      <p:sp>
+        <p:nvSpPr>
+          <p:cNvPr id="2" name="Slide Image Placeholder 1"/>
+          <p:cNvSpPr>
+            <a:spLocks noGrp="1"/>
+          </p:cNvSpPr>
+          <p:nvPr>
+            <p:ph type="sldImg" idx="2"/>
+          </p:nvPr>
+        </p:nvSpPr>
+        <p:spPr/>
+      </p:sp>
+      <p:sp>
+        <p:nvSpPr>
+          <p:cNvPr id="3" name="Notes Placeholder 2"/>
+          <p:cNvSpPr>
+            <a:spLocks noGrp="1"/>
+          </p:cNvSpPr>
+          <p:nvPr>
+            <p:ph type="body" idx="3" sz="quarter"/>
+          </p:nvPr>
+        </p:nvSpPr>
+        <p:spPr/>
+        <p:txBody>
+          <a:bodyPr/>
+          <a:lstStyle/>
+          <a:p>
+            <a:r>
+              <a:t>This slide sets up the narrative arc. First explain what AETHERIX is in plain language - it's like the postal service for interplanetary space. Then pivot to the problem: TCP/IP was never designed for space. 22-minute delays break every assumption. Solar conjunction blackouts. Static routing. Vulnerable crypto. Each problem maps to one of our solutions. (1.5 minutes)</a:t>
+            </a:r>
+          </a:p>
+        </p:txBody>
+      </p:sp>
+      <p:sp>
+        <p:nvSpPr>
+          <p:cNvPr id="4" name="Slide Number Placeholder 3"/>
+          <p:cNvSpPr>
+            <a:spLocks noGrp="1"/>
+          </p:cNvSpPr>
+          <p:nvPr>
+            <p:ph type="sldNum" idx="5" sz="quarter"/>
+          </p:nvPr>
+        </p:nvSpPr>
+        <p:spPr/>
+      </p:sp>
+    </p:spTree>
+  </p:cSld>
+  <p:clrMapOvr>
+    <a:masterClrMapping/>
+  </p:clrMapOvr>
+</p:notes>
+</file>
+
+<file path=ppt/notesSlides/notesSlide4.xml><?xml version="1.0" encoding="utf-8"?>
+<p:notes xmlns:a="http://schemas.openxmlformats.org/drawingml/2006/main" xmlns:p="http://schemas.openxmlformats.org/presentationml/2006/main" xmlns:r="http://schemas.openxmlformats.org/officeDocument/2006/relationships">
+  <p:cSld>
+    <p:spTree>
+      <p:nvGrpSpPr>
+        <p:cNvPr id="1" name=""/>
+        <p:cNvGrpSpPr/>
+        <p:nvPr/>
+      </p:nvGrpSpPr>
+      <p:grpSpPr>
+        <a:xfrm>
+          <a:off x="0" y="0"/>
+          <a:ext cx="0" cy="0"/>
+          <a:chOff x="0" y="0"/>
+          <a:chExt cx="0" cy="0"/>
+        </a:xfrm>
+      </p:grpSpPr>
+      <p:sp>
+        <p:nvSpPr>
+          <p:cNvPr id="2" name="Slide Image Placeholder 1"/>
+          <p:cNvSpPr>
+            <a:spLocks noGrp="1"/>
+          </p:cNvSpPr>
+          <p:nvPr>
+            <p:ph type="sldImg" idx="2"/>
+          </p:nvPr>
+        </p:nvSpPr>
+        <p:spPr/>
+      </p:sp>
+      <p:sp>
+        <p:nvSpPr>
+          <p:cNvPr id="3" name="Notes Placeholder 2"/>
+          <p:cNvSpPr>
+            <a:spLocks noGrp="1"/>
+          </p:cNvSpPr>
+          <p:nvPr>
+            <p:ph type="body" idx="3" sz="quarter"/>
+          </p:nvPr>
+        </p:nvSpPr>
+        <p:spPr/>
+        <p:txBody>
+          <a:bodyPr/>
+          <a:lstStyle/>
+          <a:p>
+            <a:r>
+              <a:t>Start with the scale. 54.6M to 401M km. Light itself takes 3-22 minutes one way. TCP/IP was designed for sub-second round trips. In space, by the time a packet acknowledgment returns, the link may be gone. Solar conjunction causes 2-week blackout. This is why NASA calls it Delay-Tolerant Networking. (1.5 minutes)</a:t>
+            </a:r>
+          </a:p>
+        </p:txBody>
+      </p:sp>
+      <p:sp>
+        <p:nvSpPr>
+          <p:cNvPr id="4" name="Slide Number Placeholder 3"/>
+          <p:cNvSpPr>
+            <a:spLocks noGrp="1"/>
+          </p:cNvSpPr>
+          <p:nvPr>
+            <p:ph type="sldNum" idx="5" sz="quarter"/>
+          </p:nvPr>
+        </p:nvSpPr>
+        <p:spPr/>
+      </p:sp>
+    </p:spTree>
+  </p:cSld>
+  <p:clrMapOvr>
+    <a:masterClrMapping/>
+  </p:clrMapOvr>
+</p:notes>
+</file>
+
+<file path=ppt/notesSlides/notesSlide5.xml><?xml version="1.0" encoding="utf-8"?>
+<p:notes xmlns:a="http://schemas.openxmlformats.org/drawingml/2006/main" xmlns:p="http://schemas.openxmlformats.org/presentationml/2006/main" xmlns:r="http://schemas.openxmlformats.org/officeDocument/2006/relationships">
+  <p:cSld>
+    <p:spTree>
+      <p:nvGrpSpPr>
+        <p:cNvPr id="1" name=""/>
+        <p:cNvGrpSpPr/>
+        <p:nvPr/>
+      </p:nvGrpSpPr>
+      <p:grpSpPr>
+        <a:xfrm>
+          <a:off x="0" y="0"/>
+          <a:ext cx="0" cy="0"/>
+          <a:chOff x="0" y="0"/>
+          <a:chExt cx="0" cy="0"/>
+        </a:xfrm>
+      </p:grpSpPr>
+      <p:sp>
+        <p:nvSpPr>
+          <p:cNvPr id="2" name="Slide Image Placeholder 1"/>
+          <p:cNvSpPr>
+            <a:spLocks noGrp="1"/>
+          </p:cNvSpPr>
+          <p:nvPr>
+            <p:ph type="sldImg" idx="2"/>
+          </p:nvPr>
+        </p:nvSpPr>
+        <p:spPr/>
+      </p:sp>
+      <p:sp>
+        <p:nvSpPr>
+          <p:cNvPr id="3" name="Notes Placeholder 2"/>
+          <p:cNvSpPr>
+            <a:spLocks noGrp="1"/>
+          </p:cNvSpPr>
+          <p:nvPr>
+            <p:ph type="body" idx="3" sz="quarter"/>
+          </p:nvPr>
+        </p:nvSpPr>
+        <p:spPr/>
+        <p:txBody>
+          <a:bodyPr/>
+          <a:lstStyle/>
+          <a:p>
+            <a:r>
+              <a:t>The key insight: instead of requiring an end-to-end connection like TCP, DTN works like the postal service. Each node takes custody of your data and forwards it when a link becomes available. Three pillars: BPv7 for the protocol, RL for intelligent routing, QKD for security. (1.5 minutes)</a:t>
+            </a:r>
+          </a:p>
+        </p:txBody>
+      </p:sp>
+      <p:sp>
+        <p:nvSpPr>
+          <p:cNvPr id="4" name="Slide Number Placeholder 3"/>
+          <p:cNvSpPr>
+            <a:spLocks noGrp="1"/>
+          </p:cNvSpPr>
+          <p:nvPr>
+            <p:ph type="sldNum" idx="5" sz="quarter"/>
+          </p:nvPr>
+        </p:nvSpPr>
+        <p:spPr/>
+      </p:sp>
+    </p:spTree>
+  </p:cSld>
+  <p:clrMapOvr>
+    <a:masterClrMapping/>
+  </p:clrMapOvr>
+</p:notes>
+</file>
+
+<file path=ppt/notesSlides/notesSlide6.xml><?xml version="1.0" encoding="utf-8"?>
+<p:notes xmlns:a="http://schemas.openxmlformats.org/drawingml/2006/main" xmlns:p="http://schemas.openxmlformats.org/presentationml/2006/main" xmlns:r="http://schemas.openxmlformats.org/officeDocument/2006/relationships">
+  <p:cSld>
+    <p:spTree>
+      <p:nvGrpSpPr>
+        <p:cNvPr id="1" name=""/>
+        <p:cNvGrpSpPr/>
+        <p:nvPr/>
+      </p:nvGrpSpPr>
+      <p:grpSpPr>
+        <a:xfrm>
+          <a:off x="0" y="0"/>
+          <a:ext cx="0" cy="0"/>
+          <a:chOff x="0" y="0"/>
+          <a:chExt cx="0" cy="0"/>
+        </a:xfrm>
+      </p:grpSpPr>
+      <p:sp>
+        <p:nvSpPr>
+          <p:cNvPr id="2" name="Slide Image Placeholder 1"/>
+          <p:cNvSpPr>
+            <a:spLocks noGrp="1"/>
+          </p:cNvSpPr>
+          <p:nvPr>
+            <p:ph type="sldImg" idx="2"/>
+          </p:nvPr>
+        </p:nvSpPr>
+        <p:spPr/>
+      </p:sp>
+      <p:sp>
+        <p:nvSpPr>
+          <p:cNvPr id="3" name="Notes Placeholder 2"/>
+          <p:cNvSpPr>
+            <a:spLocks noGrp="1"/>
+          </p:cNvSpPr>
+          <p:nvPr>
+            <p:ph type="body" idx="3" sz="quarter"/>
+          </p:nvPr>
+        </p:nvSpPr>
+        <p:spPr/>
+        <p:txBody>
+          <a:bodyPr/>
+          <a:lstStyle/>
+          <a:p>
+            <a:r>
+              <a:t>Show the architecture. Six core modules feed into the simulation engine, which feeds the web showcase. Standards compliance at the bottom. Point to each module as you explain. (1 minute)</a:t>
+            </a:r>
+          </a:p>
+        </p:txBody>
+      </p:sp>
+      <p:sp>
+        <p:nvSpPr>
+          <p:cNvPr id="4" name="Slide Number Placeholder 3"/>
+          <p:cNvSpPr>
+            <a:spLocks noGrp="1"/>
+          </p:cNvSpPr>
+          <p:nvPr>
+            <p:ph type="sldNum" idx="5" sz="quarter"/>
+          </p:nvPr>
+        </p:nvSpPr>
+        <p:spPr/>
+      </p:sp>
+    </p:spTree>
+  </p:cSld>
+  <p:clrMapOvr>
+    <a:masterClrMapping/>
+  </p:clrMapOvr>
+</p:notes>
+</file>
+
+<file path=ppt/notesSlides/notesSlide7.xml><?xml version="1.0" encoding="utf-8"?>
+<p:notes xmlns:a="http://schemas.openxmlformats.org/drawingml/2006/main" xmlns:p="http://schemas.openxmlformats.org/presentationml/2006/main" xmlns:r="http://schemas.openxmlformats.org/officeDocument/2006/relationships">
+  <p:cSld>
+    <p:spTree>
+      <p:nvGrpSpPr>
+        <p:cNvPr id="1" name=""/>
+        <p:cNvGrpSpPr/>
+        <p:nvPr/>
+      </p:nvGrpSpPr>
+      <p:grpSpPr>
+        <a:xfrm>
+          <a:off x="0" y="0"/>
+          <a:ext cx="0" cy="0"/>
+          <a:chOff x="0" y="0"/>
+          <a:chExt cx="0" cy="0"/>
+        </a:xfrm>
+      </p:grpSpPr>
+      <p:sp>
+        <p:nvSpPr>
+          <p:cNvPr id="2" name="Slide Image Placeholder 1"/>
+          <p:cNvSpPr>
+            <a:spLocks noGrp="1"/>
+          </p:cNvSpPr>
+          <p:nvPr>
+            <p:ph type="sldImg" idx="2"/>
+          </p:nvPr>
+        </p:nvSpPr>
+        <p:spPr/>
+      </p:sp>
+      <p:sp>
+        <p:nvSpPr>
+          <p:cNvPr id="3" name="Notes Placeholder 2"/>
+          <p:cNvSpPr>
+            <a:spLocks noGrp="1"/>
+          </p:cNvSpPr>
+          <p:nvPr>
+            <p:ph type="body" idx="3" sz="quarter"/>
+          </p:nvPr>
+        </p:nvSpPr>
+        <p:spPr/>
+        <p:txBody>
+          <a:bodyPr/>
+          <a:lstStyle/>
+          <a:p>
+            <a:r>
+              <a:t>Architecture diagram showing source modules feeding simulation engine and web demos.</a:t>
+            </a:r>
+          </a:p>
+        </p:txBody>
+      </p:sp>
+      <p:sp>
+        <p:nvSpPr>
+          <p:cNvPr id="4" name="Slide Number Placeholder 3"/>
+          <p:cNvSpPr>
+            <a:spLocks noGrp="1"/>
+          </p:cNvSpPr>
+          <p:nvPr>
+            <p:ph type="sldNum" idx="5" sz="quarter"/>
+          </p:nvPr>
+        </p:nvSpPr>
+        <p:spPr/>
+      </p:sp>
+    </p:spTree>
+  </p:cSld>
+  <p:clrMapOvr>
+    <a:masterClrMapping/>
+  </p:clrMapOvr>
+</p:notes>
+</file>
+
+<file path=ppt/notesSlides/notesSlide8.xml><?xml version="1.0" encoding="utf-8"?>
+<p:notes xmlns:a="http://schemas.openxmlformats.org/drawingml/2006/main" xmlns:p="http://schemas.openxmlformats.org/presentationml/2006/main" xmlns:r="http://schemas.openxmlformats.org/officeDocument/2006/relationships">
+  <p:cSld>
+    <p:spTree>
+      <p:nvGrpSpPr>
+        <p:cNvPr id="1" name=""/>
+        <p:cNvGrpSpPr/>
+        <p:nvPr/>
+      </p:nvGrpSpPr>
+      <p:grpSpPr>
+        <a:xfrm>
+          <a:off x="0" y="0"/>
+          <a:ext cx="0" cy="0"/>
+          <a:chOff x="0" y="0"/>
+          <a:chExt cx="0" cy="0"/>
+        </a:xfrm>
+      </p:grpSpPr>
+      <p:sp>
+        <p:nvSpPr>
+          <p:cNvPr id="2" name="Slide Image Placeholder 1"/>
+          <p:cNvSpPr>
+            <a:spLocks noGrp="1"/>
+          </p:cNvSpPr>
+          <p:nvPr>
+            <p:ph type="sldImg" idx="2"/>
+          </p:nvPr>
+        </p:nvSpPr>
+        <p:spPr/>
+      </p:sp>
+      <p:sp>
+        <p:nvSpPr>
+          <p:cNvPr id="3" name="Notes Placeholder 2"/>
+          <p:cNvSpPr>
+            <a:spLocks noGrp="1"/>
+          </p:cNvSpPr>
+          <p:nvPr>
+            <p:ph type="body" idx="3" sz="quarter"/>
+          </p:nvPr>
+        </p:nvSpPr>
+        <p:spPr/>
+        <p:txBody>
+          <a:bodyPr/>
+          <a:lstStyle/>
+          <a:p>
+            <a:r>
+              <a:t>BPv7 is the postal service protocol. Walk through the stack: Application at top, BPv7 as the store-and-forward layer, three convergence layers for different link types, physical at bottom. Custody transfer is the key innovation - each node takes legal responsibility. Priority P0 (emergency) to P4 (bulk). (2 minutes)</a:t>
+            </a:r>
+          </a:p>
+        </p:txBody>
+      </p:sp>
+      <p:sp>
+        <p:nvSpPr>
+          <p:cNvPr id="4" name="Slide Number Placeholder 3"/>
+          <p:cNvSpPr>
+            <a:spLocks noGrp="1"/>
+          </p:cNvSpPr>
+          <p:nvPr>
+            <p:ph type="sldNum" idx="5" sz="quarter"/>
+          </p:nvPr>
+        </p:nvSpPr>
+        <p:spPr/>
+      </p:sp>
+    </p:spTree>
+  </p:cSld>
+  <p:clrMapOvr>
+    <a:masterClrMapping/>
+  </p:clrMapOvr>
+</p:notes>
+</file>
+
+<file path=ppt/notesSlides/notesSlide9.xml><?xml version="1.0" encoding="utf-8"?>
+<p:notes xmlns:a="http://schemas.openxmlformats.org/drawingml/2006/main" xmlns:p="http://schemas.openxmlformats.org/presentationml/2006/main" xmlns:r="http://schemas.openxmlformats.org/officeDocument/2006/relationships">
+  <p:cSld>
+    <p:spTree>
+      <p:nvGrpSpPr>
+        <p:cNvPr id="1" name=""/>
+        <p:cNvGrpSpPr/>
+        <p:nvPr/>
+      </p:nvGrpSpPr>
+      <p:grpSpPr>
+        <a:xfrm>
+          <a:off x="0" y="0"/>
+          <a:ext cx="0" cy="0"/>
+          <a:chOff x="0" y="0"/>
+          <a:chExt cx="0" cy="0"/>
+        </a:xfrm>
+      </p:grpSpPr>
+      <p:sp>
+        <p:nvSpPr>
+          <p:cNvPr id="2" name="Slide Image Placeholder 1"/>
+          <p:cNvSpPr>
+            <a:spLocks noGrp="1"/>
+          </p:cNvSpPr>
+          <p:nvPr>
+            <p:ph type="sldImg" idx="2"/>
+          </p:nvPr>
+        </p:nvSpPr>
+        <p:spPr/>
+      </p:sp>
+      <p:sp>
+        <p:nvSpPr>
+          <p:cNvPr id="3" name="Notes Placeholder 2"/>
+          <p:cNvSpPr>
+            <a:spLocks noGrp="1"/>
+          </p:cNvSpPr>
+          <p:nvPr>
+            <p:ph type="body" idx="3" sz="quarter"/>
+          </p:nvPr>
+        </p:nvSpPr>
+        <p:spPr/>
+        <p:txBody>
+          <a:bodyPr/>
+          <a:lstStyle/>
+          <a:p>
+            <a:r>
+              <a:t>Walk through the store-and-forward process. Bundle arrives, gets stored, node waits for next contact opportunity, then forwards. If link drops, bundle stays stored and retries. No data loss. This is fundamentally different from TCP's end-to-end retransmission. (1.5 minutes)</a:t>
+            </a:r>
+          </a:p>
+        </p:txBody>
+      </p:sp>
+      <p:sp>
+        <p:nvSpPr>
+          <p:cNvPr id="4" name="Slide Number Placeholder 3"/>
+          <p:cNvSpPr>
+            <a:spLocks noGrp="1"/>
+          </p:cNvSpPr>
+          <p:nvPr>
+            <p:ph type="sldNum" idx="5" sz="quarter"/>
+          </p:nvPr>
+        </p:nvSpPr>
+        <p:spPr/>
+      </p:sp>
+    </p:spTree>
+  </p:cSld>
+  <p:clrMapOvr>
+    <a:masterClrMapping/>
+  </p:clrMapOvr>
+</p:notes>
 </file>
 
 <file path=ppt/slideLayouts/slideLayout1.xml><?xml version="1.0" encoding="utf-8"?>
@@ -30049,4 +32289,324 @@
   </a:objectDefaults>
   <a:extraClrSchemeLst/>
 </a:theme>
+</file>
+
+<file path=ppt/theme/theme2.xml><?xml version="1.0" encoding="utf-8"?>
+<a:theme xmlns:a="http://schemas.openxmlformats.org/drawingml/2006/main" name="Office Theme">
+  <a:themeElements>
+    <a:clrScheme name="Office">
+      <a:dk1>
+        <a:sysClr val="windowText" lastClr="000000"/>
+      </a:dk1>
+      <a:lt1>
+        <a:sysClr val="window" lastClr="FFFFFF"/>
+      </a:lt1>
+      <a:dk2>
+        <a:srgbClr val="1F497D"/>
+      </a:dk2>
+      <a:lt2>
+        <a:srgbClr val="EEECE1"/>
+      </a:lt2>
+      <a:accent1>
+        <a:srgbClr val="4F81BD"/>
+      </a:accent1>
+      <a:accent2>
+        <a:srgbClr val="C0504D"/>
+      </a:accent2>
+      <a:accent3>
+        <a:srgbClr val="9BBB59"/>
+      </a:accent3>
+      <a:accent4>
+        <a:srgbClr val="8064A2"/>
+      </a:accent4>
+      <a:accent5>
+        <a:srgbClr val="4BACC6"/>
+      </a:accent5>
+      <a:accent6>
+        <a:srgbClr val="F79646"/>
+      </a:accent6>
+      <a:hlink>
+        <a:srgbClr val="0000FF"/>
+      </a:hlink>
+      <a:folHlink>
+        <a:srgbClr val="800080"/>
+      </a:folHlink>
+    </a:clrScheme>
+    <a:fontScheme name="Office">
+      <a:majorFont>
+        <a:latin typeface="Calibri"/>
+        <a:ea typeface=""/>
+        <a:cs typeface=""/>
+        <a:font script="Jpan" typeface="ＭＳ Ｐゴシック"/>
+        <a:font script="Hang" typeface="맑은 고딕"/>
+        <a:font script="Hans" typeface="宋体"/>
+        <a:font script="Hant" typeface="新細明體"/>
+        <a:font script="Arab" typeface="Times New Roman"/>
+        <a:font script="Hebr" typeface="Times New Roman"/>
+        <a:font script="Thai" typeface="Angsana New"/>
+        <a:font script="Ethi" typeface="Nyala"/>
+        <a:font script="Beng" typeface="Vrinda"/>
+        <a:font script="Gujr" typeface="Shruti"/>
+        <a:font script="Khmr" typeface="MoolBoran"/>
+        <a:font script="Knda" typeface="Tunga"/>
+        <a:font script="Guru" typeface="Raavi"/>
+        <a:font script="Cans" typeface="Euphemia"/>
+        <a:font script="Cher" typeface="Plantagenet Cherokee"/>
+        <a:font script="Yiii" typeface="Microsoft Yi Baiti"/>
+        <a:font script="Tibt" typeface="Microsoft Himalaya"/>
+        <a:font script="Thaa" typeface="MV Boli"/>
+        <a:font script="Deva" typeface="Mangal"/>
+        <a:font script="Telu" typeface="Gautami"/>
+        <a:font script="Taml" typeface="Latha"/>
+        <a:font script="Syrc" typeface="Estrangelo Edessa"/>
+        <a:font script="Orya" typeface="Kalinga"/>
+        <a:font script="Mlym" typeface="Kartika"/>
+        <a:font script="Laoo" typeface="DokChampa"/>
+        <a:font script="Sinh" typeface="Iskoola Pota"/>
+        <a:font script="Mong" typeface="Mongolian Baiti"/>
+        <a:font script="Viet" typeface="Times New Roman"/>
+        <a:font script="Uigh" typeface="Microsoft Uighur"/>
+        <a:font script="Geor" typeface="Sylfaen"/>
+      </a:majorFont>
+      <a:minorFont>
+        <a:latin typeface="Calibri"/>
+        <a:ea typeface=""/>
+        <a:cs typeface=""/>
+        <a:font script="Jpan" typeface="ＭＳ Ｐゴシック"/>
+        <a:font script="Hang" typeface="맑은 고딕"/>
+        <a:font script="Hans" typeface="宋体"/>
+        <a:font script="Hant" typeface="新細明體"/>
+        <a:font script="Arab" typeface="Arial"/>
+        <a:font script="Hebr" typeface="Arial"/>
+        <a:font script="Thai" typeface="Cordia New"/>
+        <a:font script="Ethi" typeface="Nyala"/>
+        <a:font script="Beng" typeface="Vrinda"/>
+        <a:font script="Gujr" typeface="Shruti"/>
+        <a:font script="Khmr" typeface="DaunPenh"/>
+        <a:font script="Knda" typeface="Tunga"/>
+        <a:font script="Guru" typeface="Raavi"/>
+        <a:font script="Cans" typeface="Euphemia"/>
+        <a:font script="Cher" typeface="Plantagenet Cherokee"/>
+        <a:font script="Yiii" typeface="Microsoft Yi Baiti"/>
+        <a:font script="Tibt" typeface="Microsoft Himalaya"/>
+        <a:font script="Thaa" typeface="MV Boli"/>
+        <a:font script="Deva" typeface="Mangal"/>
+        <a:font script="Telu" typeface="Gautami"/>
+        <a:font script="Taml" typeface="Latha"/>
+        <a:font script="Syrc" typeface="Estrangelo Edessa"/>
+        <a:font script="Orya" typeface="Kalinga"/>
+        <a:font script="Mlym" typeface="Kartika"/>
+        <a:font script="Laoo" typeface="DokChampa"/>
+        <a:font script="Sinh" typeface="Iskoola Pota"/>
+        <a:font script="Mong" typeface="Mongolian Baiti"/>
+        <a:font script="Viet" typeface="Arial"/>
+        <a:font script="Uigh" typeface="Microsoft Uighur"/>
+        <a:font script="Geor" typeface="Sylfaen"/>
+      </a:minorFont>
+    </a:fontScheme>
+    <a:fmtScheme name="Office">
+      <a:fillStyleLst>
+        <a:solidFill>
+          <a:schemeClr val="phClr"/>
+        </a:solidFill>
+        <a:gradFill rotWithShape="1">
+          <a:gsLst>
+            <a:gs pos="0">
+              <a:schemeClr val="phClr">
+                <a:tint val="50000"/>
+                <a:satMod val="300000"/>
+              </a:schemeClr>
+            </a:gs>
+            <a:gs pos="35000">
+              <a:schemeClr val="phClr">
+                <a:tint val="37000"/>
+                <a:satMod val="300000"/>
+              </a:schemeClr>
+            </a:gs>
+            <a:gs pos="100000">
+              <a:schemeClr val="phClr">
+                <a:tint val="15000"/>
+                <a:satMod val="350000"/>
+              </a:schemeClr>
+            </a:gs>
+          </a:gsLst>
+          <a:lin ang="16200000" scaled="1"/>
+        </a:gradFill>
+        <a:gradFill rotWithShape="1">
+          <a:gsLst>
+            <a:gs pos="0">
+              <a:schemeClr val="phClr">
+                <a:tint val="100000"/>
+                <a:shade val="100000"/>
+                <a:satMod val="130000"/>
+              </a:schemeClr>
+            </a:gs>
+            <a:gs pos="100000">
+              <a:schemeClr val="phClr">
+                <a:tint val="50000"/>
+                <a:shade val="100000"/>
+                <a:satMod val="350000"/>
+              </a:schemeClr>
+            </a:gs>
+          </a:gsLst>
+          <a:lin ang="16200000" scaled="0"/>
+        </a:gradFill>
+      </a:fillStyleLst>
+      <a:lnStyleLst>
+        <a:ln w="9525" cap="flat" cmpd="sng" algn="ctr">
+          <a:solidFill>
+            <a:schemeClr val="phClr">
+              <a:shade val="95000"/>
+              <a:satMod val="105000"/>
+            </a:schemeClr>
+          </a:solidFill>
+          <a:prstDash val="solid"/>
+        </a:ln>
+        <a:ln w="25400" cap="flat" cmpd="sng" algn="ctr">
+          <a:solidFill>
+            <a:schemeClr val="phClr"/>
+          </a:solidFill>
+          <a:prstDash val="solid"/>
+        </a:ln>
+        <a:ln w="38100" cap="flat" cmpd="sng" algn="ctr">
+          <a:solidFill>
+            <a:schemeClr val="phClr"/>
+          </a:solidFill>
+          <a:prstDash val="solid"/>
+        </a:ln>
+      </a:lnStyleLst>
+      <a:effectStyleLst>
+        <a:effectStyle>
+          <a:effectLst>
+            <a:outerShdw blurRad="40000" dist="20000" dir="5400000" rotWithShape="0">
+              <a:srgbClr val="000000">
+                <a:alpha val="38000"/>
+              </a:srgbClr>
+            </a:outerShdw>
+          </a:effectLst>
+        </a:effectStyle>
+        <a:effectStyle>
+          <a:effectLst>
+            <a:outerShdw blurRad="40000" dist="23000" dir="5400000" rotWithShape="0">
+              <a:srgbClr val="000000">
+                <a:alpha val="35000"/>
+              </a:srgbClr>
+            </a:outerShdw>
+          </a:effectLst>
+        </a:effectStyle>
+        <a:effectStyle>
+          <a:effectLst>
+            <a:outerShdw blurRad="40000" dist="23000" dir="5400000" rotWithShape="0">
+              <a:srgbClr val="000000">
+                <a:alpha val="35000"/>
+              </a:srgbClr>
+            </a:outerShdw>
+          </a:effectLst>
+          <a:scene3d>
+            <a:camera prst="orthographicFront">
+              <a:rot lat="0" lon="0" rev="0"/>
+            </a:camera>
+            <a:lightRig rig="threePt" dir="t">
+              <a:rot lat="0" lon="0" rev="1200000"/>
+            </a:lightRig>
+          </a:scene3d>
+          <a:sp3d>
+            <a:bevelT w="63500" h="25400"/>
+          </a:sp3d>
+        </a:effectStyle>
+      </a:effectStyleLst>
+      <a:bgFillStyleLst>
+        <a:solidFill>
+          <a:schemeClr val="phClr"/>
+        </a:solidFill>
+        <a:gradFill rotWithShape="1">
+          <a:gsLst>
+            <a:gs pos="0">
+              <a:schemeClr val="phClr">
+                <a:tint val="40000"/>
+                <a:satMod val="350000"/>
+              </a:schemeClr>
+            </a:gs>
+            <a:gs pos="40000">
+              <a:schemeClr val="phClr">
+                <a:tint val="45000"/>
+                <a:shade val="99000"/>
+                <a:satMod val="350000"/>
+              </a:schemeClr>
+            </a:gs>
+            <a:gs pos="100000">
+              <a:schemeClr val="phClr">
+                <a:shade val="20000"/>
+                <a:satMod val="255000"/>
+              </a:schemeClr>
+            </a:gs>
+          </a:gsLst>
+          <a:path path="circle">
+            <a:fillToRect l="50000" t="-80000" r="50000" b="180000"/>
+          </a:path>
+        </a:gradFill>
+        <a:gradFill rotWithShape="1">
+          <a:gsLst>
+            <a:gs pos="0">
+              <a:schemeClr val="phClr">
+                <a:tint val="80000"/>
+                <a:satMod val="300000"/>
+              </a:schemeClr>
+            </a:gs>
+            <a:gs pos="100000">
+              <a:schemeClr val="phClr">
+                <a:shade val="30000"/>
+                <a:satMod val="200000"/>
+              </a:schemeClr>
+            </a:gs>
+          </a:gsLst>
+          <a:path path="circle">
+            <a:fillToRect l="50000" t="50000" r="50000" b="50000"/>
+          </a:path>
+        </a:gradFill>
+      </a:bgFillStyleLst>
+    </a:fmtScheme>
+  </a:themeElements>
+  <a:objectDefaults>
+    <a:spDef>
+      <a:spPr/>
+      <a:bodyPr/>
+      <a:lstStyle/>
+      <a:style>
+        <a:lnRef idx="1">
+          <a:schemeClr val="accent1"/>
+        </a:lnRef>
+        <a:fillRef idx="3">
+          <a:schemeClr val="accent1"/>
+        </a:fillRef>
+        <a:effectRef idx="2">
+          <a:schemeClr val="accent1"/>
+        </a:effectRef>
+        <a:fontRef idx="minor">
+          <a:schemeClr val="lt1"/>
+        </a:fontRef>
+      </a:style>
+    </a:spDef>
+    <a:lnDef>
+      <a:spPr/>
+      <a:bodyPr/>
+      <a:lstStyle/>
+      <a:style>
+        <a:lnRef idx="2">
+          <a:schemeClr val="accent1"/>
+        </a:lnRef>
+        <a:fillRef idx="0">
+          <a:schemeClr val="accent1"/>
+        </a:fillRef>
+        <a:effectRef idx="1">
+          <a:schemeClr val="accent1"/>
+        </a:effectRef>
+        <a:fontRef idx="minor">
+          <a:schemeClr val="tx1"/>
+        </a:fontRef>
+      </a:style>
+    </a:lnDef>
+  </a:objectDefaults>
+  <a:extraClrSchemeLst/>
+</a:theme>
 </file>
--- a/presentation/output/AETHERIX_Presentation.pptx
+++ b/presentation/output/AETHERIX_Presentation.pptx
@@ -20802,7 +20802,7 @@
               </a:defRPr>
             </a:pPr>
             <a:r>
-              <a:t>149</a:t>
+              <a:t>189</a:t>
             </a:r>
           </a:p>
           <a:p>
@@ -20877,7 +20877,7 @@
               </a:defRPr>
             </a:pPr>
             <a:r>
-              <a:t>10</a:t>
+              <a:t>12</a:t>
             </a:r>
           </a:p>
           <a:p>
@@ -21826,7 +21826,7 @@
               </a:defRPr>
             </a:pPr>
             <a:r>
-              <a:t>Topology • RL • QKD • Web UI • 149 tests</a:t>
+              <a:t>Topology • RL • QKD • Web UI • 189 tests</a:t>
             </a:r>
           </a:p>
         </p:txBody>

--- a/presentation/output/AETHERIX_Presentation.pptx
+++ b/presentation/output/AETHERIX_Presentation.pptx
@@ -2721,7 +2721,7 @@
           <a:lstStyle/>
           <a:p>
             <a:r>
-              <a:t>Hit these numbers with confidence. 10-100x faster. &gt;95% availability vs 60-75%. Quantum-secure. 241 nodes vs 5-10 assets. The conjunction improvement is thanks to Lagrange relays. All metrics are backed by our simulation engine. (1 minute)</a:t>
+              <a:t>Be honest. Left column is simulated: 241-node topology, RL routing converges in 140 episodes, autonomous conjunction reroute, BB84 detection, 200x radiation reduction. Right column is design targets: 2-200 Mbps from link model, &gt;95% availability and cost are goals not yet measured. (1 minute)</a:t>
             </a:r>
           </a:p>
         </p:txBody>
@@ -3351,7 +3351,7 @@
           <a:lstStyle/>
           <a:p>
             <a:r>
-              <a:t>Summarize the four key numbers: 10-100x faster, &gt;95% availability, AI-powered routing, quantum-secure. Invite questions confidently. Make eye contact. Point to the live demo link. Thank the audience. (30 seconds)</a:t>
+              <a:t>Summarize: simulated achievements are 241-node topology, RL routing, QKD security, 200x radiation reduction. Design targets are 10-100x data rate and &gt;95% availability. Invite questions confidently. Thank the audience. (30 seconds)</a:t>
             </a:r>
           </a:p>
         </p:txBody>
@@ -13341,7 +13341,7 @@
               </a:defRPr>
             </a:pPr>
             <a:r>
-              <a:t>10–100x Faster Than RF</a:t>
+              <a:t>10–100x Capability Over RF</a:t>
             </a:r>
           </a:p>
         </p:txBody>
@@ -26633,7 +26633,7 @@
               </a:defRPr>
             </a:pPr>
             <a:r>
-              <a:t>Link utilization (no wasted bandwidth)</a:t>
+              <a:t>Link utilization (target)</a:t>
             </a:r>
           </a:p>
         </p:txBody>
@@ -32592,7 +32592,7 @@
                         </a:defRPr>
                       </a:pPr>
                       <a:r>
-                        <a:t>10-100×</a:t>
+                        <a:t>10-100× capability</a:t>
                       </a:r>
                     </a:p>
                   </a:txBody>
@@ -32690,7 +32690,7 @@
                         </a:defRPr>
                       </a:pPr>
                       <a:r>
-                        <a:t>10-20×</a:t>
+                        <a:t>10-20× (target)</a:t>
                       </a:r>
                     </a:p>
                   </a:txBody>
@@ -33156,7 +33156,7 @@
                         </a:defRPr>
                       </a:pPr>
                       <a:r>
-                        <a:t>50-70% via L4/L5</a:t>
+                        <a:t>L4/L5 relay (target)</a:t>
                       </a:r>
                     </a:p>
                   </a:txBody>
@@ -33180,7 +33180,7 @@
                         </a:defRPr>
                       </a:pPr>
                       <a:r>
-                        <a:t>+50-70%</a:t>
+                        <a:t>+50-70% (target)</a:t>
                       </a:r>
                     </a:p>
                   </a:txBody>
@@ -33503,7 +33503,7 @@
               </a:defRPr>
             </a:pPr>
             <a:r>
-              <a:t>AETHERIX achieves 10-100x improvement across all key metrics</a:t>
+              <a:t>Model-based targets vs current MRO baseline</a:t>
             </a:r>
           </a:p>
         </p:txBody>
@@ -34079,7 +34079,7 @@
               </a:defRPr>
             </a:pPr>
             <a:r>
-              <a:t>27</a:t>
+              <a:t>25</a:t>
             </a:r>
           </a:p>
           <a:p>
@@ -36593,7 +36593,7 @@
           </a:solidFill>
           <a:ln w="12700">
             <a:solidFill>
-              <a:srgbClr val="2ECC71"/>
+              <a:srgbClr val="009EFF"/>
             </a:solidFill>
           </a:ln>
           <a:effectLst/>
@@ -36619,7 +36619,7 @@
             <a:pPr algn="ctr">
               <a:defRPr sz="2400" b="1">
                 <a:solidFill>
-                  <a:srgbClr val="2ECC71"/>
+                  <a:srgbClr val="009EFF"/>
                 </a:solidFill>
                 <a:latin typeface="Calibri"/>
               </a:defRPr>
@@ -36644,7 +36644,7 @@
               </a:defRPr>
             </a:pPr>
             <a:r>
-              <a:t>Data Rate</a:t>
+              <a:t>Target Speedup ♦</a:t>
             </a:r>
           </a:p>
         </p:txBody>
@@ -36668,7 +36668,7 @@
           </a:solidFill>
           <a:ln w="12700">
             <a:solidFill>
-              <a:srgbClr val="009EFF"/>
+              <a:srgbClr val="2ECC71"/>
             </a:solidFill>
           </a:ln>
           <a:effectLst/>
@@ -36694,7 +36694,7 @@
             <a:pPr algn="ctr">
               <a:defRPr sz="2400" b="1">
                 <a:solidFill>
-                  <a:srgbClr val="009EFF"/>
+                  <a:srgbClr val="2ECC71"/>
                 </a:solidFill>
                 <a:latin typeface="Calibri"/>
               </a:defRPr>
@@ -36719,7 +36719,7 @@
               </a:defRPr>
             </a:pPr>
             <a:r>
-              <a:t>Availability (tgt)</a:t>
+              <a:t>Availability (target)</a:t>
             </a:r>
           </a:p>
         </p:txBody>
@@ -36794,7 +36794,7 @@
               </a:defRPr>
             </a:pPr>
             <a:r>
-              <a:t>Adaptive Routing</a:t>
+              <a:t>Adaptive Routing ✓</a:t>
             </a:r>
           </a:p>
         </p:txBody>
@@ -36869,7 +36869,7 @@
               </a:defRPr>
             </a:pPr>
             <a:r>
-              <a:t>Quantum Security</a:t>
+              <a:t>Quantum Security ✓</a:t>
             </a:r>
           </a:p>
         </p:txBody>
@@ -37188,7 +37188,7 @@
           </a:solidFill>
           <a:ln w="12700">
             <a:solidFill>
-              <a:srgbClr val="2ECC71"/>
+              <a:srgbClr val="009EFF"/>
             </a:solidFill>
           </a:ln>
           <a:effectLst/>
@@ -37214,7 +37214,7 @@
             <a:pPr algn="ctr">
               <a:defRPr sz="2400" b="1">
                 <a:solidFill>
-                  <a:srgbClr val="2ECC71"/>
+                  <a:srgbClr val="009EFF"/>
                 </a:solidFill>
                 <a:latin typeface="Calibri"/>
               </a:defRPr>
@@ -37239,7 +37239,7 @@
               </a:defRPr>
             </a:pPr>
             <a:r>
-              <a:t>Data Rate</a:t>
+              <a:t>Target Speedup ♦</a:t>
             </a:r>
           </a:p>
         </p:txBody>
@@ -37263,7 +37263,7 @@
           </a:solidFill>
           <a:ln w="12700">
             <a:solidFill>
-              <a:srgbClr val="009EFF"/>
+              <a:srgbClr val="2ECC71"/>
             </a:solidFill>
           </a:ln>
           <a:effectLst/>
@@ -37289,7 +37289,7 @@
             <a:pPr algn="ctr">
               <a:defRPr sz="2400" b="1">
                 <a:solidFill>
-                  <a:srgbClr val="009EFF"/>
+                  <a:srgbClr val="2ECC71"/>
                 </a:solidFill>
                 <a:latin typeface="Calibri"/>
               </a:defRPr>
@@ -37314,7 +37314,7 @@
               </a:defRPr>
             </a:pPr>
             <a:r>
-              <a:t>Availability (tgt)</a:t>
+              <a:t>Availability (target)</a:t>
             </a:r>
           </a:p>
         </p:txBody>
@@ -37389,7 +37389,7 @@
               </a:defRPr>
             </a:pPr>
             <a:r>
-              <a:t>Adaptive Routing</a:t>
+              <a:t>Adaptive Routing ✓</a:t>
             </a:r>
           </a:p>
         </p:txBody>
@@ -37464,7 +37464,7 @@
               </a:defRPr>
             </a:pPr>
             <a:r>
-              <a:t>Quantum Security</a:t>
+              <a:t>Quantum Security ✓</a:t>
             </a:r>
           </a:p>
         </p:txBody>
